--- a/docs/AHTH-Graph-Generator-Training.pptx
+++ b/docs/AHTH-Graph-Generator-Training.pptx
@@ -4,27 +4,24 @@
   <p:sldMasterIdLst>
     <p:sldMasterId id="2147483648" r:id="rId1"/>
   </p:sldMasterIdLst>
-  <p:notesMasterIdLst>
-    <p:notesMasterId r:id="rId17"/>
-  </p:notesMasterIdLst>
   <p:sldIdLst>
-    <p:sldId id="256" r:id="rId2"/>
-    <p:sldId id="257" r:id="rId3"/>
-    <p:sldId id="258" r:id="rId4"/>
-    <p:sldId id="259" r:id="rId5"/>
-    <p:sldId id="260" r:id="rId6"/>
-    <p:sldId id="261" r:id="rId7"/>
-    <p:sldId id="262" r:id="rId8"/>
-    <p:sldId id="263" r:id="rId9"/>
-    <p:sldId id="264" r:id="rId10"/>
-    <p:sldId id="265" r:id="rId11"/>
-    <p:sldId id="266" r:id="rId12"/>
-    <p:sldId id="267" r:id="rId13"/>
-    <p:sldId id="268" r:id="rId14"/>
-    <p:sldId id="269" r:id="rId15"/>
-    <p:sldId id="270" r:id="rId16"/>
+    <p:sldId id="256" r:id="rId7"/>
+    <p:sldId id="257" r:id="rId9"/>
+    <p:sldId id="258" r:id="rId10"/>
+    <p:sldId id="259" r:id="rId11"/>
+    <p:sldId id="260" r:id="rId12"/>
+    <p:sldId id="261" r:id="rId13"/>
+    <p:sldId id="262" r:id="rId14"/>
+    <p:sldId id="263" r:id="rId15"/>
+    <p:sldId id="264" r:id="rId16"/>
+    <p:sldId id="265" r:id="rId17"/>
+    <p:sldId id="266" r:id="rId18"/>
+    <p:sldId id="267" r:id="rId19"/>
+    <p:sldId id="268" r:id="rId20"/>
+    <p:sldId id="269" r:id="rId21"/>
+    <p:sldId id="270" r:id="rId22"/>
   </p:sldIdLst>
-  <p:sldSz cx="12192000" cy="6858000"/>
+  <p:sldSz cx="12191695" cy="6858000" type="screen4x3"/>
   <p:notesSz cx="6858000" cy="9144000"/>
   <p:defaultTextStyle>
     <a:defPPr>
@@ -121,27 +118,11 @@
       </a:defRPr>
     </a:lvl9pPr>
   </p:defaultTextStyle>
-  <p:extLst>
-    <p:ext uri="{EFAFB233-063F-42B5-8137-9DF3F51BA10A}">
-      <p15:sldGuideLst xmlns:p15="http://schemas.microsoft.com/office/powerpoint/2012/main">
-        <p15:guide id="1" orient="horz" pos="2160">
-          <p15:clr>
-            <a:srgbClr val="A4A3A4"/>
-          </p15:clr>
-        </p15:guide>
-        <p15:guide id="2" pos="2880">
-          <p15:clr>
-            <a:srgbClr val="A4A3A4"/>
-          </p15:clr>
-        </p15:guide>
-      </p15:sldGuideLst>
-    </p:ext>
-  </p:extLst>
 </p:presentation>
 </file>
 
 <file path=ppt/notesMasters/notesMaster1.xml><?xml version="1.0" encoding="utf-8"?>
-<p:notesMaster xmlns:a="http://schemas.openxmlformats.org/drawingml/2006/main" xmlns:r="http://schemas.openxmlformats.org/officeDocument/2006/relationships" xmlns:p="http://schemas.openxmlformats.org/presentationml/2006/main">
+<p:notesMaster xmlns:a="http://schemas.openxmlformats.org/drawingml/2006/main" xmlns:p="http://schemas.openxmlformats.org/presentationml/2006/main" xmlns:r="http://schemas.openxmlformats.org/officeDocument/2006/relationships">
   <p:cSld>
     <p:bg>
       <p:bgRef idx="1001">
@@ -162,16 +143,241 @@
           <a:chExt cx="0" cy="0"/>
         </a:xfrm>
       </p:grpSpPr>
+      <p:sp>
+        <p:nvSpPr>
+          <p:cNvPr id="2" name="Header Placeholder 1"/>
+          <p:cNvSpPr>
+            <a:spLocks noGrp="1"/>
+          </p:cNvSpPr>
+          <p:nvPr>
+            <p:ph type="hdr" sz="quarter"/>
+          </p:nvPr>
+        </p:nvSpPr>
+        <p:spPr>
+          <a:xfrm>
+            <a:off x="0" y="0"/>
+            <a:ext cx="2971800" cy="457200"/>
+          </a:xfrm>
+          <a:prstGeom prst="rect">
+            <a:avLst/>
+          </a:prstGeom>
+        </p:spPr>
+        <p:txBody>
+          <a:bodyPr vert="horz" lIns="91440" tIns="45720" rIns="91440" bIns="45720" rtlCol="0"/>
+          <a:lstStyle>
+            <a:lvl1pPr algn="l">
+              <a:defRPr sz="1200"/>
+            </a:lvl1pPr>
+          </a:lstStyle>
+          <a:p>
+            <a:endParaRPr lang="en-US"/>
+          </a:p>
+        </p:txBody>
+      </p:sp>
+      <p:sp>
+        <p:nvSpPr>
+          <p:cNvPr id="3" name="Date Placeholder 2"/>
+          <p:cNvSpPr>
+            <a:spLocks noGrp="1"/>
+          </p:cNvSpPr>
+          <p:nvPr>
+            <p:ph type="dt" idx="1"/>
+          </p:nvPr>
+        </p:nvSpPr>
+        <p:spPr>
+          <a:xfrm>
+            <a:off x="3884613" y="0"/>
+            <a:ext cx="2971800" cy="457200"/>
+          </a:xfrm>
+          <a:prstGeom prst="rect">
+            <a:avLst/>
+          </a:prstGeom>
+        </p:spPr>
+        <p:txBody>
+          <a:bodyPr vert="horz" lIns="91440" tIns="45720" rIns="91440" bIns="45720" rtlCol="0"/>
+          <a:lstStyle>
+            <a:lvl1pPr algn="r">
+              <a:defRPr sz="1200"/>
+            </a:lvl1pPr>
+          </a:lstStyle>
+          <a:p>
+            <a:fld id="{0F89C1C7-3DCD-1040-A9CF-14679D8B5DDD}" type="datetimeFigureOut">
+              <a:rPr lang="en-US" smtClean="0"/>
+              <a:t>10/17/16</a:t>
+            </a:fld>
+            <a:endParaRPr lang="en-US"/>
+          </a:p>
+        </p:txBody>
+      </p:sp>
+      <p:sp>
+        <p:nvSpPr>
+          <p:cNvPr id="4" name="Slide Image Placeholder 3"/>
+          <p:cNvSpPr>
+            <a:spLocks noGrp="1" noRot="1" noChangeAspect="1"/>
+          </p:cNvSpPr>
+          <p:nvPr>
+            <p:ph type="sldImg" idx="2"/>
+          </p:nvPr>
+        </p:nvSpPr>
+        <p:spPr>
+          <a:xfrm>
+            <a:off x="1143000" y="685800"/>
+            <a:ext cx="4572000" cy="3429000"/>
+          </a:xfrm>
+          <a:prstGeom prst="rect">
+            <a:avLst/>
+          </a:prstGeom>
+          <a:noFill/>
+          <a:ln w="12700">
+            <a:solidFill>
+              <a:prstClr val="black"/>
+            </a:solidFill>
+          </a:ln>
+        </p:spPr>
+        <p:txBody>
+          <a:bodyPr vert="horz" lIns="91440" tIns="45720" rIns="91440" bIns="45720" rtlCol="0" anchor="ctr"/>
+          <a:lstStyle/>
+          <a:p>
+            <a:endParaRPr lang="en-US"/>
+          </a:p>
+        </p:txBody>
+      </p:sp>
+      <p:sp>
+        <p:nvSpPr>
+          <p:cNvPr id="5" name="Notes Placeholder 4"/>
+          <p:cNvSpPr>
+            <a:spLocks noGrp="1"/>
+          </p:cNvSpPr>
+          <p:nvPr>
+            <p:ph type="body" sz="quarter" idx="3"/>
+          </p:nvPr>
+        </p:nvSpPr>
+        <p:spPr>
+          <a:xfrm>
+            <a:off x="685800" y="4343400"/>
+            <a:ext cx="5486400" cy="4114800"/>
+          </a:xfrm>
+          <a:prstGeom prst="rect">
+            <a:avLst/>
+          </a:prstGeom>
+        </p:spPr>
+        <p:txBody>
+          <a:bodyPr vert="horz" lIns="91440" tIns="45720" rIns="91440" bIns="45720" rtlCol="0"/>
+          <a:lstStyle/>
+          <a:p>
+            <a:pPr lvl="0"/>
+            <a:r>
+              <a:rPr lang="en-US" smtClean="0"/>
+              <a:t>Click to edit Master text styles</a:t>
+            </a:r>
+          </a:p>
+          <a:p>
+            <a:pPr lvl="1"/>
+            <a:r>
+              <a:rPr lang="en-US" smtClean="0"/>
+              <a:t>Second level</a:t>
+            </a:r>
+          </a:p>
+          <a:p>
+            <a:pPr lvl="2"/>
+            <a:r>
+              <a:rPr lang="en-US" smtClean="0"/>
+              <a:t>Third level</a:t>
+            </a:r>
+          </a:p>
+          <a:p>
+            <a:pPr lvl="3"/>
+            <a:r>
+              <a:rPr lang="en-US" smtClean="0"/>
+              <a:t>Fourth level</a:t>
+            </a:r>
+          </a:p>
+          <a:p>
+            <a:pPr lvl="4"/>
+            <a:r>
+              <a:rPr lang="en-US" smtClean="0"/>
+              <a:t>Fifth level</a:t>
+            </a:r>
+            <a:endParaRPr lang="en-US"/>
+          </a:p>
+        </p:txBody>
+      </p:sp>
+      <p:sp>
+        <p:nvSpPr>
+          <p:cNvPr id="6" name="Footer Placeholder 5"/>
+          <p:cNvSpPr>
+            <a:spLocks noGrp="1"/>
+          </p:cNvSpPr>
+          <p:nvPr>
+            <p:ph type="ftr" sz="quarter" idx="4"/>
+          </p:nvPr>
+        </p:nvSpPr>
+        <p:spPr>
+          <a:xfrm>
+            <a:off x="0" y="8685213"/>
+            <a:ext cx="2971800" cy="457200"/>
+          </a:xfrm>
+          <a:prstGeom prst="rect">
+            <a:avLst/>
+          </a:prstGeom>
+        </p:spPr>
+        <p:txBody>
+          <a:bodyPr vert="horz" lIns="91440" tIns="45720" rIns="91440" bIns="45720" rtlCol="0" anchor="b"/>
+          <a:lstStyle>
+            <a:lvl1pPr algn="l">
+              <a:defRPr sz="1200"/>
+            </a:lvl1pPr>
+          </a:lstStyle>
+          <a:p>
+            <a:endParaRPr lang="en-US"/>
+          </a:p>
+        </p:txBody>
+      </p:sp>
+      <p:sp>
+        <p:nvSpPr>
+          <p:cNvPr id="7" name="Slide Number Placeholder 6"/>
+          <p:cNvSpPr>
+            <a:spLocks noGrp="1"/>
+          </p:cNvSpPr>
+          <p:nvPr>
+            <p:ph type="sldNum" sz="quarter" idx="5"/>
+          </p:nvPr>
+        </p:nvSpPr>
+        <p:spPr>
+          <a:xfrm>
+            <a:off x="3884613" y="8685213"/>
+            <a:ext cx="2971800" cy="457200"/>
+          </a:xfrm>
+          <a:prstGeom prst="rect">
+            <a:avLst/>
+          </a:prstGeom>
+        </p:spPr>
+        <p:txBody>
+          <a:bodyPr vert="horz" lIns="91440" tIns="45720" rIns="91440" bIns="45720" rtlCol="0" anchor="b"/>
+          <a:lstStyle>
+            <a:lvl1pPr algn="r">
+              <a:defRPr sz="1200"/>
+            </a:lvl1pPr>
+          </a:lstStyle>
+          <a:p>
+            <a:fld id="{BB5E49A5-4136-284D-997B-48E1D791AD67}" type="slidenum">
+              <a:rPr lang="en-US" smtClean="0"/>
+              <a:t>‹#›</a:t>
+            </a:fld>
+            <a:endParaRPr lang="en-US"/>
+          </a:p>
+        </p:txBody>
+      </p:sp>
     </p:spTree>
     <p:extLst>
       <p:ext uri="{BB962C8B-B14F-4D97-AF65-F5344CB8AC3E}">
-        <p14:creationId xmlns:p14="http://schemas.microsoft.com/office/powerpoint/2010/main" val="3421038932"/>
+        <p14:creationId xmlns:p14="http://schemas.microsoft.com/office/powerpoint/2010/main" val="2623252185"/>
       </p:ext>
     </p:extLst>
   </p:cSld>
   <p:clrMap bg1="lt1" tx1="dk1" bg2="lt2" tx2="dk2" accent1="accent1" accent2="accent2" accent3="accent3" accent4="accent4" accent5="accent5" accent6="accent6" hlink="hlink" folHlink="folHlink"/>
   <p:notesStyle>
-    <a:lvl1pPr marL="0" algn="l" defTabSz="914400" rtl="0" eaLnBrk="1" latinLnBrk="0" hangingPunct="1">
+    <a:lvl1pPr marL="0" algn="l" defTabSz="457200" rtl="0" eaLnBrk="1" latinLnBrk="0" hangingPunct="1">
       <a:defRPr sz="1200" kern="1200">
         <a:solidFill>
           <a:schemeClr val="tx1"/>
@@ -181,7 +387,7 @@
         <a:cs typeface="+mn-cs"/>
       </a:defRPr>
     </a:lvl1pPr>
-    <a:lvl2pPr marL="457200" algn="l" defTabSz="914400" rtl="0" eaLnBrk="1" latinLnBrk="0" hangingPunct="1">
+    <a:lvl2pPr marL="457200" algn="l" defTabSz="457200" rtl="0" eaLnBrk="1" latinLnBrk="0" hangingPunct="1">
       <a:defRPr sz="1200" kern="1200">
         <a:solidFill>
           <a:schemeClr val="tx1"/>
@@ -191,7 +397,7 @@
         <a:cs typeface="+mn-cs"/>
       </a:defRPr>
     </a:lvl2pPr>
-    <a:lvl3pPr marL="914400" algn="l" defTabSz="914400" rtl="0" eaLnBrk="1" latinLnBrk="0" hangingPunct="1">
+    <a:lvl3pPr marL="914400" algn="l" defTabSz="457200" rtl="0" eaLnBrk="1" latinLnBrk="0" hangingPunct="1">
       <a:defRPr sz="1200" kern="1200">
         <a:solidFill>
           <a:schemeClr val="tx1"/>
@@ -201,7 +407,7 @@
         <a:cs typeface="+mn-cs"/>
       </a:defRPr>
     </a:lvl3pPr>
-    <a:lvl4pPr marL="1371600" algn="l" defTabSz="914400" rtl="0" eaLnBrk="1" latinLnBrk="0" hangingPunct="1">
+    <a:lvl4pPr marL="1371600" algn="l" defTabSz="457200" rtl="0" eaLnBrk="1" latinLnBrk="0" hangingPunct="1">
       <a:defRPr sz="1200" kern="1200">
         <a:solidFill>
           <a:schemeClr val="tx1"/>
@@ -211,7 +417,7 @@
         <a:cs typeface="+mn-cs"/>
       </a:defRPr>
     </a:lvl4pPr>
-    <a:lvl5pPr marL="1828800" algn="l" defTabSz="914400" rtl="0" eaLnBrk="1" latinLnBrk="0" hangingPunct="1">
+    <a:lvl5pPr marL="1828800" algn="l" defTabSz="457200" rtl="0" eaLnBrk="1" latinLnBrk="0" hangingPunct="1">
       <a:defRPr sz="1200" kern="1200">
         <a:solidFill>
           <a:schemeClr val="tx1"/>
@@ -221,7 +427,7 @@
         <a:cs typeface="+mn-cs"/>
       </a:defRPr>
     </a:lvl5pPr>
-    <a:lvl6pPr marL="2286000" algn="l" defTabSz="914400" rtl="0" eaLnBrk="1" latinLnBrk="0" hangingPunct="1">
+    <a:lvl6pPr marL="2286000" algn="l" defTabSz="457200" rtl="0" eaLnBrk="1" latinLnBrk="0" hangingPunct="1">
       <a:defRPr sz="1200" kern="1200">
         <a:solidFill>
           <a:schemeClr val="tx1"/>
@@ -231,7 +437,7 @@
         <a:cs typeface="+mn-cs"/>
       </a:defRPr>
     </a:lvl6pPr>
-    <a:lvl7pPr marL="2743200" algn="l" defTabSz="914400" rtl="0" eaLnBrk="1" latinLnBrk="0" hangingPunct="1">
+    <a:lvl7pPr marL="2743200" algn="l" defTabSz="457200" rtl="0" eaLnBrk="1" latinLnBrk="0" hangingPunct="1">
       <a:defRPr sz="1200" kern="1200">
         <a:solidFill>
           <a:schemeClr val="tx1"/>
@@ -241,7 +447,7 @@
         <a:cs typeface="+mn-cs"/>
       </a:defRPr>
     </a:lvl7pPr>
-    <a:lvl8pPr marL="3200400" algn="l" defTabSz="914400" rtl="0" eaLnBrk="1" latinLnBrk="0" hangingPunct="1">
+    <a:lvl8pPr marL="3200400" algn="l" defTabSz="457200" rtl="0" eaLnBrk="1" latinLnBrk="0" hangingPunct="1">
       <a:defRPr sz="1200" kern="1200">
         <a:solidFill>
           <a:schemeClr val="tx1"/>
@@ -251,7 +457,7 @@
         <a:cs typeface="+mn-cs"/>
       </a:defRPr>
     </a:lvl8pPr>
-    <a:lvl9pPr marL="3657600" algn="l" defTabSz="914400" rtl="0" eaLnBrk="1" latinLnBrk="0" hangingPunct="1">
+    <a:lvl9pPr marL="3657600" algn="l" defTabSz="457200" rtl="0" eaLnBrk="1" latinLnBrk="0" hangingPunct="1">
       <a:defRPr sz="1200" kern="1200">
         <a:solidFill>
           <a:schemeClr val="tx1"/>
@@ -266,7 +472,7 @@
 </file>
 
 <file path=ppt/notesSlides/notesSlide1.xml><?xml version="1.0" encoding="utf-8"?>
-<p:notes xmlns:a="http://schemas.openxmlformats.org/drawingml/2006/main" xmlns:r="http://schemas.openxmlformats.org/officeDocument/2006/relationships" xmlns:p="http://schemas.openxmlformats.org/presentationml/2006/main">
+<p:notes xmlns:a="http://schemas.openxmlformats.org/drawingml/2006/main" xmlns:p="http://schemas.openxmlformats.org/presentationml/2006/main" xmlns:r="http://schemas.openxmlformats.org/officeDocument/2006/relationships">
   <p:cSld>
     <p:spTree>
       <p:nvGrpSpPr>
@@ -286,7 +492,7 @@
         <p:nvSpPr>
           <p:cNvPr id="2" name="Slide Image Placeholder 1"/>
           <p:cNvSpPr>
-            <a:spLocks noGrp="1" noRot="1" noChangeAspect="1"/>
+            <a:spLocks noGrp="1"/>
           </p:cNvSpPr>
           <p:nvPr>
             <p:ph type="sldImg" idx="2"/>
@@ -301,7 +507,7 @@
             <a:spLocks noGrp="1"/>
           </p:cNvSpPr>
           <p:nvPr>
-            <p:ph type="body" sz="quarter" idx="3"/>
+            <p:ph type="body" idx="3" sz="quarter"/>
           </p:nvPr>
         </p:nvSpPr>
         <p:spPr/>
@@ -322,7 +528,7 @@
             <a:spLocks noGrp="1"/>
           </p:cNvSpPr>
           <p:nvPr>
-            <p:ph type="sldNum" sz="quarter" idx="5"/>
+            <p:ph type="sldNum" idx="5" sz="quarter"/>
           </p:nvPr>
         </p:nvSpPr>
         <p:spPr/>
@@ -336,7 +542,7 @@
 </file>
 
 <file path=ppt/notesSlides/notesSlide10.xml><?xml version="1.0" encoding="utf-8"?>
-<p:notes xmlns:a="http://schemas.openxmlformats.org/drawingml/2006/main" xmlns:r="http://schemas.openxmlformats.org/officeDocument/2006/relationships" xmlns:p="http://schemas.openxmlformats.org/presentationml/2006/main">
+<p:notes xmlns:a="http://schemas.openxmlformats.org/drawingml/2006/main" xmlns:p="http://schemas.openxmlformats.org/presentationml/2006/main" xmlns:r="http://schemas.openxmlformats.org/officeDocument/2006/relationships">
   <p:cSld>
     <p:spTree>
       <p:nvGrpSpPr>
@@ -356,7 +562,7 @@
         <p:nvSpPr>
           <p:cNvPr id="2" name="Slide Image Placeholder 1"/>
           <p:cNvSpPr>
-            <a:spLocks noGrp="1" noRot="1" noChangeAspect="1"/>
+            <a:spLocks noGrp="1"/>
           </p:cNvSpPr>
           <p:nvPr>
             <p:ph type="sldImg" idx="2"/>
@@ -371,7 +577,7 @@
             <a:spLocks noGrp="1"/>
           </p:cNvSpPr>
           <p:nvPr>
-            <p:ph type="body" sz="quarter" idx="3"/>
+            <p:ph type="body" idx="3" sz="quarter"/>
           </p:nvPr>
         </p:nvSpPr>
         <p:spPr/>
@@ -392,7 +598,7 @@
             <a:spLocks noGrp="1"/>
           </p:cNvSpPr>
           <p:nvPr>
-            <p:ph type="sldNum" sz="quarter" idx="5"/>
+            <p:ph type="sldNum" idx="5" sz="quarter"/>
           </p:nvPr>
         </p:nvSpPr>
         <p:spPr/>
@@ -406,7 +612,7 @@
 </file>
 
 <file path=ppt/notesSlides/notesSlide11.xml><?xml version="1.0" encoding="utf-8"?>
-<p:notes xmlns:a="http://schemas.openxmlformats.org/drawingml/2006/main" xmlns:r="http://schemas.openxmlformats.org/officeDocument/2006/relationships" xmlns:p="http://schemas.openxmlformats.org/presentationml/2006/main">
+<p:notes xmlns:a="http://schemas.openxmlformats.org/drawingml/2006/main" xmlns:p="http://schemas.openxmlformats.org/presentationml/2006/main" xmlns:r="http://schemas.openxmlformats.org/officeDocument/2006/relationships">
   <p:cSld>
     <p:spTree>
       <p:nvGrpSpPr>
@@ -426,7 +632,7 @@
         <p:nvSpPr>
           <p:cNvPr id="2" name="Slide Image Placeholder 1"/>
           <p:cNvSpPr>
-            <a:spLocks noGrp="1" noRot="1" noChangeAspect="1"/>
+            <a:spLocks noGrp="1"/>
           </p:cNvSpPr>
           <p:nvPr>
             <p:ph type="sldImg" idx="2"/>
@@ -441,7 +647,7 @@
             <a:spLocks noGrp="1"/>
           </p:cNvSpPr>
           <p:nvPr>
-            <p:ph type="body" sz="quarter" idx="3"/>
+            <p:ph type="body" idx="3" sz="quarter"/>
           </p:nvPr>
         </p:nvSpPr>
         <p:spPr/>
@@ -462,7 +668,7 @@
             <a:spLocks noGrp="1"/>
           </p:cNvSpPr>
           <p:nvPr>
-            <p:ph type="sldNum" sz="quarter" idx="5"/>
+            <p:ph type="sldNum" idx="5" sz="quarter"/>
           </p:nvPr>
         </p:nvSpPr>
         <p:spPr/>
@@ -476,7 +682,7 @@
 </file>
 
 <file path=ppt/notesSlides/notesSlide12.xml><?xml version="1.0" encoding="utf-8"?>
-<p:notes xmlns:a="http://schemas.openxmlformats.org/drawingml/2006/main" xmlns:r="http://schemas.openxmlformats.org/officeDocument/2006/relationships" xmlns:p="http://schemas.openxmlformats.org/presentationml/2006/main">
+<p:notes xmlns:a="http://schemas.openxmlformats.org/drawingml/2006/main" xmlns:p="http://schemas.openxmlformats.org/presentationml/2006/main" xmlns:r="http://schemas.openxmlformats.org/officeDocument/2006/relationships">
   <p:cSld>
     <p:spTree>
       <p:nvGrpSpPr>
@@ -496,7 +702,7 @@
         <p:nvSpPr>
           <p:cNvPr id="2" name="Slide Image Placeholder 1"/>
           <p:cNvSpPr>
-            <a:spLocks noGrp="1" noRot="1" noChangeAspect="1"/>
+            <a:spLocks noGrp="1"/>
           </p:cNvSpPr>
           <p:nvPr>
             <p:ph type="sldImg" idx="2"/>
@@ -511,7 +717,7 @@
             <a:spLocks noGrp="1"/>
           </p:cNvSpPr>
           <p:nvPr>
-            <p:ph type="body" sz="quarter" idx="3"/>
+            <p:ph type="body" idx="3" sz="quarter"/>
           </p:nvPr>
         </p:nvSpPr>
         <p:spPr/>
@@ -532,7 +738,7 @@
             <a:spLocks noGrp="1"/>
           </p:cNvSpPr>
           <p:nvPr>
-            <p:ph type="sldNum" sz="quarter" idx="5"/>
+            <p:ph type="sldNum" idx="5" sz="quarter"/>
           </p:nvPr>
         </p:nvSpPr>
         <p:spPr/>
@@ -546,7 +752,7 @@
 </file>
 
 <file path=ppt/notesSlides/notesSlide13.xml><?xml version="1.0" encoding="utf-8"?>
-<p:notes xmlns:a="http://schemas.openxmlformats.org/drawingml/2006/main" xmlns:r="http://schemas.openxmlformats.org/officeDocument/2006/relationships" xmlns:p="http://schemas.openxmlformats.org/presentationml/2006/main">
+<p:notes xmlns:a="http://schemas.openxmlformats.org/drawingml/2006/main" xmlns:p="http://schemas.openxmlformats.org/presentationml/2006/main" xmlns:r="http://schemas.openxmlformats.org/officeDocument/2006/relationships">
   <p:cSld>
     <p:spTree>
       <p:nvGrpSpPr>
@@ -566,7 +772,7 @@
         <p:nvSpPr>
           <p:cNvPr id="2" name="Slide Image Placeholder 1"/>
           <p:cNvSpPr>
-            <a:spLocks noGrp="1" noRot="1" noChangeAspect="1"/>
+            <a:spLocks noGrp="1"/>
           </p:cNvSpPr>
           <p:nvPr>
             <p:ph type="sldImg" idx="2"/>
@@ -581,7 +787,7 @@
             <a:spLocks noGrp="1"/>
           </p:cNvSpPr>
           <p:nvPr>
-            <p:ph type="body" sz="quarter" idx="3"/>
+            <p:ph type="body" idx="3" sz="quarter"/>
           </p:nvPr>
         </p:nvSpPr>
         <p:spPr/>
@@ -602,7 +808,7 @@
             <a:spLocks noGrp="1"/>
           </p:cNvSpPr>
           <p:nvPr>
-            <p:ph type="sldNum" sz="quarter" idx="5"/>
+            <p:ph type="sldNum" idx="5" sz="quarter"/>
           </p:nvPr>
         </p:nvSpPr>
         <p:spPr/>
@@ -616,7 +822,7 @@
 </file>
 
 <file path=ppt/notesSlides/notesSlide14.xml><?xml version="1.0" encoding="utf-8"?>
-<p:notes xmlns:a="http://schemas.openxmlformats.org/drawingml/2006/main" xmlns:r="http://schemas.openxmlformats.org/officeDocument/2006/relationships" xmlns:p="http://schemas.openxmlformats.org/presentationml/2006/main">
+<p:notes xmlns:a="http://schemas.openxmlformats.org/drawingml/2006/main" xmlns:p="http://schemas.openxmlformats.org/presentationml/2006/main" xmlns:r="http://schemas.openxmlformats.org/officeDocument/2006/relationships">
   <p:cSld>
     <p:spTree>
       <p:nvGrpSpPr>
@@ -636,7 +842,7 @@
         <p:nvSpPr>
           <p:cNvPr id="2" name="Slide Image Placeholder 1"/>
           <p:cNvSpPr>
-            <a:spLocks noGrp="1" noRot="1" noChangeAspect="1"/>
+            <a:spLocks noGrp="1"/>
           </p:cNvSpPr>
           <p:nvPr>
             <p:ph type="sldImg" idx="2"/>
@@ -651,7 +857,7 @@
             <a:spLocks noGrp="1"/>
           </p:cNvSpPr>
           <p:nvPr>
-            <p:ph type="body" sz="quarter" idx="3"/>
+            <p:ph type="body" idx="3" sz="quarter"/>
           </p:nvPr>
         </p:nvSpPr>
         <p:spPr/>
@@ -672,7 +878,7 @@
             <a:spLocks noGrp="1"/>
           </p:cNvSpPr>
           <p:nvPr>
-            <p:ph type="sldNum" sz="quarter" idx="5"/>
+            <p:ph type="sldNum" idx="5" sz="quarter"/>
           </p:nvPr>
         </p:nvSpPr>
         <p:spPr/>
@@ -686,7 +892,7 @@
 </file>
 
 <file path=ppt/notesSlides/notesSlide15.xml><?xml version="1.0" encoding="utf-8"?>
-<p:notes xmlns:a="http://schemas.openxmlformats.org/drawingml/2006/main" xmlns:r="http://schemas.openxmlformats.org/officeDocument/2006/relationships" xmlns:p="http://schemas.openxmlformats.org/presentationml/2006/main">
+<p:notes xmlns:a="http://schemas.openxmlformats.org/drawingml/2006/main" xmlns:p="http://schemas.openxmlformats.org/presentationml/2006/main" xmlns:r="http://schemas.openxmlformats.org/officeDocument/2006/relationships">
   <p:cSld>
     <p:spTree>
       <p:nvGrpSpPr>
@@ -706,7 +912,7 @@
         <p:nvSpPr>
           <p:cNvPr id="2" name="Slide Image Placeholder 1"/>
           <p:cNvSpPr>
-            <a:spLocks noGrp="1" noRot="1" noChangeAspect="1"/>
+            <a:spLocks noGrp="1"/>
           </p:cNvSpPr>
           <p:nvPr>
             <p:ph type="sldImg" idx="2"/>
@@ -721,7 +927,7 @@
             <a:spLocks noGrp="1"/>
           </p:cNvSpPr>
           <p:nvPr>
-            <p:ph type="body" sz="quarter" idx="3"/>
+            <p:ph type="body" idx="3" sz="quarter"/>
           </p:nvPr>
         </p:nvSpPr>
         <p:spPr/>
@@ -742,7 +948,7 @@
             <a:spLocks noGrp="1"/>
           </p:cNvSpPr>
           <p:nvPr>
-            <p:ph type="sldNum" sz="quarter" idx="5"/>
+            <p:ph type="sldNum" idx="5" sz="quarter"/>
           </p:nvPr>
         </p:nvSpPr>
         <p:spPr/>
@@ -756,7 +962,7 @@
 </file>
 
 <file path=ppt/notesSlides/notesSlide2.xml><?xml version="1.0" encoding="utf-8"?>
-<p:notes xmlns:a="http://schemas.openxmlformats.org/drawingml/2006/main" xmlns:r="http://schemas.openxmlformats.org/officeDocument/2006/relationships" xmlns:p="http://schemas.openxmlformats.org/presentationml/2006/main">
+<p:notes xmlns:a="http://schemas.openxmlformats.org/drawingml/2006/main" xmlns:p="http://schemas.openxmlformats.org/presentationml/2006/main" xmlns:r="http://schemas.openxmlformats.org/officeDocument/2006/relationships">
   <p:cSld>
     <p:spTree>
       <p:nvGrpSpPr>
@@ -776,7 +982,7 @@
         <p:nvSpPr>
           <p:cNvPr id="2" name="Slide Image Placeholder 1"/>
           <p:cNvSpPr>
-            <a:spLocks noGrp="1" noRot="1" noChangeAspect="1"/>
+            <a:spLocks noGrp="1"/>
           </p:cNvSpPr>
           <p:nvPr>
             <p:ph type="sldImg" idx="2"/>
@@ -791,7 +997,7 @@
             <a:spLocks noGrp="1"/>
           </p:cNvSpPr>
           <p:nvPr>
-            <p:ph type="body" sz="quarter" idx="3"/>
+            <p:ph type="body" idx="3" sz="quarter"/>
           </p:nvPr>
         </p:nvSpPr>
         <p:spPr/>
@@ -812,7 +1018,7 @@
             <a:spLocks noGrp="1"/>
           </p:cNvSpPr>
           <p:nvPr>
-            <p:ph type="sldNum" sz="quarter" idx="5"/>
+            <p:ph type="sldNum" idx="5" sz="quarter"/>
           </p:nvPr>
         </p:nvSpPr>
         <p:spPr/>
@@ -826,7 +1032,7 @@
 </file>
 
 <file path=ppt/notesSlides/notesSlide3.xml><?xml version="1.0" encoding="utf-8"?>
-<p:notes xmlns:a="http://schemas.openxmlformats.org/drawingml/2006/main" xmlns:r="http://schemas.openxmlformats.org/officeDocument/2006/relationships" xmlns:p="http://schemas.openxmlformats.org/presentationml/2006/main">
+<p:notes xmlns:a="http://schemas.openxmlformats.org/drawingml/2006/main" xmlns:p="http://schemas.openxmlformats.org/presentationml/2006/main" xmlns:r="http://schemas.openxmlformats.org/officeDocument/2006/relationships">
   <p:cSld>
     <p:spTree>
       <p:nvGrpSpPr>
@@ -846,7 +1052,7 @@
         <p:nvSpPr>
           <p:cNvPr id="2" name="Slide Image Placeholder 1"/>
           <p:cNvSpPr>
-            <a:spLocks noGrp="1" noRot="1" noChangeAspect="1"/>
+            <a:spLocks noGrp="1"/>
           </p:cNvSpPr>
           <p:nvPr>
             <p:ph type="sldImg" idx="2"/>
@@ -861,7 +1067,7 @@
             <a:spLocks noGrp="1"/>
           </p:cNvSpPr>
           <p:nvPr>
-            <p:ph type="body" sz="quarter" idx="3"/>
+            <p:ph type="body" idx="3" sz="quarter"/>
           </p:nvPr>
         </p:nvSpPr>
         <p:spPr/>
@@ -882,7 +1088,7 @@
             <a:spLocks noGrp="1"/>
           </p:cNvSpPr>
           <p:nvPr>
-            <p:ph type="sldNum" sz="quarter" idx="5"/>
+            <p:ph type="sldNum" idx="5" sz="quarter"/>
           </p:nvPr>
         </p:nvSpPr>
         <p:spPr/>
@@ -896,7 +1102,7 @@
 </file>
 
 <file path=ppt/notesSlides/notesSlide4.xml><?xml version="1.0" encoding="utf-8"?>
-<p:notes xmlns:a="http://schemas.openxmlformats.org/drawingml/2006/main" xmlns:r="http://schemas.openxmlformats.org/officeDocument/2006/relationships" xmlns:p="http://schemas.openxmlformats.org/presentationml/2006/main">
+<p:notes xmlns:a="http://schemas.openxmlformats.org/drawingml/2006/main" xmlns:p="http://schemas.openxmlformats.org/presentationml/2006/main" xmlns:r="http://schemas.openxmlformats.org/officeDocument/2006/relationships">
   <p:cSld>
     <p:spTree>
       <p:nvGrpSpPr>
@@ -916,7 +1122,7 @@
         <p:nvSpPr>
           <p:cNvPr id="2" name="Slide Image Placeholder 1"/>
           <p:cNvSpPr>
-            <a:spLocks noGrp="1" noRot="1" noChangeAspect="1"/>
+            <a:spLocks noGrp="1"/>
           </p:cNvSpPr>
           <p:nvPr>
             <p:ph type="sldImg" idx="2"/>
@@ -931,7 +1137,7 @@
             <a:spLocks noGrp="1"/>
           </p:cNvSpPr>
           <p:nvPr>
-            <p:ph type="body" sz="quarter" idx="3"/>
+            <p:ph type="body" idx="3" sz="quarter"/>
           </p:nvPr>
         </p:nvSpPr>
         <p:spPr/>
@@ -952,7 +1158,7 @@
             <a:spLocks noGrp="1"/>
           </p:cNvSpPr>
           <p:nvPr>
-            <p:ph type="sldNum" sz="quarter" idx="5"/>
+            <p:ph type="sldNum" idx="5" sz="quarter"/>
           </p:nvPr>
         </p:nvSpPr>
         <p:spPr/>
@@ -966,7 +1172,7 @@
 </file>
 
 <file path=ppt/notesSlides/notesSlide5.xml><?xml version="1.0" encoding="utf-8"?>
-<p:notes xmlns:a="http://schemas.openxmlformats.org/drawingml/2006/main" xmlns:r="http://schemas.openxmlformats.org/officeDocument/2006/relationships" xmlns:p="http://schemas.openxmlformats.org/presentationml/2006/main">
+<p:notes xmlns:a="http://schemas.openxmlformats.org/drawingml/2006/main" xmlns:p="http://schemas.openxmlformats.org/presentationml/2006/main" xmlns:r="http://schemas.openxmlformats.org/officeDocument/2006/relationships">
   <p:cSld>
     <p:spTree>
       <p:nvGrpSpPr>
@@ -986,7 +1192,7 @@
         <p:nvSpPr>
           <p:cNvPr id="2" name="Slide Image Placeholder 1"/>
           <p:cNvSpPr>
-            <a:spLocks noGrp="1" noRot="1" noChangeAspect="1"/>
+            <a:spLocks noGrp="1"/>
           </p:cNvSpPr>
           <p:nvPr>
             <p:ph type="sldImg" idx="2"/>
@@ -1001,7 +1207,7 @@
             <a:spLocks noGrp="1"/>
           </p:cNvSpPr>
           <p:nvPr>
-            <p:ph type="body" sz="quarter" idx="3"/>
+            <p:ph type="body" idx="3" sz="quarter"/>
           </p:nvPr>
         </p:nvSpPr>
         <p:spPr/>
@@ -1022,7 +1228,7 @@
             <a:spLocks noGrp="1"/>
           </p:cNvSpPr>
           <p:nvPr>
-            <p:ph type="sldNum" sz="quarter" idx="5"/>
+            <p:ph type="sldNum" idx="5" sz="quarter"/>
           </p:nvPr>
         </p:nvSpPr>
         <p:spPr/>
@@ -1036,7 +1242,7 @@
 </file>
 
 <file path=ppt/notesSlides/notesSlide6.xml><?xml version="1.0" encoding="utf-8"?>
-<p:notes xmlns:a="http://schemas.openxmlformats.org/drawingml/2006/main" xmlns:r="http://schemas.openxmlformats.org/officeDocument/2006/relationships" xmlns:p="http://schemas.openxmlformats.org/presentationml/2006/main">
+<p:notes xmlns:a="http://schemas.openxmlformats.org/drawingml/2006/main" xmlns:p="http://schemas.openxmlformats.org/presentationml/2006/main" xmlns:r="http://schemas.openxmlformats.org/officeDocument/2006/relationships">
   <p:cSld>
     <p:spTree>
       <p:nvGrpSpPr>
@@ -1056,7 +1262,7 @@
         <p:nvSpPr>
           <p:cNvPr id="2" name="Slide Image Placeholder 1"/>
           <p:cNvSpPr>
-            <a:spLocks noGrp="1" noRot="1" noChangeAspect="1"/>
+            <a:spLocks noGrp="1"/>
           </p:cNvSpPr>
           <p:nvPr>
             <p:ph type="sldImg" idx="2"/>
@@ -1071,7 +1277,7 @@
             <a:spLocks noGrp="1"/>
           </p:cNvSpPr>
           <p:nvPr>
-            <p:ph type="body" sz="quarter" idx="3"/>
+            <p:ph type="body" idx="3" sz="quarter"/>
           </p:nvPr>
         </p:nvSpPr>
         <p:spPr/>
@@ -1092,7 +1298,7 @@
             <a:spLocks noGrp="1"/>
           </p:cNvSpPr>
           <p:nvPr>
-            <p:ph type="sldNum" sz="quarter" idx="5"/>
+            <p:ph type="sldNum" idx="5" sz="quarter"/>
           </p:nvPr>
         </p:nvSpPr>
         <p:spPr/>
@@ -1106,7 +1312,7 @@
 </file>
 
 <file path=ppt/notesSlides/notesSlide7.xml><?xml version="1.0" encoding="utf-8"?>
-<p:notes xmlns:a="http://schemas.openxmlformats.org/drawingml/2006/main" xmlns:r="http://schemas.openxmlformats.org/officeDocument/2006/relationships" xmlns:p="http://schemas.openxmlformats.org/presentationml/2006/main">
+<p:notes xmlns:a="http://schemas.openxmlformats.org/drawingml/2006/main" xmlns:p="http://schemas.openxmlformats.org/presentationml/2006/main" xmlns:r="http://schemas.openxmlformats.org/officeDocument/2006/relationships">
   <p:cSld>
     <p:spTree>
       <p:nvGrpSpPr>
@@ -1126,7 +1332,7 @@
         <p:nvSpPr>
           <p:cNvPr id="2" name="Slide Image Placeholder 1"/>
           <p:cNvSpPr>
-            <a:spLocks noGrp="1" noRot="1" noChangeAspect="1"/>
+            <a:spLocks noGrp="1"/>
           </p:cNvSpPr>
           <p:nvPr>
             <p:ph type="sldImg" idx="2"/>
@@ -1141,7 +1347,7 @@
             <a:spLocks noGrp="1"/>
           </p:cNvSpPr>
           <p:nvPr>
-            <p:ph type="body" sz="quarter" idx="3"/>
+            <p:ph type="body" idx="3" sz="quarter"/>
           </p:nvPr>
         </p:nvSpPr>
         <p:spPr/>
@@ -1162,7 +1368,7 @@
             <a:spLocks noGrp="1"/>
           </p:cNvSpPr>
           <p:nvPr>
-            <p:ph type="sldNum" sz="quarter" idx="5"/>
+            <p:ph type="sldNum" idx="5" sz="quarter"/>
           </p:nvPr>
         </p:nvSpPr>
         <p:spPr/>
@@ -1176,7 +1382,7 @@
 </file>
 
 <file path=ppt/notesSlides/notesSlide8.xml><?xml version="1.0" encoding="utf-8"?>
-<p:notes xmlns:a="http://schemas.openxmlformats.org/drawingml/2006/main" xmlns:r="http://schemas.openxmlformats.org/officeDocument/2006/relationships" xmlns:p="http://schemas.openxmlformats.org/presentationml/2006/main">
+<p:notes xmlns:a="http://schemas.openxmlformats.org/drawingml/2006/main" xmlns:p="http://schemas.openxmlformats.org/presentationml/2006/main" xmlns:r="http://schemas.openxmlformats.org/officeDocument/2006/relationships">
   <p:cSld>
     <p:spTree>
       <p:nvGrpSpPr>
@@ -1196,7 +1402,7 @@
         <p:nvSpPr>
           <p:cNvPr id="2" name="Slide Image Placeholder 1"/>
           <p:cNvSpPr>
-            <a:spLocks noGrp="1" noRot="1" noChangeAspect="1"/>
+            <a:spLocks noGrp="1"/>
           </p:cNvSpPr>
           <p:nvPr>
             <p:ph type="sldImg" idx="2"/>
@@ -1211,7 +1417,7 @@
             <a:spLocks noGrp="1"/>
           </p:cNvSpPr>
           <p:nvPr>
-            <p:ph type="body" sz="quarter" idx="3"/>
+            <p:ph type="body" idx="3" sz="quarter"/>
           </p:nvPr>
         </p:nvSpPr>
         <p:spPr/>
@@ -1232,7 +1438,7 @@
             <a:spLocks noGrp="1"/>
           </p:cNvSpPr>
           <p:nvPr>
-            <p:ph type="sldNum" sz="quarter" idx="5"/>
+            <p:ph type="sldNum" idx="5" sz="quarter"/>
           </p:nvPr>
         </p:nvSpPr>
         <p:spPr/>
@@ -1246,7 +1452,7 @@
 </file>
 
 <file path=ppt/notesSlides/notesSlide9.xml><?xml version="1.0" encoding="utf-8"?>
-<p:notes xmlns:a="http://schemas.openxmlformats.org/drawingml/2006/main" xmlns:r="http://schemas.openxmlformats.org/officeDocument/2006/relationships" xmlns:p="http://schemas.openxmlformats.org/presentationml/2006/main">
+<p:notes xmlns:a="http://schemas.openxmlformats.org/drawingml/2006/main" xmlns:p="http://schemas.openxmlformats.org/presentationml/2006/main" xmlns:r="http://schemas.openxmlformats.org/officeDocument/2006/relationships">
   <p:cSld>
     <p:spTree>
       <p:nvGrpSpPr>
@@ -1266,7 +1472,7 @@
         <p:nvSpPr>
           <p:cNvPr id="2" name="Slide Image Placeholder 1"/>
           <p:cNvSpPr>
-            <a:spLocks noGrp="1" noRot="1" noChangeAspect="1"/>
+            <a:spLocks noGrp="1"/>
           </p:cNvSpPr>
           <p:nvPr>
             <p:ph type="sldImg" idx="2"/>
@@ -1281,7 +1487,7 @@
             <a:spLocks noGrp="1"/>
           </p:cNvSpPr>
           <p:nvPr>
-            <p:ph type="body" sz="quarter" idx="3"/>
+            <p:ph type="body" idx="3" sz="quarter"/>
           </p:nvPr>
         </p:nvSpPr>
         <p:spPr/>
@@ -1302,7 +1508,7 @@
             <a:spLocks noGrp="1"/>
           </p:cNvSpPr>
           <p:nvPr>
-            <p:ph type="sldNum" sz="quarter" idx="5"/>
+            <p:ph type="sldNum" idx="5" sz="quarter"/>
           </p:nvPr>
         </p:nvSpPr>
         <p:spPr/>
@@ -1353,9 +1559,10 @@
           <a:lstStyle/>
           <a:p>
             <a:r>
-              <a:rPr lang="en-US"/>
+              <a:rPr lang="en-US" smtClean="0"/>
               <a:t>Click to edit Master title style</a:t>
             </a:r>
+            <a:endParaRPr lang="en-US"/>
           </a:p>
         </p:txBody>
       </p:sp>
@@ -1471,9 +1678,10 @@
           </a:lstStyle>
           <a:p>
             <a:r>
-              <a:rPr lang="en-US"/>
+              <a:rPr lang="en-US" smtClean="0"/>
               <a:t>Click to edit Master subtitle style</a:t>
             </a:r>
+            <a:endParaRPr lang="en-US"/>
           </a:p>
         </p:txBody>
       </p:sp>
@@ -1494,7 +1702,7 @@
           <a:p>
             <a:fld id="{5BCAD085-E8A6-8845-BD4E-CB4CCA059FC4}" type="datetimeFigureOut">
               <a:rPr lang="en-US" smtClean="0"/>
-              <a:t>28/09/2026</a:t>
+              <a:t>1/27/13</a:t>
             </a:fld>
             <a:endParaRPr lang="en-US"/>
           </a:p>
@@ -1588,9 +1796,10 @@
           <a:lstStyle/>
           <a:p>
             <a:r>
-              <a:rPr lang="en-US"/>
+              <a:rPr lang="en-US" smtClean="0"/>
               <a:t>Click to edit Master title style</a:t>
             </a:r>
+            <a:endParaRPr lang="en-US"/>
           </a:p>
         </p:txBody>
       </p:sp>
@@ -1611,37 +1820,38 @@
           <a:p>
             <a:pPr lvl="0"/>
             <a:r>
-              <a:rPr lang="en-US"/>
+              <a:rPr lang="en-US" smtClean="0"/>
               <a:t>Click to edit Master text styles</a:t>
             </a:r>
           </a:p>
           <a:p>
             <a:pPr lvl="1"/>
             <a:r>
-              <a:rPr lang="en-US"/>
+              <a:rPr lang="en-US" smtClean="0"/>
               <a:t>Second level</a:t>
             </a:r>
           </a:p>
           <a:p>
             <a:pPr lvl="2"/>
             <a:r>
-              <a:rPr lang="en-US"/>
+              <a:rPr lang="en-US" smtClean="0"/>
               <a:t>Third level</a:t>
             </a:r>
           </a:p>
           <a:p>
             <a:pPr lvl="3"/>
             <a:r>
-              <a:rPr lang="en-US"/>
+              <a:rPr lang="en-US" smtClean="0"/>
               <a:t>Fourth level</a:t>
             </a:r>
           </a:p>
           <a:p>
             <a:pPr lvl="4"/>
             <a:r>
-              <a:rPr lang="en-US"/>
+              <a:rPr lang="en-US" smtClean="0"/>
               <a:t>Fifth level</a:t>
             </a:r>
+            <a:endParaRPr lang="en-US"/>
           </a:p>
         </p:txBody>
       </p:sp>
@@ -1662,7 +1872,7 @@
           <a:p>
             <a:fld id="{5BCAD085-E8A6-8845-BD4E-CB4CCA059FC4}" type="datetimeFigureOut">
               <a:rPr lang="en-US" smtClean="0"/>
-              <a:t>28/09/2026</a:t>
+              <a:t>1/27/13</a:t>
             </a:fld>
             <a:endParaRPr lang="en-US"/>
           </a:p>
@@ -1761,9 +1971,10 @@
           <a:lstStyle/>
           <a:p>
             <a:r>
-              <a:rPr lang="en-US"/>
+              <a:rPr lang="en-US" smtClean="0"/>
               <a:t>Click to edit Master title style</a:t>
             </a:r>
+            <a:endParaRPr lang="en-US"/>
           </a:p>
         </p:txBody>
       </p:sp>
@@ -1789,37 +2000,38 @@
           <a:p>
             <a:pPr lvl="0"/>
             <a:r>
-              <a:rPr lang="en-US"/>
+              <a:rPr lang="en-US" smtClean="0"/>
               <a:t>Click to edit Master text styles</a:t>
             </a:r>
           </a:p>
           <a:p>
             <a:pPr lvl="1"/>
             <a:r>
-              <a:rPr lang="en-US"/>
+              <a:rPr lang="en-US" smtClean="0"/>
               <a:t>Second level</a:t>
             </a:r>
           </a:p>
           <a:p>
             <a:pPr lvl="2"/>
             <a:r>
-              <a:rPr lang="en-US"/>
+              <a:rPr lang="en-US" smtClean="0"/>
               <a:t>Third level</a:t>
             </a:r>
           </a:p>
           <a:p>
             <a:pPr lvl="3"/>
             <a:r>
-              <a:rPr lang="en-US"/>
+              <a:rPr lang="en-US" smtClean="0"/>
               <a:t>Fourth level</a:t>
             </a:r>
           </a:p>
           <a:p>
             <a:pPr lvl="4"/>
             <a:r>
-              <a:rPr lang="en-US"/>
+              <a:rPr lang="en-US" smtClean="0"/>
               <a:t>Fifth level</a:t>
             </a:r>
+            <a:endParaRPr lang="en-US"/>
           </a:p>
         </p:txBody>
       </p:sp>
@@ -1840,7 +2052,7 @@
           <a:p>
             <a:fld id="{5BCAD085-E8A6-8845-BD4E-CB4CCA059FC4}" type="datetimeFigureOut">
               <a:rPr lang="en-US" smtClean="0"/>
-              <a:t>28/09/2026</a:t>
+              <a:t>1/27/13</a:t>
             </a:fld>
             <a:endParaRPr lang="en-US"/>
           </a:p>
@@ -1934,9 +2146,10 @@
           <a:lstStyle/>
           <a:p>
             <a:r>
-              <a:rPr lang="en-US"/>
+              <a:rPr lang="en-US" smtClean="0"/>
               <a:t>Click to edit Master title style</a:t>
             </a:r>
+            <a:endParaRPr lang="en-US"/>
           </a:p>
         </p:txBody>
       </p:sp>
@@ -1957,37 +2170,38 @@
           <a:p>
             <a:pPr lvl="0"/>
             <a:r>
-              <a:rPr lang="en-US"/>
+              <a:rPr lang="en-US" smtClean="0"/>
               <a:t>Click to edit Master text styles</a:t>
             </a:r>
           </a:p>
           <a:p>
             <a:pPr lvl="1"/>
             <a:r>
-              <a:rPr lang="en-US"/>
+              <a:rPr lang="en-US" smtClean="0"/>
               <a:t>Second level</a:t>
             </a:r>
           </a:p>
           <a:p>
             <a:pPr lvl="2"/>
             <a:r>
-              <a:rPr lang="en-US"/>
+              <a:rPr lang="en-US" smtClean="0"/>
               <a:t>Third level</a:t>
             </a:r>
           </a:p>
           <a:p>
             <a:pPr lvl="3"/>
             <a:r>
-              <a:rPr lang="en-US"/>
+              <a:rPr lang="en-US" smtClean="0"/>
               <a:t>Fourth level</a:t>
             </a:r>
           </a:p>
           <a:p>
             <a:pPr lvl="4"/>
             <a:r>
-              <a:rPr lang="en-US"/>
+              <a:rPr lang="en-US" smtClean="0"/>
               <a:t>Fifth level</a:t>
             </a:r>
+            <a:endParaRPr lang="en-US"/>
           </a:p>
         </p:txBody>
       </p:sp>
@@ -2008,7 +2222,7 @@
           <a:p>
             <a:fld id="{5BCAD085-E8A6-8845-BD4E-CB4CCA059FC4}" type="datetimeFigureOut">
               <a:rPr lang="en-US" smtClean="0"/>
-              <a:t>28/09/2026</a:t>
+              <a:t>1/27/13</a:t>
             </a:fld>
             <a:endParaRPr lang="en-US"/>
           </a:p>
@@ -2111,9 +2325,10 @@
           </a:lstStyle>
           <a:p>
             <a:r>
-              <a:rPr lang="en-US"/>
+              <a:rPr lang="en-US" smtClean="0"/>
               <a:t>Click to edit Master title style</a:t>
             </a:r>
+            <a:endParaRPr lang="en-US"/>
           </a:p>
         </p:txBody>
       </p:sp>
@@ -2230,7 +2445,7 @@
           <a:p>
             <a:pPr lvl="0"/>
             <a:r>
-              <a:rPr lang="en-US"/>
+              <a:rPr lang="en-US" smtClean="0"/>
               <a:t>Click to edit Master text styles</a:t>
             </a:r>
           </a:p>
@@ -2253,7 +2468,7 @@
           <a:p>
             <a:fld id="{5BCAD085-E8A6-8845-BD4E-CB4CCA059FC4}" type="datetimeFigureOut">
               <a:rPr lang="en-US" smtClean="0"/>
-              <a:t>28/09/2026</a:t>
+              <a:t>1/27/13</a:t>
             </a:fld>
             <a:endParaRPr lang="en-US"/>
           </a:p>
@@ -2347,9 +2562,10 @@
           <a:lstStyle/>
           <a:p>
             <a:r>
-              <a:rPr lang="en-US"/>
+              <a:rPr lang="en-US" smtClean="0"/>
               <a:t>Click to edit Master title style</a:t>
             </a:r>
+            <a:endParaRPr lang="en-US"/>
           </a:p>
         </p:txBody>
       </p:sp>
@@ -2403,37 +2619,38 @@
           <a:p>
             <a:pPr lvl="0"/>
             <a:r>
-              <a:rPr lang="en-US"/>
+              <a:rPr lang="en-US" smtClean="0"/>
               <a:t>Click to edit Master text styles</a:t>
             </a:r>
           </a:p>
           <a:p>
             <a:pPr lvl="1"/>
             <a:r>
-              <a:rPr lang="en-US"/>
+              <a:rPr lang="en-US" smtClean="0"/>
               <a:t>Second level</a:t>
             </a:r>
           </a:p>
           <a:p>
             <a:pPr lvl="2"/>
             <a:r>
-              <a:rPr lang="en-US"/>
+              <a:rPr lang="en-US" smtClean="0"/>
               <a:t>Third level</a:t>
             </a:r>
           </a:p>
           <a:p>
             <a:pPr lvl="3"/>
             <a:r>
-              <a:rPr lang="en-US"/>
+              <a:rPr lang="en-US" smtClean="0"/>
               <a:t>Fourth level</a:t>
             </a:r>
           </a:p>
           <a:p>
             <a:pPr lvl="4"/>
             <a:r>
-              <a:rPr lang="en-US"/>
+              <a:rPr lang="en-US" smtClean="0"/>
               <a:t>Fifth level</a:t>
             </a:r>
+            <a:endParaRPr lang="en-US"/>
           </a:p>
         </p:txBody>
       </p:sp>
@@ -2487,37 +2704,38 @@
           <a:p>
             <a:pPr lvl="0"/>
             <a:r>
-              <a:rPr lang="en-US"/>
+              <a:rPr lang="en-US" smtClean="0"/>
               <a:t>Click to edit Master text styles</a:t>
             </a:r>
           </a:p>
           <a:p>
             <a:pPr lvl="1"/>
             <a:r>
-              <a:rPr lang="en-US"/>
+              <a:rPr lang="en-US" smtClean="0"/>
               <a:t>Second level</a:t>
             </a:r>
           </a:p>
           <a:p>
             <a:pPr lvl="2"/>
             <a:r>
-              <a:rPr lang="en-US"/>
+              <a:rPr lang="en-US" smtClean="0"/>
               <a:t>Third level</a:t>
             </a:r>
           </a:p>
           <a:p>
             <a:pPr lvl="3"/>
             <a:r>
-              <a:rPr lang="en-US"/>
+              <a:rPr lang="en-US" smtClean="0"/>
               <a:t>Fourth level</a:t>
             </a:r>
           </a:p>
           <a:p>
             <a:pPr lvl="4"/>
             <a:r>
-              <a:rPr lang="en-US"/>
+              <a:rPr lang="en-US" smtClean="0"/>
               <a:t>Fifth level</a:t>
             </a:r>
+            <a:endParaRPr lang="en-US"/>
           </a:p>
         </p:txBody>
       </p:sp>
@@ -2538,7 +2756,7 @@
           <a:p>
             <a:fld id="{5BCAD085-E8A6-8845-BD4E-CB4CCA059FC4}" type="datetimeFigureOut">
               <a:rPr lang="en-US" smtClean="0"/>
-              <a:t>28/09/2026</a:t>
+              <a:t>1/27/13</a:t>
             </a:fld>
             <a:endParaRPr lang="en-US"/>
           </a:p>
@@ -2636,9 +2854,10 @@
           </a:lstStyle>
           <a:p>
             <a:r>
-              <a:rPr lang="en-US"/>
+              <a:rPr lang="en-US" smtClean="0"/>
               <a:t>Click to edit Master title style</a:t>
             </a:r>
+            <a:endParaRPr lang="en-US"/>
           </a:p>
         </p:txBody>
       </p:sp>
@@ -2701,7 +2920,7 @@
           <a:p>
             <a:pPr lvl="0"/>
             <a:r>
-              <a:rPr lang="en-US"/>
+              <a:rPr lang="en-US" smtClean="0"/>
               <a:t>Click to edit Master text styles</a:t>
             </a:r>
           </a:p>
@@ -2757,37 +2976,38 @@
           <a:p>
             <a:pPr lvl="0"/>
             <a:r>
-              <a:rPr lang="en-US"/>
+              <a:rPr lang="en-US" smtClean="0"/>
               <a:t>Click to edit Master text styles</a:t>
             </a:r>
           </a:p>
           <a:p>
             <a:pPr lvl="1"/>
             <a:r>
-              <a:rPr lang="en-US"/>
+              <a:rPr lang="en-US" smtClean="0"/>
               <a:t>Second level</a:t>
             </a:r>
           </a:p>
           <a:p>
             <a:pPr lvl="2"/>
             <a:r>
-              <a:rPr lang="en-US"/>
+              <a:rPr lang="en-US" smtClean="0"/>
               <a:t>Third level</a:t>
             </a:r>
           </a:p>
           <a:p>
             <a:pPr lvl="3"/>
             <a:r>
-              <a:rPr lang="en-US"/>
+              <a:rPr lang="en-US" smtClean="0"/>
               <a:t>Fourth level</a:t>
             </a:r>
           </a:p>
           <a:p>
             <a:pPr lvl="4"/>
             <a:r>
-              <a:rPr lang="en-US"/>
+              <a:rPr lang="en-US" smtClean="0"/>
               <a:t>Fifth level</a:t>
             </a:r>
+            <a:endParaRPr lang="en-US"/>
           </a:p>
         </p:txBody>
       </p:sp>
@@ -2850,7 +3070,7 @@
           <a:p>
             <a:pPr lvl="0"/>
             <a:r>
-              <a:rPr lang="en-US"/>
+              <a:rPr lang="en-US" smtClean="0"/>
               <a:t>Click to edit Master text styles</a:t>
             </a:r>
           </a:p>
@@ -2906,37 +3126,38 @@
           <a:p>
             <a:pPr lvl="0"/>
             <a:r>
-              <a:rPr lang="en-US"/>
+              <a:rPr lang="en-US" smtClean="0"/>
               <a:t>Click to edit Master text styles</a:t>
             </a:r>
           </a:p>
           <a:p>
             <a:pPr lvl="1"/>
             <a:r>
-              <a:rPr lang="en-US"/>
+              <a:rPr lang="en-US" smtClean="0"/>
               <a:t>Second level</a:t>
             </a:r>
           </a:p>
           <a:p>
             <a:pPr lvl="2"/>
             <a:r>
-              <a:rPr lang="en-US"/>
+              <a:rPr lang="en-US" smtClean="0"/>
               <a:t>Third level</a:t>
             </a:r>
           </a:p>
           <a:p>
             <a:pPr lvl="3"/>
             <a:r>
-              <a:rPr lang="en-US"/>
+              <a:rPr lang="en-US" smtClean="0"/>
               <a:t>Fourth level</a:t>
             </a:r>
           </a:p>
           <a:p>
             <a:pPr lvl="4"/>
             <a:r>
-              <a:rPr lang="en-US"/>
+              <a:rPr lang="en-US" smtClean="0"/>
               <a:t>Fifth level</a:t>
             </a:r>
+            <a:endParaRPr lang="en-US"/>
           </a:p>
         </p:txBody>
       </p:sp>
@@ -2957,7 +3178,7 @@
           <a:p>
             <a:fld id="{5BCAD085-E8A6-8845-BD4E-CB4CCA059FC4}" type="datetimeFigureOut">
               <a:rPr lang="en-US" smtClean="0"/>
-              <a:t>28/09/2026</a:t>
+              <a:t>1/27/13</a:t>
             </a:fld>
             <a:endParaRPr lang="en-US"/>
           </a:p>
@@ -3051,9 +3272,10 @@
           <a:lstStyle/>
           <a:p>
             <a:r>
-              <a:rPr lang="en-US"/>
+              <a:rPr lang="en-US" smtClean="0"/>
               <a:t>Click to edit Master title style</a:t>
             </a:r>
+            <a:endParaRPr lang="en-US"/>
           </a:p>
         </p:txBody>
       </p:sp>
@@ -3074,7 +3296,7 @@
           <a:p>
             <a:fld id="{5BCAD085-E8A6-8845-BD4E-CB4CCA059FC4}" type="datetimeFigureOut">
               <a:rPr lang="en-US" smtClean="0"/>
-              <a:t>28/09/2026</a:t>
+              <a:t>1/27/13</a:t>
             </a:fld>
             <a:endParaRPr lang="en-US"/>
           </a:p>
@@ -3169,7 +3391,7 @@
           <a:p>
             <a:fld id="{5BCAD085-E8A6-8845-BD4E-CB4CCA059FC4}" type="datetimeFigureOut">
               <a:rPr lang="en-US" smtClean="0"/>
-              <a:t>28/09/2026</a:t>
+              <a:t>1/27/13</a:t>
             </a:fld>
             <a:endParaRPr lang="en-US"/>
           </a:p>
@@ -3272,9 +3494,10 @@
           </a:lstStyle>
           <a:p>
             <a:r>
-              <a:rPr lang="en-US"/>
+              <a:rPr lang="en-US" smtClean="0"/>
               <a:t>Click to edit Master title style</a:t>
             </a:r>
+            <a:endParaRPr lang="en-US"/>
           </a:p>
         </p:txBody>
       </p:sp>
@@ -3328,37 +3551,38 @@
           <a:p>
             <a:pPr lvl="0"/>
             <a:r>
-              <a:rPr lang="en-US"/>
+              <a:rPr lang="en-US" smtClean="0"/>
               <a:t>Click to edit Master text styles</a:t>
             </a:r>
           </a:p>
           <a:p>
             <a:pPr lvl="1"/>
             <a:r>
-              <a:rPr lang="en-US"/>
+              <a:rPr lang="en-US" smtClean="0"/>
               <a:t>Second level</a:t>
             </a:r>
           </a:p>
           <a:p>
             <a:pPr lvl="2"/>
             <a:r>
-              <a:rPr lang="en-US"/>
+              <a:rPr lang="en-US" smtClean="0"/>
               <a:t>Third level</a:t>
             </a:r>
           </a:p>
           <a:p>
             <a:pPr lvl="3"/>
             <a:r>
-              <a:rPr lang="en-US"/>
+              <a:rPr lang="en-US" smtClean="0"/>
               <a:t>Fourth level</a:t>
             </a:r>
           </a:p>
           <a:p>
             <a:pPr lvl="4"/>
             <a:r>
-              <a:rPr lang="en-US"/>
+              <a:rPr lang="en-US" smtClean="0"/>
               <a:t>Fifth level</a:t>
             </a:r>
+            <a:endParaRPr lang="en-US"/>
           </a:p>
         </p:txBody>
       </p:sp>
@@ -3421,7 +3645,7 @@
           <a:p>
             <a:pPr lvl="0"/>
             <a:r>
-              <a:rPr lang="en-US"/>
+              <a:rPr lang="en-US" smtClean="0"/>
               <a:t>Click to edit Master text styles</a:t>
             </a:r>
           </a:p>
@@ -3444,7 +3668,7 @@
           <a:p>
             <a:fld id="{5BCAD085-E8A6-8845-BD4E-CB4CCA059FC4}" type="datetimeFigureOut">
               <a:rPr lang="en-US" smtClean="0"/>
-              <a:t>28/09/2026</a:t>
+              <a:t>1/27/13</a:t>
             </a:fld>
             <a:endParaRPr lang="en-US"/>
           </a:p>
@@ -3547,9 +3771,10 @@
           </a:lstStyle>
           <a:p>
             <a:r>
-              <a:rPr lang="en-US"/>
+              <a:rPr lang="en-US" smtClean="0"/>
               <a:t>Click to edit Master title style</a:t>
             </a:r>
+            <a:endParaRPr lang="en-US"/>
           </a:p>
         </p:txBody>
       </p:sp>
@@ -3673,7 +3898,7 @@
           <a:p>
             <a:pPr lvl="0"/>
             <a:r>
-              <a:rPr lang="en-US"/>
+              <a:rPr lang="en-US" smtClean="0"/>
               <a:t>Click to edit Master text styles</a:t>
             </a:r>
           </a:p>
@@ -3696,7 +3921,7 @@
           <a:p>
             <a:fld id="{5BCAD085-E8A6-8845-BD4E-CB4CCA059FC4}" type="datetimeFigureOut">
               <a:rPr lang="en-US" smtClean="0"/>
-              <a:t>28/09/2026</a:t>
+              <a:t>1/27/13</a:t>
             </a:fld>
             <a:endParaRPr lang="en-US"/>
           </a:p>
@@ -3805,9 +4030,10 @@
           <a:lstStyle/>
           <a:p>
             <a:r>
-              <a:rPr lang="en-US"/>
+              <a:rPr lang="en-US" smtClean="0"/>
               <a:t>Click to edit Master title style</a:t>
             </a:r>
+            <a:endParaRPr lang="en-US"/>
           </a:p>
         </p:txBody>
       </p:sp>
@@ -3838,37 +4064,38 @@
           <a:p>
             <a:pPr lvl="0"/>
             <a:r>
-              <a:rPr lang="en-US"/>
+              <a:rPr lang="en-US" smtClean="0"/>
               <a:t>Click to edit Master text styles</a:t>
             </a:r>
           </a:p>
           <a:p>
             <a:pPr lvl="1"/>
             <a:r>
-              <a:rPr lang="en-US"/>
+              <a:rPr lang="en-US" smtClean="0"/>
               <a:t>Second level</a:t>
             </a:r>
           </a:p>
           <a:p>
             <a:pPr lvl="2"/>
             <a:r>
-              <a:rPr lang="en-US"/>
+              <a:rPr lang="en-US" smtClean="0"/>
               <a:t>Third level</a:t>
             </a:r>
           </a:p>
           <a:p>
             <a:pPr lvl="3"/>
             <a:r>
-              <a:rPr lang="en-US"/>
+              <a:rPr lang="en-US" smtClean="0"/>
               <a:t>Fourth level</a:t>
             </a:r>
           </a:p>
           <a:p>
             <a:pPr lvl="4"/>
             <a:r>
-              <a:rPr lang="en-US"/>
+              <a:rPr lang="en-US" smtClean="0"/>
               <a:t>Fifth level</a:t>
             </a:r>
+            <a:endParaRPr lang="en-US"/>
           </a:p>
         </p:txBody>
       </p:sp>
@@ -3907,7 +4134,7 @@
           <a:p>
             <a:fld id="{5BCAD085-E8A6-8845-BD4E-CB4CCA059FC4}" type="datetimeFigureOut">
               <a:rPr lang="en-US" smtClean="0"/>
-              <a:t>28/09/2026</a:t>
+              <a:t>1/27/13</a:t>
             </a:fld>
             <a:endParaRPr lang="en-US"/>
           </a:p>
@@ -3988,54 +4215,6 @@
               <a:t>‹#›</a:t>
             </a:fld>
             <a:endParaRPr lang="en-US"/>
-          </a:p>
-        </p:txBody>
-      </p:sp>
-      <p:sp>
-        <p:nvSpPr>
-          <p:cNvPr id="8" name="TextBox 7">
-            <a:extLst>
-              <a:ext uri="{FF2B5EF4-FFF2-40B4-BE49-F238E27FC236}">
-                <a16:creationId xmlns:a16="http://schemas.microsoft.com/office/drawing/2014/main" id="{D6DBE52B-4F7C-5F9D-1F69-B941145735F9}"/>
-              </a:ext>
-            </a:extLst>
-          </p:cNvPr>
-          <p:cNvSpPr txBox="1"/>
-          <p:nvPr userDrawn="1">
-            <p:extLst>
-              <p:ext uri="{1162E1C5-73C7-4A58-AE30-91384D911F3F}">
-                <p184:classification xmlns:p184="http://schemas.microsoft.com/office/powerpoint/2018/4/main" val="ftr"/>
-              </p:ext>
-            </p:extLst>
-          </p:nvPr>
-        </p:nvSpPr>
-        <p:spPr>
-          <a:xfrm>
-            <a:off x="9942513" y="6642100"/>
-            <a:ext cx="2211387" cy="152400"/>
-          </a:xfrm>
-          <a:prstGeom prst="rect">
-            <a:avLst/>
-          </a:prstGeom>
-        </p:spPr>
-        <p:txBody>
-          <a:bodyPr horzOverflow="overflow" lIns="0" tIns="0" rIns="0" bIns="0">
-            <a:spAutoFit/>
-          </a:bodyPr>
-          <a:lstStyle/>
-          <a:p>
-            <a:pPr algn="l"/>
-            <a:r>
-              <a:rPr lang="en-US" sz="1000">
-                <a:solidFill>
-                  <a:srgbClr val="000000">
-                    <a:alpha val="50000"/>
-                  </a:srgbClr>
-                </a:solidFill>
-                <a:latin typeface="Aptos" panose="020B0004020202020204" pitchFamily="34" charset="0"/>
-              </a:rPr>
-              <a:t>Sensitivity: Internal / Non-Personal Data</a:t>
-            </a:r>
           </a:p>
         </p:txBody>
       </p:sp>
@@ -4314,7 +4493,7 @@
 </file>
 
 <file path=ppt/slides/slide1.xml><?xml version="1.0" encoding="utf-8"?>
-<p:sld xmlns:a="http://schemas.openxmlformats.org/drawingml/2006/main" xmlns:r="http://schemas.openxmlformats.org/officeDocument/2006/relationships" xmlns:p="http://schemas.openxmlformats.org/presentationml/2006/main">
+<p:sld xmlns:a="http://schemas.openxmlformats.org/drawingml/2006/main" xmlns:p="http://schemas.openxmlformats.org/presentationml/2006/main" xmlns:r="http://schemas.openxmlformats.org/officeDocument/2006/relationships">
   <p:cSld>
     <p:bg>
       <p:bgPr>
@@ -4330,14 +4509,7 @@
         <p:cNvGrpSpPr/>
         <p:nvPr/>
       </p:nvGrpSpPr>
-      <p:grpSpPr>
-        <a:xfrm>
-          <a:off x="0" y="0"/>
-          <a:ext cx="0" cy="0"/>
-          <a:chOff x="0" y="0"/>
-          <a:chExt cx="0" cy="0"/>
-        </a:xfrm>
-      </p:grpSpPr>
+      <p:grpSpPr/>
       <p:sp>
         <p:nvSpPr>
           <p:cNvPr id="2" name="Oval 1"/>
@@ -4375,7 +4547,7 @@
           </a:fontRef>
         </p:style>
         <p:txBody>
-          <a:bodyPr lIns="0" tIns="0" rIns="0" bIns="0" rtlCol="0" anchor="ctr"/>
+          <a:bodyPr rtlCol="0" anchor="ctr" lIns="0" rIns="0" tIns="0" bIns="0"/>
           <a:lstStyle/>
           <a:p>
             <a:pPr algn="ctr"/>
@@ -4410,7 +4582,7 @@
           <a:noFill/>
         </p:spPr>
         <p:txBody>
-          <a:bodyPr wrap="square" lIns="0" tIns="0" rIns="0" bIns="0" anchor="t">
+          <a:bodyPr wrap="square" lIns="0" rIns="0" tIns="0" bIns="0" anchor="t">
             <a:spAutoFit/>
           </a:bodyPr>
           <a:lstStyle/>
@@ -4454,7 +4626,7 @@
           <a:noFill/>
         </p:spPr>
         <p:txBody>
-          <a:bodyPr wrap="square" lIns="0" tIns="0" rIns="0" bIns="0" anchor="t">
+          <a:bodyPr wrap="square" lIns="0" rIns="0" tIns="0" bIns="0" anchor="t">
             <a:spAutoFit/>
           </a:bodyPr>
           <a:lstStyle/>
@@ -4498,7 +4670,7 @@
           <a:noFill/>
         </p:spPr>
         <p:txBody>
-          <a:bodyPr wrap="square" lIns="0" tIns="0" rIns="0" bIns="0" anchor="t">
+          <a:bodyPr wrap="square" lIns="0" rIns="0" tIns="0" bIns="0" anchor="t">
             <a:spAutoFit/>
           </a:bodyPr>
           <a:lstStyle/>
@@ -4541,7 +4713,7 @@
                 <a:ea typeface="Leelawadee UI"/>
                 <a:cs typeface="Leelawadee UI"/>
               </a:rPr>
-              <a:t>Release 1.5 · https://ahth-graph-generator.github.io</a:t>
+              <a:t>Release 1.7 · https://ahth-graph-generator.github.io</a:t>
             </a:r>
           </a:p>
         </p:txBody>
@@ -4555,7 +4727,7 @@
 </file>
 
 <file path=ppt/slides/slide10.xml><?xml version="1.0" encoding="utf-8"?>
-<p:sld xmlns:a="http://schemas.openxmlformats.org/drawingml/2006/main" xmlns:r="http://schemas.openxmlformats.org/officeDocument/2006/relationships" xmlns:p="http://schemas.openxmlformats.org/presentationml/2006/main">
+<p:sld xmlns:a="http://schemas.openxmlformats.org/drawingml/2006/main" xmlns:p="http://schemas.openxmlformats.org/presentationml/2006/main" xmlns:r="http://schemas.openxmlformats.org/officeDocument/2006/relationships">
   <p:cSld>
     <p:bg>
       <p:bgPr>
@@ -4571,14 +4743,7 @@
         <p:cNvGrpSpPr/>
         <p:nvPr/>
       </p:nvGrpSpPr>
-      <p:grpSpPr>
-        <a:xfrm>
-          <a:off x="0" y="0"/>
-          <a:ext cx="0" cy="0"/>
-          <a:chOff x="0" y="0"/>
-          <a:chExt cx="0" cy="0"/>
-        </a:xfrm>
-      </p:grpSpPr>
+      <p:grpSpPr/>
       <p:sp>
         <p:nvSpPr>
           <p:cNvPr id="2" name="TextBox 1"/>
@@ -4596,7 +4761,7 @@
           <a:noFill/>
         </p:spPr>
         <p:txBody>
-          <a:bodyPr wrap="square" lIns="0" tIns="0" rIns="0" bIns="0" anchor="t">
+          <a:bodyPr wrap="square" lIns="0" rIns="0" tIns="0" bIns="0" anchor="t">
             <a:spAutoFit/>
           </a:bodyPr>
           <a:lstStyle/>
@@ -4640,7 +4805,7 @@
           <a:noFill/>
         </p:spPr>
         <p:txBody>
-          <a:bodyPr wrap="square" lIns="0" tIns="0" rIns="0" bIns="0" anchor="t">
+          <a:bodyPr wrap="square" lIns="0" rIns="0" tIns="0" bIns="0" anchor="t">
             <a:spAutoFit/>
           </a:bodyPr>
           <a:lstStyle/>
@@ -4708,9 +4873,7 @@
         <p:txBody>
           <a:bodyPr rtlCol="0" anchor="ctr"/>
           <a:lstStyle/>
-          <a:p>
-            <a:endParaRPr/>
-          </a:p>
+          <a:p/>
         </p:txBody>
       </p:sp>
       <p:sp>
@@ -4730,7 +4893,7 @@
           <a:noFill/>
         </p:spPr>
         <p:txBody>
-          <a:bodyPr wrap="square" lIns="0" tIns="0" rIns="0" bIns="0" anchor="t">
+          <a:bodyPr wrap="square" lIns="0" rIns="0" tIns="0" bIns="0" anchor="t">
             <a:spAutoFit/>
           </a:bodyPr>
           <a:lstStyle/>
@@ -5097,7 +5260,7 @@
           <a:noFill/>
         </p:spPr>
         <p:txBody>
-          <a:bodyPr wrap="square" lIns="0" tIns="0" rIns="0" bIns="0" anchor="t">
+          <a:bodyPr wrap="square" lIns="0" rIns="0" tIns="0" bIns="0" anchor="t">
             <a:spAutoFit/>
           </a:bodyPr>
           <a:lstStyle/>
@@ -5141,7 +5304,7 @@
           <a:noFill/>
         </p:spPr>
         <p:txBody>
-          <a:bodyPr wrap="square" lIns="0" tIns="0" rIns="0" bIns="0" anchor="t">
+          <a:bodyPr wrap="square" lIns="0" rIns="0" tIns="0" bIns="0" anchor="t">
             <a:spAutoFit/>
           </a:bodyPr>
           <a:lstStyle/>
@@ -5185,7 +5348,7 @@
           <a:noFill/>
         </p:spPr>
         <p:txBody>
-          <a:bodyPr wrap="square" lIns="0" tIns="0" rIns="0" bIns="0" anchor="t">
+          <a:bodyPr wrap="square" lIns="0" rIns="0" tIns="0" bIns="0" anchor="t">
             <a:spAutoFit/>
           </a:bodyPr>
           <a:lstStyle/>
@@ -5229,7 +5392,7 @@
           <a:noFill/>
         </p:spPr>
         <p:txBody>
-          <a:bodyPr wrap="square" lIns="0" tIns="0" rIns="0" bIns="0" anchor="t">
+          <a:bodyPr wrap="square" lIns="0" rIns="0" tIns="0" bIns="0" anchor="t">
             <a:spAutoFit/>
           </a:bodyPr>
           <a:lstStyle/>
@@ -5273,7 +5436,7 @@
           <a:noFill/>
         </p:spPr>
         <p:txBody>
-          <a:bodyPr wrap="square" lIns="0" tIns="0" rIns="0" bIns="0" anchor="t">
+          <a:bodyPr wrap="square" lIns="0" rIns="0" tIns="0" bIns="0" anchor="t">
             <a:spAutoFit/>
           </a:bodyPr>
           <a:lstStyle/>
@@ -5317,7 +5480,7 @@
           <a:noFill/>
         </p:spPr>
         <p:txBody>
-          <a:bodyPr wrap="square" lIns="0" tIns="0" rIns="0" bIns="0" anchor="t">
+          <a:bodyPr wrap="square" lIns="0" rIns="0" tIns="0" bIns="0" anchor="t">
             <a:spAutoFit/>
           </a:bodyPr>
           <a:lstStyle/>
@@ -5361,7 +5524,7 @@
           <a:noFill/>
         </p:spPr>
         <p:txBody>
-          <a:bodyPr wrap="square" lIns="0" tIns="0" rIns="0" bIns="0" anchor="t">
+          <a:bodyPr wrap="square" lIns="0" rIns="0" tIns="0" bIns="0" anchor="t">
             <a:spAutoFit/>
           </a:bodyPr>
           <a:lstStyle/>
@@ -5405,7 +5568,7 @@
           <a:noFill/>
         </p:spPr>
         <p:txBody>
-          <a:bodyPr wrap="square" lIns="0" tIns="0" rIns="0" bIns="0" anchor="t">
+          <a:bodyPr wrap="square" lIns="0" rIns="0" tIns="0" bIns="0" anchor="t">
             <a:spAutoFit/>
           </a:bodyPr>
           <a:lstStyle/>
@@ -5449,7 +5612,7 @@
           <a:noFill/>
         </p:spPr>
         <p:txBody>
-          <a:bodyPr wrap="square" lIns="0" tIns="0" rIns="0" bIns="0" anchor="t">
+          <a:bodyPr wrap="square" lIns="0" rIns="0" tIns="0" bIns="0" anchor="t">
             <a:spAutoFit/>
           </a:bodyPr>
           <a:lstStyle/>
@@ -5493,7 +5656,7 @@
           <a:noFill/>
         </p:spPr>
         <p:txBody>
-          <a:bodyPr wrap="square" lIns="0" tIns="0" rIns="0" bIns="0" anchor="t">
+          <a:bodyPr wrap="square" lIns="0" rIns="0" tIns="0" bIns="0" anchor="t">
             <a:spAutoFit/>
           </a:bodyPr>
           <a:lstStyle/>
@@ -5561,9 +5724,7 @@
         <p:txBody>
           <a:bodyPr rtlCol="0" anchor="ctr"/>
           <a:lstStyle/>
-          <a:p>
-            <a:endParaRPr/>
-          </a:p>
+          <a:p/>
         </p:txBody>
       </p:sp>
       <p:sp>
@@ -5583,7 +5744,7 @@
           <a:noFill/>
         </p:spPr>
         <p:txBody>
-          <a:bodyPr wrap="square" lIns="0" tIns="0" rIns="0" bIns="0" anchor="t">
+          <a:bodyPr wrap="square" lIns="0" rIns="0" tIns="0" bIns="0" anchor="t">
             <a:spAutoFit/>
           </a:bodyPr>
           <a:lstStyle/>
@@ -5638,7 +5799,7 @@
           <a:noFill/>
         </p:spPr>
         <p:txBody>
-          <a:bodyPr wrap="square" lIns="0" tIns="0" rIns="0" bIns="0" anchor="t">
+          <a:bodyPr wrap="square" lIns="0" rIns="0" tIns="0" bIns="0" anchor="t">
             <a:spAutoFit/>
           </a:bodyPr>
           <a:lstStyle/>
@@ -5674,7 +5835,7 @@
 </file>
 
 <file path=ppt/slides/slide11.xml><?xml version="1.0" encoding="utf-8"?>
-<p:sld xmlns:a="http://schemas.openxmlformats.org/drawingml/2006/main" xmlns:r="http://schemas.openxmlformats.org/officeDocument/2006/relationships" xmlns:p="http://schemas.openxmlformats.org/presentationml/2006/main">
+<p:sld xmlns:a="http://schemas.openxmlformats.org/drawingml/2006/main" xmlns:p="http://schemas.openxmlformats.org/presentationml/2006/main" xmlns:r="http://schemas.openxmlformats.org/officeDocument/2006/relationships">
   <p:cSld>
     <p:bg>
       <p:bgPr>
@@ -5690,14 +5851,7 @@
         <p:cNvGrpSpPr/>
         <p:nvPr/>
       </p:nvGrpSpPr>
-      <p:grpSpPr>
-        <a:xfrm>
-          <a:off x="0" y="0"/>
-          <a:ext cx="0" cy="0"/>
-          <a:chOff x="0" y="0"/>
-          <a:chExt cx="0" cy="0"/>
-        </a:xfrm>
-      </p:grpSpPr>
+      <p:grpSpPr/>
       <p:sp>
         <p:nvSpPr>
           <p:cNvPr id="2" name="TextBox 1"/>
@@ -5715,7 +5869,7 @@
           <a:noFill/>
         </p:spPr>
         <p:txBody>
-          <a:bodyPr wrap="square" lIns="0" tIns="0" rIns="0" bIns="0" anchor="t">
+          <a:bodyPr wrap="square" lIns="0" rIns="0" tIns="0" bIns="0" anchor="t">
             <a:spAutoFit/>
           </a:bodyPr>
           <a:lstStyle/>
@@ -5759,7 +5913,7 @@
           <a:noFill/>
         </p:spPr>
         <p:txBody>
-          <a:bodyPr wrap="square" lIns="0" tIns="0" rIns="0" bIns="0" anchor="t">
+          <a:bodyPr wrap="square" lIns="0" rIns="0" tIns="0" bIns="0" anchor="t">
             <a:spAutoFit/>
           </a:bodyPr>
           <a:lstStyle/>
@@ -5829,9 +5983,7 @@
         <p:txBody>
           <a:bodyPr rtlCol="0" anchor="ctr"/>
           <a:lstStyle/>
-          <a:p>
-            <a:endParaRPr/>
-          </a:p>
+          <a:p/>
         </p:txBody>
       </p:sp>
       <p:sp>
@@ -5851,7 +6003,7 @@
           <a:noFill/>
         </p:spPr>
         <p:txBody>
-          <a:bodyPr wrap="square" lIns="0" tIns="0" rIns="0" bIns="0" anchor="t">
+          <a:bodyPr wrap="square" lIns="0" rIns="0" tIns="0" bIns="0" anchor="t">
             <a:spAutoFit/>
           </a:bodyPr>
           <a:lstStyle/>
@@ -5895,7 +6047,7 @@
           <a:noFill/>
         </p:spPr>
         <p:txBody>
-          <a:bodyPr wrap="square" lIns="0" tIns="0" rIns="0" bIns="0" anchor="t">
+          <a:bodyPr wrap="square" lIns="0" rIns="0" tIns="0" bIns="0" anchor="t">
             <a:spAutoFit/>
           </a:bodyPr>
           <a:lstStyle/>
@@ -5965,9 +6117,7 @@
         <p:txBody>
           <a:bodyPr rtlCol="0" anchor="ctr"/>
           <a:lstStyle/>
-          <a:p>
-            <a:endParaRPr/>
-          </a:p>
+          <a:p/>
         </p:txBody>
       </p:sp>
       <p:sp>
@@ -5987,7 +6137,7 @@
           <a:noFill/>
         </p:spPr>
         <p:txBody>
-          <a:bodyPr wrap="square" lIns="0" tIns="0" rIns="0" bIns="0" anchor="t">
+          <a:bodyPr wrap="square" lIns="0" rIns="0" tIns="0" bIns="0" anchor="t">
             <a:spAutoFit/>
           </a:bodyPr>
           <a:lstStyle/>
@@ -6031,7 +6181,7 @@
           <a:noFill/>
         </p:spPr>
         <p:txBody>
-          <a:bodyPr wrap="square" lIns="0" tIns="0" rIns="0" bIns="0" anchor="t">
+          <a:bodyPr wrap="square" lIns="0" rIns="0" tIns="0" bIns="0" anchor="t">
             <a:spAutoFit/>
           </a:bodyPr>
           <a:lstStyle/>
@@ -6101,9 +6251,7 @@
         <p:txBody>
           <a:bodyPr rtlCol="0" anchor="ctr"/>
           <a:lstStyle/>
-          <a:p>
-            <a:endParaRPr/>
-          </a:p>
+          <a:p/>
         </p:txBody>
       </p:sp>
       <p:sp>
@@ -6123,7 +6271,7 @@
           <a:noFill/>
         </p:spPr>
         <p:txBody>
-          <a:bodyPr wrap="square" lIns="0" tIns="0" rIns="0" bIns="0" anchor="t">
+          <a:bodyPr wrap="square" lIns="0" rIns="0" tIns="0" bIns="0" anchor="t">
             <a:spAutoFit/>
           </a:bodyPr>
           <a:lstStyle/>
@@ -6167,7 +6315,7 @@
           <a:noFill/>
         </p:spPr>
         <p:txBody>
-          <a:bodyPr wrap="square" lIns="0" tIns="0" rIns="0" bIns="0" anchor="t">
+          <a:bodyPr wrap="square" lIns="0" rIns="0" tIns="0" bIns="0" anchor="t">
             <a:spAutoFit/>
           </a:bodyPr>
           <a:lstStyle/>
@@ -6237,9 +6385,7 @@
         <p:txBody>
           <a:bodyPr rtlCol="0" anchor="ctr"/>
           <a:lstStyle/>
-          <a:p>
-            <a:endParaRPr/>
-          </a:p>
+          <a:p/>
         </p:txBody>
       </p:sp>
       <p:sp>
@@ -6259,7 +6405,7 @@
           <a:noFill/>
         </p:spPr>
         <p:txBody>
-          <a:bodyPr wrap="square" lIns="0" tIns="0" rIns="0" bIns="0" anchor="t">
+          <a:bodyPr wrap="square" lIns="0" rIns="0" tIns="0" bIns="0" anchor="t">
             <a:spAutoFit/>
           </a:bodyPr>
           <a:lstStyle/>
@@ -6303,7 +6449,7 @@
           <a:noFill/>
         </p:spPr>
         <p:txBody>
-          <a:bodyPr wrap="square" lIns="0" tIns="0" rIns="0" bIns="0" anchor="t">
+          <a:bodyPr wrap="square" lIns="0" rIns="0" tIns="0" bIns="0" anchor="t">
             <a:spAutoFit/>
           </a:bodyPr>
           <a:lstStyle/>
@@ -6373,9 +6519,7 @@
         <p:txBody>
           <a:bodyPr rtlCol="0" anchor="ctr"/>
           <a:lstStyle/>
-          <a:p>
-            <a:endParaRPr/>
-          </a:p>
+          <a:p/>
         </p:txBody>
       </p:sp>
       <p:sp>
@@ -6395,7 +6539,7 @@
           <a:noFill/>
         </p:spPr>
         <p:txBody>
-          <a:bodyPr wrap="square" lIns="0" tIns="0" rIns="0" bIns="0" anchor="t">
+          <a:bodyPr wrap="square" lIns="0" rIns="0" tIns="0" bIns="0" anchor="t">
             <a:spAutoFit/>
           </a:bodyPr>
           <a:lstStyle/>
@@ -6439,7 +6583,7 @@
           <a:noFill/>
         </p:spPr>
         <p:txBody>
-          <a:bodyPr wrap="square" lIns="0" tIns="0" rIns="0" bIns="0" anchor="t">
+          <a:bodyPr wrap="square" lIns="0" rIns="0" tIns="0" bIns="0" anchor="t">
             <a:spAutoFit/>
           </a:bodyPr>
           <a:lstStyle/>
@@ -6509,9 +6653,7 @@
         <p:txBody>
           <a:bodyPr rtlCol="0" anchor="ctr"/>
           <a:lstStyle/>
-          <a:p>
-            <a:endParaRPr/>
-          </a:p>
+          <a:p/>
         </p:txBody>
       </p:sp>
       <p:sp>
@@ -6531,7 +6673,7 @@
           <a:noFill/>
         </p:spPr>
         <p:txBody>
-          <a:bodyPr wrap="square" lIns="0" tIns="0" rIns="0" bIns="0" anchor="t">
+          <a:bodyPr wrap="square" lIns="0" rIns="0" tIns="0" bIns="0" anchor="t">
             <a:spAutoFit/>
           </a:bodyPr>
           <a:lstStyle/>
@@ -6575,7 +6717,7 @@
           <a:noFill/>
         </p:spPr>
         <p:txBody>
-          <a:bodyPr wrap="square" lIns="0" tIns="0" rIns="0" bIns="0" anchor="t">
+          <a:bodyPr wrap="square" lIns="0" rIns="0" tIns="0" bIns="0" anchor="t">
             <a:spAutoFit/>
           </a:bodyPr>
           <a:lstStyle/>
@@ -6645,9 +6787,7 @@
         <p:txBody>
           <a:bodyPr rtlCol="0" anchor="ctr"/>
           <a:lstStyle/>
-          <a:p>
-            <a:endParaRPr/>
-          </a:p>
+          <a:p/>
         </p:txBody>
       </p:sp>
       <p:sp>
@@ -6667,7 +6807,7 @@
           <a:noFill/>
         </p:spPr>
         <p:txBody>
-          <a:bodyPr wrap="square" lIns="0" tIns="0" rIns="0" bIns="0" anchor="t">
+          <a:bodyPr wrap="square" lIns="0" rIns="0" tIns="0" bIns="0" anchor="t">
             <a:spAutoFit/>
           </a:bodyPr>
           <a:lstStyle/>
@@ -6711,7 +6851,7 @@
           <a:noFill/>
         </p:spPr>
         <p:txBody>
-          <a:bodyPr wrap="square" lIns="0" tIns="0" rIns="0" bIns="0" anchor="t">
+          <a:bodyPr wrap="square" lIns="0" rIns="0" tIns="0" bIns="0" anchor="t">
             <a:spAutoFit/>
           </a:bodyPr>
           <a:lstStyle/>
@@ -6781,9 +6921,7 @@
         <p:txBody>
           <a:bodyPr rtlCol="0" anchor="ctr"/>
           <a:lstStyle/>
-          <a:p>
-            <a:endParaRPr/>
-          </a:p>
+          <a:p/>
         </p:txBody>
       </p:sp>
       <p:sp>
@@ -6803,7 +6941,7 @@
           <a:noFill/>
         </p:spPr>
         <p:txBody>
-          <a:bodyPr wrap="square" lIns="0" tIns="0" rIns="0" bIns="0" anchor="t">
+          <a:bodyPr wrap="square" lIns="0" rIns="0" tIns="0" bIns="0" anchor="t">
             <a:spAutoFit/>
           </a:bodyPr>
           <a:lstStyle/>
@@ -6847,7 +6985,7 @@
           <a:noFill/>
         </p:spPr>
         <p:txBody>
-          <a:bodyPr wrap="square" lIns="0" tIns="0" rIns="0" bIns="0" anchor="t">
+          <a:bodyPr wrap="square" lIns="0" rIns="0" tIns="0" bIns="0" anchor="t">
             <a:spAutoFit/>
           </a:bodyPr>
           <a:lstStyle/>
@@ -6917,9 +7055,7 @@
         <p:txBody>
           <a:bodyPr rtlCol="0" anchor="ctr"/>
           <a:lstStyle/>
-          <a:p>
-            <a:endParaRPr/>
-          </a:p>
+          <a:p/>
         </p:txBody>
       </p:sp>
       <p:sp>
@@ -6939,7 +7075,7 @@
           <a:noFill/>
         </p:spPr>
         <p:txBody>
-          <a:bodyPr wrap="square" lIns="0" tIns="0" rIns="0" bIns="0" anchor="t">
+          <a:bodyPr wrap="square" lIns="0" rIns="0" tIns="0" bIns="0" anchor="t">
             <a:spAutoFit/>
           </a:bodyPr>
           <a:lstStyle/>
@@ -6983,7 +7119,7 @@
           <a:noFill/>
         </p:spPr>
         <p:txBody>
-          <a:bodyPr wrap="square" lIns="0" tIns="0" rIns="0" bIns="0" anchor="t">
+          <a:bodyPr wrap="square" lIns="0" rIns="0" tIns="0" bIns="0" anchor="t">
             <a:spAutoFit/>
           </a:bodyPr>
           <a:lstStyle/>
@@ -7053,9 +7189,7 @@
         <p:txBody>
           <a:bodyPr rtlCol="0" anchor="ctr"/>
           <a:lstStyle/>
-          <a:p>
-            <a:endParaRPr/>
-          </a:p>
+          <a:p/>
         </p:txBody>
       </p:sp>
       <p:sp>
@@ -7075,7 +7209,7 @@
           <a:noFill/>
         </p:spPr>
         <p:txBody>
-          <a:bodyPr wrap="square" lIns="0" tIns="0" rIns="0" bIns="0" anchor="t">
+          <a:bodyPr wrap="square" lIns="0" rIns="0" tIns="0" bIns="0" anchor="t">
             <a:spAutoFit/>
           </a:bodyPr>
           <a:lstStyle/>
@@ -7119,7 +7253,7 @@
           <a:noFill/>
         </p:spPr>
         <p:txBody>
-          <a:bodyPr wrap="square" lIns="0" tIns="0" rIns="0" bIns="0" anchor="t">
+          <a:bodyPr wrap="square" lIns="0" rIns="0" tIns="0" bIns="0" anchor="t">
             <a:spAutoFit/>
           </a:bodyPr>
           <a:lstStyle/>
@@ -7163,7 +7297,7 @@
           <a:noFill/>
         </p:spPr>
         <p:txBody>
-          <a:bodyPr wrap="square" lIns="0" tIns="0" rIns="0" bIns="0" anchor="t">
+          <a:bodyPr wrap="square" lIns="0" rIns="0" tIns="0" bIns="0" anchor="t">
             <a:spAutoFit/>
           </a:bodyPr>
           <a:lstStyle/>
@@ -7199,7 +7333,7 @@
 </file>
 
 <file path=ppt/slides/slide12.xml><?xml version="1.0" encoding="utf-8"?>
-<p:sld xmlns:a="http://schemas.openxmlformats.org/drawingml/2006/main" xmlns:r="http://schemas.openxmlformats.org/officeDocument/2006/relationships" xmlns:p="http://schemas.openxmlformats.org/presentationml/2006/main">
+<p:sld xmlns:a="http://schemas.openxmlformats.org/drawingml/2006/main" xmlns:p="http://schemas.openxmlformats.org/presentationml/2006/main" xmlns:r="http://schemas.openxmlformats.org/officeDocument/2006/relationships">
   <p:cSld>
     <p:bg>
       <p:bgPr>
@@ -7215,14 +7349,7 @@
         <p:cNvGrpSpPr/>
         <p:nvPr/>
       </p:nvGrpSpPr>
-      <p:grpSpPr>
-        <a:xfrm>
-          <a:off x="0" y="0"/>
-          <a:ext cx="0" cy="0"/>
-          <a:chOff x="0" y="0"/>
-          <a:chExt cx="0" cy="0"/>
-        </a:xfrm>
-      </p:grpSpPr>
+      <p:grpSpPr/>
       <p:sp>
         <p:nvSpPr>
           <p:cNvPr id="2" name="TextBox 1"/>
@@ -7240,7 +7367,7 @@
           <a:noFill/>
         </p:spPr>
         <p:txBody>
-          <a:bodyPr wrap="square" lIns="0" tIns="0" rIns="0" bIns="0" anchor="t">
+          <a:bodyPr wrap="square" lIns="0" rIns="0" tIns="0" bIns="0" anchor="t">
             <a:spAutoFit/>
           </a:bodyPr>
           <a:lstStyle/>
@@ -7284,7 +7411,7 @@
           <a:noFill/>
         </p:spPr>
         <p:txBody>
-          <a:bodyPr wrap="square" lIns="0" tIns="0" rIns="0" bIns="0" anchor="t">
+          <a:bodyPr wrap="square" lIns="0" rIns="0" tIns="0" bIns="0" anchor="t">
             <a:spAutoFit/>
           </a:bodyPr>
           <a:lstStyle/>
@@ -7352,9 +7479,7 @@
         <p:txBody>
           <a:bodyPr rtlCol="0" anchor="ctr"/>
           <a:lstStyle/>
-          <a:p>
-            <a:endParaRPr/>
-          </a:p>
+          <a:p/>
         </p:txBody>
       </p:sp>
       <p:sp>
@@ -7374,7 +7499,7 @@
           <a:noFill/>
         </p:spPr>
         <p:txBody>
-          <a:bodyPr wrap="square" lIns="0" tIns="0" rIns="0" bIns="0" anchor="t">
+          <a:bodyPr wrap="square" lIns="0" rIns="0" tIns="0" bIns="0" anchor="t">
             <a:spAutoFit/>
           </a:bodyPr>
           <a:lstStyle/>
@@ -7442,7 +7567,6 @@
           <a:lstStyle/>
           <a:p>
             <a:pPr algn="ctr"/>
-            <a:endParaRPr/>
           </a:p>
         </p:txBody>
       </p:sp>
@@ -7463,7 +7587,7 @@
           <a:noFill/>
         </p:spPr>
         <p:txBody>
-          <a:bodyPr wrap="square" lIns="0" tIns="0" rIns="0" bIns="0" anchor="t">
+          <a:bodyPr wrap="square" lIns="0" rIns="0" tIns="0" bIns="0" anchor="t">
             <a:spAutoFit/>
           </a:bodyPr>
           <a:lstStyle/>
@@ -7531,7 +7655,6 @@
           <a:lstStyle/>
           <a:p>
             <a:pPr algn="ctr"/>
-            <a:endParaRPr/>
           </a:p>
         </p:txBody>
       </p:sp>
@@ -7552,7 +7675,7 @@
           <a:noFill/>
         </p:spPr>
         <p:txBody>
-          <a:bodyPr wrap="square" lIns="0" tIns="0" rIns="0" bIns="0" anchor="t">
+          <a:bodyPr wrap="square" lIns="0" rIns="0" tIns="0" bIns="0" anchor="t">
             <a:spAutoFit/>
           </a:bodyPr>
           <a:lstStyle/>
@@ -7620,7 +7743,6 @@
           <a:lstStyle/>
           <a:p>
             <a:pPr algn="ctr"/>
-            <a:endParaRPr/>
           </a:p>
         </p:txBody>
       </p:sp>
@@ -7641,7 +7763,7 @@
           <a:noFill/>
         </p:spPr>
         <p:txBody>
-          <a:bodyPr wrap="square" lIns="0" tIns="0" rIns="0" bIns="0" anchor="t">
+          <a:bodyPr wrap="square" lIns="0" rIns="0" tIns="0" bIns="0" anchor="t">
             <a:spAutoFit/>
           </a:bodyPr>
           <a:lstStyle/>
@@ -7709,7 +7831,6 @@
           <a:lstStyle/>
           <a:p>
             <a:pPr algn="ctr"/>
-            <a:endParaRPr/>
           </a:p>
         </p:txBody>
       </p:sp>
@@ -7730,7 +7851,7 @@
           <a:noFill/>
         </p:spPr>
         <p:txBody>
-          <a:bodyPr wrap="square" lIns="0" tIns="0" rIns="0" bIns="0" anchor="t">
+          <a:bodyPr wrap="square" lIns="0" rIns="0" tIns="0" bIns="0" anchor="t">
             <a:spAutoFit/>
           </a:bodyPr>
           <a:lstStyle/>
@@ -7798,9 +7919,7 @@
         <p:txBody>
           <a:bodyPr rtlCol="0" anchor="ctr"/>
           <a:lstStyle/>
-          <a:p>
-            <a:endParaRPr/>
-          </a:p>
+          <a:p/>
         </p:txBody>
       </p:sp>
       <p:sp>
@@ -7820,7 +7939,7 @@
           <a:noFill/>
         </p:spPr>
         <p:txBody>
-          <a:bodyPr wrap="square" lIns="0" tIns="0" rIns="0" bIns="0" anchor="t">
+          <a:bodyPr wrap="square" lIns="0" rIns="0" tIns="0" bIns="0" anchor="t">
             <a:spAutoFit/>
           </a:bodyPr>
           <a:lstStyle/>
@@ -7888,7 +8007,6 @@
           <a:lstStyle/>
           <a:p>
             <a:pPr algn="ctr"/>
-            <a:endParaRPr/>
           </a:p>
         </p:txBody>
       </p:sp>
@@ -7909,7 +8027,7 @@
           <a:noFill/>
         </p:spPr>
         <p:txBody>
-          <a:bodyPr wrap="square" lIns="0" tIns="0" rIns="0" bIns="0" anchor="t">
+          <a:bodyPr wrap="square" lIns="0" rIns="0" tIns="0" bIns="0" anchor="t">
             <a:spAutoFit/>
           </a:bodyPr>
           <a:lstStyle/>
@@ -7977,7 +8095,6 @@
           <a:lstStyle/>
           <a:p>
             <a:pPr algn="ctr"/>
-            <a:endParaRPr/>
           </a:p>
         </p:txBody>
       </p:sp>
@@ -7998,7 +8115,7 @@
           <a:noFill/>
         </p:spPr>
         <p:txBody>
-          <a:bodyPr wrap="square" lIns="0" tIns="0" rIns="0" bIns="0" anchor="t">
+          <a:bodyPr wrap="square" lIns="0" rIns="0" tIns="0" bIns="0" anchor="t">
             <a:spAutoFit/>
           </a:bodyPr>
           <a:lstStyle/>
@@ -8066,7 +8183,6 @@
           <a:lstStyle/>
           <a:p>
             <a:pPr algn="ctr"/>
-            <a:endParaRPr/>
           </a:p>
         </p:txBody>
       </p:sp>
@@ -8087,7 +8203,7 @@
           <a:noFill/>
         </p:spPr>
         <p:txBody>
-          <a:bodyPr wrap="square" lIns="0" tIns="0" rIns="0" bIns="0" anchor="t">
+          <a:bodyPr wrap="square" lIns="0" rIns="0" tIns="0" bIns="0" anchor="t">
             <a:spAutoFit/>
           </a:bodyPr>
           <a:lstStyle/>
@@ -8155,7 +8271,6 @@
           <a:lstStyle/>
           <a:p>
             <a:pPr algn="ctr"/>
-            <a:endParaRPr/>
           </a:p>
         </p:txBody>
       </p:sp>
@@ -8176,7 +8291,7 @@
           <a:noFill/>
         </p:spPr>
         <p:txBody>
-          <a:bodyPr wrap="square" lIns="0" tIns="0" rIns="0" bIns="0" anchor="t">
+          <a:bodyPr wrap="square" lIns="0" rIns="0" tIns="0" bIns="0" anchor="t">
             <a:spAutoFit/>
           </a:bodyPr>
           <a:lstStyle/>
@@ -8244,9 +8359,7 @@
         <p:txBody>
           <a:bodyPr rtlCol="0" anchor="ctr"/>
           <a:lstStyle/>
-          <a:p>
-            <a:endParaRPr/>
-          </a:p>
+          <a:p/>
         </p:txBody>
       </p:sp>
       <p:sp>
@@ -8266,7 +8379,7 @@
           <a:noFill/>
         </p:spPr>
         <p:txBody>
-          <a:bodyPr wrap="square" lIns="0" tIns="0" rIns="0" bIns="0" anchor="t">
+          <a:bodyPr wrap="square" lIns="0" rIns="0" tIns="0" bIns="0" anchor="t">
             <a:spAutoFit/>
           </a:bodyPr>
           <a:lstStyle/>
@@ -8334,7 +8447,6 @@
           <a:lstStyle/>
           <a:p>
             <a:pPr algn="ctr"/>
-            <a:endParaRPr/>
           </a:p>
         </p:txBody>
       </p:sp>
@@ -8355,7 +8467,7 @@
           <a:noFill/>
         </p:spPr>
         <p:txBody>
-          <a:bodyPr wrap="square" lIns="0" tIns="0" rIns="0" bIns="0" anchor="t">
+          <a:bodyPr wrap="square" lIns="0" rIns="0" tIns="0" bIns="0" anchor="t">
             <a:spAutoFit/>
           </a:bodyPr>
           <a:lstStyle/>
@@ -8423,7 +8535,6 @@
           <a:lstStyle/>
           <a:p>
             <a:pPr algn="ctr"/>
-            <a:endParaRPr/>
           </a:p>
         </p:txBody>
       </p:sp>
@@ -8444,7 +8555,7 @@
           <a:noFill/>
         </p:spPr>
         <p:txBody>
-          <a:bodyPr wrap="square" lIns="0" tIns="0" rIns="0" bIns="0" anchor="t">
+          <a:bodyPr wrap="square" lIns="0" rIns="0" tIns="0" bIns="0" anchor="t">
             <a:spAutoFit/>
           </a:bodyPr>
           <a:lstStyle/>
@@ -8512,7 +8623,6 @@
           <a:lstStyle/>
           <a:p>
             <a:pPr algn="ctr"/>
-            <a:endParaRPr/>
           </a:p>
         </p:txBody>
       </p:sp>
@@ -8533,7 +8643,7 @@
           <a:noFill/>
         </p:spPr>
         <p:txBody>
-          <a:bodyPr wrap="square" lIns="0" tIns="0" rIns="0" bIns="0" anchor="t">
+          <a:bodyPr wrap="square" lIns="0" rIns="0" tIns="0" bIns="0" anchor="t">
             <a:spAutoFit/>
           </a:bodyPr>
           <a:lstStyle/>
@@ -8601,7 +8711,6 @@
           <a:lstStyle/>
           <a:p>
             <a:pPr algn="ctr"/>
-            <a:endParaRPr/>
           </a:p>
         </p:txBody>
       </p:sp>
@@ -8622,7 +8731,7 @@
           <a:noFill/>
         </p:spPr>
         <p:txBody>
-          <a:bodyPr wrap="square" lIns="0" tIns="0" rIns="0" bIns="0" anchor="t">
+          <a:bodyPr wrap="square" lIns="0" rIns="0" tIns="0" bIns="0" anchor="t">
             <a:spAutoFit/>
           </a:bodyPr>
           <a:lstStyle/>
@@ -8690,9 +8799,7 @@
         <p:txBody>
           <a:bodyPr rtlCol="0" anchor="ctr"/>
           <a:lstStyle/>
-          <a:p>
-            <a:endParaRPr/>
-          </a:p>
+          <a:p/>
         </p:txBody>
       </p:sp>
       <p:sp>
@@ -8712,7 +8819,7 @@
           <a:noFill/>
         </p:spPr>
         <p:txBody>
-          <a:bodyPr wrap="square" lIns="0" tIns="0" rIns="0" bIns="0" anchor="t">
+          <a:bodyPr wrap="square" lIns="0" rIns="0" tIns="0" bIns="0" anchor="t">
             <a:spAutoFit/>
           </a:bodyPr>
           <a:lstStyle/>
@@ -8780,7 +8887,6 @@
           <a:lstStyle/>
           <a:p>
             <a:pPr algn="ctr"/>
-            <a:endParaRPr/>
           </a:p>
         </p:txBody>
       </p:sp>
@@ -8801,7 +8907,7 @@
           <a:noFill/>
         </p:spPr>
         <p:txBody>
-          <a:bodyPr wrap="square" lIns="0" tIns="0" rIns="0" bIns="0" anchor="t">
+          <a:bodyPr wrap="square" lIns="0" rIns="0" tIns="0" bIns="0" anchor="t">
             <a:spAutoFit/>
           </a:bodyPr>
           <a:lstStyle/>
@@ -8869,7 +8975,6 @@
           <a:lstStyle/>
           <a:p>
             <a:pPr algn="ctr"/>
-            <a:endParaRPr/>
           </a:p>
         </p:txBody>
       </p:sp>
@@ -8890,7 +8995,7 @@
           <a:noFill/>
         </p:spPr>
         <p:txBody>
-          <a:bodyPr wrap="square" lIns="0" tIns="0" rIns="0" bIns="0" anchor="t">
+          <a:bodyPr wrap="square" lIns="0" rIns="0" tIns="0" bIns="0" anchor="t">
             <a:spAutoFit/>
           </a:bodyPr>
           <a:lstStyle/>
@@ -8958,7 +9063,6 @@
           <a:lstStyle/>
           <a:p>
             <a:pPr algn="ctr"/>
-            <a:endParaRPr/>
           </a:p>
         </p:txBody>
       </p:sp>
@@ -8979,7 +9083,7 @@
           <a:noFill/>
         </p:spPr>
         <p:txBody>
-          <a:bodyPr wrap="square" lIns="0" tIns="0" rIns="0" bIns="0" anchor="t">
+          <a:bodyPr wrap="square" lIns="0" rIns="0" tIns="0" bIns="0" anchor="t">
             <a:spAutoFit/>
           </a:bodyPr>
           <a:lstStyle/>
@@ -9023,7 +9127,7 @@
           <a:noFill/>
         </p:spPr>
         <p:txBody>
-          <a:bodyPr wrap="square" lIns="0" tIns="0" rIns="0" bIns="0" anchor="t">
+          <a:bodyPr wrap="square" lIns="0" rIns="0" tIns="0" bIns="0" anchor="t">
             <a:spAutoFit/>
           </a:bodyPr>
           <a:lstStyle/>
@@ -9059,7 +9163,7 @@
 </file>
 
 <file path=ppt/slides/slide13.xml><?xml version="1.0" encoding="utf-8"?>
-<p:sld xmlns:a="http://schemas.openxmlformats.org/drawingml/2006/main" xmlns:r="http://schemas.openxmlformats.org/officeDocument/2006/relationships" xmlns:p="http://schemas.openxmlformats.org/presentationml/2006/main">
+<p:sld xmlns:a="http://schemas.openxmlformats.org/drawingml/2006/main" xmlns:p="http://schemas.openxmlformats.org/presentationml/2006/main" xmlns:r="http://schemas.openxmlformats.org/officeDocument/2006/relationships">
   <p:cSld>
     <p:bg>
       <p:bgPr>
@@ -9075,14 +9179,7 @@
         <p:cNvGrpSpPr/>
         <p:nvPr/>
       </p:nvGrpSpPr>
-      <p:grpSpPr>
-        <a:xfrm>
-          <a:off x="0" y="0"/>
-          <a:ext cx="0" cy="0"/>
-          <a:chOff x="0" y="0"/>
-          <a:chExt cx="0" cy="0"/>
-        </a:xfrm>
-      </p:grpSpPr>
+      <p:grpSpPr/>
       <p:sp>
         <p:nvSpPr>
           <p:cNvPr id="2" name="TextBox 1"/>
@@ -9100,7 +9197,7 @@
           <a:noFill/>
         </p:spPr>
         <p:txBody>
-          <a:bodyPr wrap="square" lIns="0" tIns="0" rIns="0" bIns="0" anchor="t">
+          <a:bodyPr wrap="square" lIns="0" rIns="0" tIns="0" bIns="0" anchor="t">
             <a:spAutoFit/>
           </a:bodyPr>
           <a:lstStyle/>
@@ -9144,7 +9241,7 @@
           <a:noFill/>
         </p:spPr>
         <p:txBody>
-          <a:bodyPr wrap="square" lIns="0" tIns="0" rIns="0" bIns="0" anchor="t">
+          <a:bodyPr wrap="square" lIns="0" rIns="0" tIns="0" bIns="0" anchor="t">
             <a:spAutoFit/>
           </a:bodyPr>
           <a:lstStyle/>
@@ -9212,9 +9309,7 @@
         <p:txBody>
           <a:bodyPr rtlCol="0" anchor="ctr"/>
           <a:lstStyle/>
-          <a:p>
-            <a:endParaRPr/>
-          </a:p>
+          <a:p/>
         </p:txBody>
       </p:sp>
       <p:sp>
@@ -9254,7 +9349,7 @@
           </a:fontRef>
         </p:style>
         <p:txBody>
-          <a:bodyPr lIns="0" tIns="0" rIns="0" bIns="0" rtlCol="0" anchor="ctr"/>
+          <a:bodyPr rtlCol="0" anchor="ctr" lIns="0" rIns="0" tIns="0" bIns="0"/>
           <a:lstStyle/>
           <a:p>
             <a:pPr algn="ctr"/>
@@ -9289,7 +9384,7 @@
           <a:noFill/>
         </p:spPr>
         <p:txBody>
-          <a:bodyPr wrap="square" lIns="0" tIns="0" rIns="0" bIns="0" anchor="t">
+          <a:bodyPr wrap="square" lIns="0" rIns="0" tIns="0" bIns="0" anchor="t">
             <a:spAutoFit/>
           </a:bodyPr>
           <a:lstStyle/>
@@ -9333,7 +9428,7 @@
           <a:noFill/>
         </p:spPr>
         <p:txBody>
-          <a:bodyPr wrap="square" lIns="0" tIns="0" rIns="0" bIns="0" anchor="t">
+          <a:bodyPr wrap="square" lIns="0" rIns="0" tIns="0" bIns="0" anchor="t">
             <a:spAutoFit/>
           </a:bodyPr>
           <a:lstStyle/>
@@ -9402,9 +9497,7 @@
         <p:txBody>
           <a:bodyPr rtlCol="0" anchor="ctr"/>
           <a:lstStyle/>
-          <a:p>
-            <a:endParaRPr/>
-          </a:p>
+          <a:p/>
         </p:txBody>
       </p:sp>
       <p:sp>
@@ -9444,7 +9537,7 @@
           </a:fontRef>
         </p:style>
         <p:txBody>
-          <a:bodyPr lIns="0" tIns="0" rIns="0" bIns="0" rtlCol="0" anchor="ctr"/>
+          <a:bodyPr rtlCol="0" anchor="ctr" lIns="0" rIns="0" tIns="0" bIns="0"/>
           <a:lstStyle/>
           <a:p>
             <a:pPr algn="ctr"/>
@@ -9479,7 +9572,7 @@
           <a:noFill/>
         </p:spPr>
         <p:txBody>
-          <a:bodyPr wrap="square" lIns="0" tIns="0" rIns="0" bIns="0" anchor="t">
+          <a:bodyPr wrap="square" lIns="0" rIns="0" tIns="0" bIns="0" anchor="t">
             <a:spAutoFit/>
           </a:bodyPr>
           <a:lstStyle/>
@@ -9523,7 +9616,7 @@
           <a:noFill/>
         </p:spPr>
         <p:txBody>
-          <a:bodyPr wrap="square" lIns="0" tIns="0" rIns="0" bIns="0" anchor="t">
+          <a:bodyPr wrap="square" lIns="0" rIns="0" tIns="0" bIns="0" anchor="t">
             <a:spAutoFit/>
           </a:bodyPr>
           <a:lstStyle/>
@@ -9591,9 +9684,7 @@
         <p:txBody>
           <a:bodyPr rtlCol="0" anchor="ctr"/>
           <a:lstStyle/>
-          <a:p>
-            <a:endParaRPr/>
-          </a:p>
+          <a:p/>
         </p:txBody>
       </p:sp>
       <p:sp>
@@ -9633,7 +9724,7 @@
           </a:fontRef>
         </p:style>
         <p:txBody>
-          <a:bodyPr lIns="0" tIns="0" rIns="0" bIns="0" rtlCol="0" anchor="ctr"/>
+          <a:bodyPr rtlCol="0" anchor="ctr" lIns="0" rIns="0" tIns="0" bIns="0"/>
           <a:lstStyle/>
           <a:p>
             <a:pPr algn="ctr"/>
@@ -9668,7 +9759,7 @@
           <a:noFill/>
         </p:spPr>
         <p:txBody>
-          <a:bodyPr wrap="square" lIns="0" tIns="0" rIns="0" bIns="0" anchor="t">
+          <a:bodyPr wrap="square" lIns="0" rIns="0" tIns="0" bIns="0" anchor="t">
             <a:spAutoFit/>
           </a:bodyPr>
           <a:lstStyle/>
@@ -9712,7 +9803,7 @@
           <a:noFill/>
         </p:spPr>
         <p:txBody>
-          <a:bodyPr wrap="square" lIns="0" tIns="0" rIns="0" bIns="0" anchor="t">
+          <a:bodyPr wrap="square" lIns="0" rIns="0" tIns="0" bIns="0" anchor="t">
             <a:spAutoFit/>
           </a:bodyPr>
           <a:lstStyle/>
@@ -9781,9 +9872,7 @@
         <p:txBody>
           <a:bodyPr rtlCol="0" anchor="ctr"/>
           <a:lstStyle/>
-          <a:p>
-            <a:endParaRPr/>
-          </a:p>
+          <a:p/>
         </p:txBody>
       </p:sp>
       <p:sp>
@@ -9823,7 +9912,7 @@
           </a:fontRef>
         </p:style>
         <p:txBody>
-          <a:bodyPr lIns="0" tIns="0" rIns="0" bIns="0" rtlCol="0" anchor="ctr"/>
+          <a:bodyPr rtlCol="0" anchor="ctr" lIns="0" rIns="0" tIns="0" bIns="0"/>
           <a:lstStyle/>
           <a:p>
             <a:pPr algn="ctr"/>
@@ -9858,7 +9947,7 @@
           <a:noFill/>
         </p:spPr>
         <p:txBody>
-          <a:bodyPr wrap="square" lIns="0" tIns="0" rIns="0" bIns="0" anchor="t">
+          <a:bodyPr wrap="square" lIns="0" rIns="0" tIns="0" bIns="0" anchor="t">
             <a:spAutoFit/>
           </a:bodyPr>
           <a:lstStyle/>
@@ -9902,7 +9991,7 @@
           <a:noFill/>
         </p:spPr>
         <p:txBody>
-          <a:bodyPr wrap="square" lIns="0" tIns="0" rIns="0" bIns="0" anchor="t">
+          <a:bodyPr wrap="square" lIns="0" rIns="0" tIns="0" bIns="0" anchor="t">
             <a:spAutoFit/>
           </a:bodyPr>
           <a:lstStyle/>
@@ -9924,7 +10013,7 @@
                 <a:ea typeface="Leelawadee UI"/>
                 <a:cs typeface="Leelawadee UI"/>
               </a:rPr>
-              <a:t>git commit -m "Release 1.6: …"</a:t>
+              <a:t>git commit -m "Release 1.8: …"</a:t>
             </a:r>
           </a:p>
         </p:txBody>
@@ -9970,9 +10059,7 @@
         <p:txBody>
           <a:bodyPr rtlCol="0" anchor="ctr"/>
           <a:lstStyle/>
-          <a:p>
-            <a:endParaRPr/>
-          </a:p>
+          <a:p/>
         </p:txBody>
       </p:sp>
       <p:sp>
@@ -10012,7 +10099,7 @@
           </a:fontRef>
         </p:style>
         <p:txBody>
-          <a:bodyPr lIns="0" tIns="0" rIns="0" bIns="0" rtlCol="0" anchor="ctr"/>
+          <a:bodyPr rtlCol="0" anchor="ctr" lIns="0" rIns="0" tIns="0" bIns="0"/>
           <a:lstStyle/>
           <a:p>
             <a:pPr algn="ctr"/>
@@ -10047,7 +10134,7 @@
           <a:noFill/>
         </p:spPr>
         <p:txBody>
-          <a:bodyPr wrap="square" lIns="0" tIns="0" rIns="0" bIns="0" anchor="t">
+          <a:bodyPr wrap="square" lIns="0" rIns="0" tIns="0" bIns="0" anchor="t">
             <a:spAutoFit/>
           </a:bodyPr>
           <a:lstStyle/>
@@ -10091,7 +10178,7 @@
           <a:noFill/>
         </p:spPr>
         <p:txBody>
-          <a:bodyPr wrap="square" lIns="0" tIns="0" rIns="0" bIns="0" anchor="t">
+          <a:bodyPr wrap="square" lIns="0" rIns="0" tIns="0" bIns="0" anchor="t">
             <a:spAutoFit/>
           </a:bodyPr>
           <a:lstStyle/>
@@ -10159,9 +10246,7 @@
         <p:txBody>
           <a:bodyPr rtlCol="0" anchor="ctr"/>
           <a:lstStyle/>
-          <a:p>
-            <a:endParaRPr/>
-          </a:p>
+          <a:p/>
         </p:txBody>
       </p:sp>
       <p:sp>
@@ -10201,7 +10286,7 @@
           </a:fontRef>
         </p:style>
         <p:txBody>
-          <a:bodyPr lIns="0" tIns="0" rIns="0" bIns="0" rtlCol="0" anchor="ctr"/>
+          <a:bodyPr rtlCol="0" anchor="ctr" lIns="0" rIns="0" tIns="0" bIns="0"/>
           <a:lstStyle/>
           <a:p>
             <a:pPr algn="ctr"/>
@@ -10236,7 +10321,7 @@
           <a:noFill/>
         </p:spPr>
         <p:txBody>
-          <a:bodyPr wrap="square" lIns="0" tIns="0" rIns="0" bIns="0" anchor="t">
+          <a:bodyPr wrap="square" lIns="0" rIns="0" tIns="0" bIns="0" anchor="t">
             <a:spAutoFit/>
           </a:bodyPr>
           <a:lstStyle/>
@@ -10280,7 +10365,7 @@
           <a:noFill/>
         </p:spPr>
         <p:txBody>
-          <a:bodyPr wrap="square" lIns="0" tIns="0" rIns="0" bIns="0" anchor="t">
+          <a:bodyPr wrap="square" lIns="0" rIns="0" tIns="0" bIns="0" anchor="t">
             <a:spAutoFit/>
           </a:bodyPr>
           <a:lstStyle/>
@@ -10325,7 +10410,7 @@
           <a:noFill/>
         </p:spPr>
         <p:txBody>
-          <a:bodyPr wrap="square" lIns="0" tIns="0" rIns="0" bIns="0" anchor="t">
+          <a:bodyPr wrap="square" lIns="0" rIns="0" tIns="0" bIns="0" anchor="t">
             <a:spAutoFit/>
           </a:bodyPr>
           <a:lstStyle/>
@@ -10380,7 +10465,7 @@
           <a:noFill/>
         </p:spPr>
         <p:txBody>
-          <a:bodyPr wrap="square" lIns="0" tIns="0" rIns="0" bIns="0" anchor="t">
+          <a:bodyPr wrap="square" lIns="0" rIns="0" tIns="0" bIns="0" anchor="t">
             <a:spAutoFit/>
           </a:bodyPr>
           <a:lstStyle/>
@@ -10416,7 +10501,7 @@
 </file>
 
 <file path=ppt/slides/slide14.xml><?xml version="1.0" encoding="utf-8"?>
-<p:sld xmlns:a="http://schemas.openxmlformats.org/drawingml/2006/main" xmlns:r="http://schemas.openxmlformats.org/officeDocument/2006/relationships" xmlns:p="http://schemas.openxmlformats.org/presentationml/2006/main">
+<p:sld xmlns:a="http://schemas.openxmlformats.org/drawingml/2006/main" xmlns:p="http://schemas.openxmlformats.org/presentationml/2006/main" xmlns:r="http://schemas.openxmlformats.org/officeDocument/2006/relationships">
   <p:cSld>
     <p:bg>
       <p:bgPr>
@@ -10432,14 +10517,7 @@
         <p:cNvGrpSpPr/>
         <p:nvPr/>
       </p:nvGrpSpPr>
-      <p:grpSpPr>
-        <a:xfrm>
-          <a:off x="0" y="0"/>
-          <a:ext cx="0" cy="0"/>
-          <a:chOff x="0" y="0"/>
-          <a:chExt cx="0" cy="0"/>
-        </a:xfrm>
-      </p:grpSpPr>
+      <p:grpSpPr/>
       <p:sp>
         <p:nvSpPr>
           <p:cNvPr id="2" name="TextBox 1"/>
@@ -10457,7 +10535,7 @@
           <a:noFill/>
         </p:spPr>
         <p:txBody>
-          <a:bodyPr wrap="square" lIns="0" tIns="0" rIns="0" bIns="0" anchor="t">
+          <a:bodyPr wrap="square" lIns="0" rIns="0" tIns="0" bIns="0" anchor="t">
             <a:spAutoFit/>
           </a:bodyPr>
           <a:lstStyle/>
@@ -10501,7 +10579,7 @@
           <a:noFill/>
         </p:spPr>
         <p:txBody>
-          <a:bodyPr wrap="square" lIns="0" tIns="0" rIns="0" bIns="0" anchor="t">
+          <a:bodyPr wrap="square" lIns="0" rIns="0" tIns="0" bIns="0" anchor="t">
             <a:spAutoFit/>
           </a:bodyPr>
           <a:lstStyle/>
@@ -10567,9 +10645,7 @@
         <p:txBody>
           <a:bodyPr rtlCol="0" anchor="ctr"/>
           <a:lstStyle/>
-          <a:p>
-            <a:endParaRPr/>
-          </a:p>
+          <a:p/>
         </p:txBody>
       </p:sp>
       <p:sp>
@@ -10589,7 +10665,7 @@
           <a:noFill/>
         </p:spPr>
         <p:txBody>
-          <a:bodyPr wrap="square" lIns="0" tIns="0" rIns="0" bIns="0" anchor="t">
+          <a:bodyPr wrap="square" lIns="0" rIns="0" tIns="0" bIns="0" anchor="t">
             <a:spAutoFit/>
           </a:bodyPr>
           <a:lstStyle/>
@@ -10655,9 +10731,7 @@
         <p:txBody>
           <a:bodyPr rtlCol="0" anchor="ctr"/>
           <a:lstStyle/>
-          <a:p>
-            <a:endParaRPr/>
-          </a:p>
+          <a:p/>
         </p:txBody>
       </p:sp>
       <p:sp>
@@ -10677,7 +10751,7 @@
           <a:noFill/>
         </p:spPr>
         <p:txBody>
-          <a:bodyPr wrap="square" lIns="0" tIns="0" rIns="0" bIns="0" anchor="t">
+          <a:bodyPr wrap="square" lIns="0" rIns="0" tIns="0" bIns="0" anchor="t">
             <a:spAutoFit/>
           </a:bodyPr>
           <a:lstStyle/>
@@ -10743,9 +10817,7 @@
         <p:txBody>
           <a:bodyPr rtlCol="0" anchor="ctr"/>
           <a:lstStyle/>
-          <a:p>
-            <a:endParaRPr/>
-          </a:p>
+          <a:p/>
         </p:txBody>
       </p:sp>
       <p:sp>
@@ -10765,7 +10837,7 @@
           <a:noFill/>
         </p:spPr>
         <p:txBody>
-          <a:bodyPr wrap="square" lIns="0" tIns="0" rIns="0" bIns="0" anchor="t">
+          <a:bodyPr wrap="square" lIns="0" rIns="0" tIns="0" bIns="0" anchor="t">
             <a:spAutoFit/>
           </a:bodyPr>
           <a:lstStyle/>
@@ -10833,9 +10905,7 @@
         <p:txBody>
           <a:bodyPr rtlCol="0" anchor="ctr"/>
           <a:lstStyle/>
-          <a:p>
-            <a:endParaRPr/>
-          </a:p>
+          <a:p/>
         </p:txBody>
       </p:sp>
       <p:sp>
@@ -10855,7 +10925,7 @@
           <a:noFill/>
         </p:spPr>
         <p:txBody>
-          <a:bodyPr wrap="square" lIns="0" tIns="0" rIns="0" bIns="0" anchor="t">
+          <a:bodyPr wrap="square" lIns="0" rIns="0" tIns="0" bIns="0" anchor="t">
             <a:spAutoFit/>
           </a:bodyPr>
           <a:lstStyle/>
@@ -10923,9 +10993,7 @@
         <p:txBody>
           <a:bodyPr rtlCol="0" anchor="ctr"/>
           <a:lstStyle/>
-          <a:p>
-            <a:endParaRPr/>
-          </a:p>
+          <a:p/>
         </p:txBody>
       </p:sp>
       <p:sp>
@@ -10945,7 +11013,7 @@
           <a:noFill/>
         </p:spPr>
         <p:txBody>
-          <a:bodyPr wrap="square" lIns="0" tIns="0" rIns="0" bIns="0" anchor="t">
+          <a:bodyPr wrap="square" lIns="0" rIns="0" tIns="0" bIns="0" anchor="t">
             <a:spAutoFit/>
           </a:bodyPr>
           <a:lstStyle/>
@@ -11013,9 +11081,7 @@
         <p:txBody>
           <a:bodyPr rtlCol="0" anchor="ctr"/>
           <a:lstStyle/>
-          <a:p>
-            <a:endParaRPr/>
-          </a:p>
+          <a:p/>
         </p:txBody>
       </p:sp>
       <p:sp>
@@ -11035,7 +11101,7 @@
           <a:noFill/>
         </p:spPr>
         <p:txBody>
-          <a:bodyPr wrap="square" lIns="0" tIns="0" rIns="0" bIns="0" anchor="t">
+          <a:bodyPr wrap="square" lIns="0" rIns="0" tIns="0" bIns="0" anchor="t">
             <a:spAutoFit/>
           </a:bodyPr>
           <a:lstStyle/>
@@ -11103,9 +11169,7 @@
         <p:txBody>
           <a:bodyPr rtlCol="0" anchor="ctr"/>
           <a:lstStyle/>
-          <a:p>
-            <a:endParaRPr/>
-          </a:p>
+          <a:p/>
         </p:txBody>
       </p:sp>
       <p:sp>
@@ -11125,7 +11189,7 @@
           <a:noFill/>
         </p:spPr>
         <p:txBody>
-          <a:bodyPr wrap="square" lIns="0" tIns="0" rIns="0" bIns="0" anchor="t">
+          <a:bodyPr wrap="square" lIns="0" rIns="0" tIns="0" bIns="0" anchor="t">
             <a:spAutoFit/>
           </a:bodyPr>
           <a:lstStyle/>
@@ -11193,9 +11257,7 @@
         <p:txBody>
           <a:bodyPr rtlCol="0" anchor="ctr"/>
           <a:lstStyle/>
-          <a:p>
-            <a:endParaRPr/>
-          </a:p>
+          <a:p/>
         </p:txBody>
       </p:sp>
       <p:sp>
@@ -11215,7 +11277,7 @@
           <a:noFill/>
         </p:spPr>
         <p:txBody>
-          <a:bodyPr wrap="square" lIns="0" tIns="0" rIns="0" bIns="0" anchor="t">
+          <a:bodyPr wrap="square" lIns="0" rIns="0" tIns="0" bIns="0" anchor="t">
             <a:spAutoFit/>
           </a:bodyPr>
           <a:lstStyle/>
@@ -11283,9 +11345,7 @@
         <p:txBody>
           <a:bodyPr rtlCol="0" anchor="ctr"/>
           <a:lstStyle/>
-          <a:p>
-            <a:endParaRPr/>
-          </a:p>
+          <a:p/>
         </p:txBody>
       </p:sp>
       <p:sp>
@@ -11305,7 +11365,7 @@
           <a:noFill/>
         </p:spPr>
         <p:txBody>
-          <a:bodyPr wrap="square" lIns="0" tIns="0" rIns="0" bIns="0" anchor="t">
+          <a:bodyPr wrap="square" lIns="0" rIns="0" tIns="0" bIns="0" anchor="t">
             <a:spAutoFit/>
           </a:bodyPr>
           <a:lstStyle/>
@@ -11373,9 +11433,7 @@
         <p:txBody>
           <a:bodyPr rtlCol="0" anchor="ctr"/>
           <a:lstStyle/>
-          <a:p>
-            <a:endParaRPr/>
-          </a:p>
+          <a:p/>
         </p:txBody>
       </p:sp>
       <p:sp>
@@ -11395,7 +11453,7 @@
           <a:noFill/>
         </p:spPr>
         <p:txBody>
-          <a:bodyPr wrap="square" lIns="0" tIns="0" rIns="0" bIns="0" anchor="t">
+          <a:bodyPr wrap="square" lIns="0" rIns="0" tIns="0" bIns="0" anchor="t">
             <a:spAutoFit/>
           </a:bodyPr>
           <a:lstStyle/>
@@ -11463,9 +11521,7 @@
         <p:txBody>
           <a:bodyPr rtlCol="0" anchor="ctr"/>
           <a:lstStyle/>
-          <a:p>
-            <a:endParaRPr/>
-          </a:p>
+          <a:p/>
         </p:txBody>
       </p:sp>
       <p:sp>
@@ -11485,7 +11541,7 @@
           <a:noFill/>
         </p:spPr>
         <p:txBody>
-          <a:bodyPr wrap="square" lIns="0" tIns="0" rIns="0" bIns="0" anchor="t">
+          <a:bodyPr wrap="square" lIns="0" rIns="0" tIns="0" bIns="0" anchor="t">
             <a:spAutoFit/>
           </a:bodyPr>
           <a:lstStyle/>
@@ -11553,9 +11609,7 @@
         <p:txBody>
           <a:bodyPr rtlCol="0" anchor="ctr"/>
           <a:lstStyle/>
-          <a:p>
-            <a:endParaRPr/>
-          </a:p>
+          <a:p/>
         </p:txBody>
       </p:sp>
       <p:sp>
@@ -11575,7 +11629,7 @@
           <a:noFill/>
         </p:spPr>
         <p:txBody>
-          <a:bodyPr wrap="square" lIns="0" tIns="0" rIns="0" bIns="0" anchor="t">
+          <a:bodyPr wrap="square" lIns="0" rIns="0" tIns="0" bIns="0" anchor="t">
             <a:spAutoFit/>
           </a:bodyPr>
           <a:lstStyle/>
@@ -11643,9 +11697,7 @@
         <p:txBody>
           <a:bodyPr rtlCol="0" anchor="ctr"/>
           <a:lstStyle/>
-          <a:p>
-            <a:endParaRPr/>
-          </a:p>
+          <a:p/>
         </p:txBody>
       </p:sp>
       <p:sp>
@@ -11665,7 +11717,7 @@
           <a:noFill/>
         </p:spPr>
         <p:txBody>
-          <a:bodyPr wrap="square" lIns="0" tIns="0" rIns="0" bIns="0" anchor="t">
+          <a:bodyPr wrap="square" lIns="0" rIns="0" tIns="0" bIns="0" anchor="t">
             <a:spAutoFit/>
           </a:bodyPr>
           <a:lstStyle/>
@@ -11733,9 +11785,7 @@
         <p:txBody>
           <a:bodyPr rtlCol="0" anchor="ctr"/>
           <a:lstStyle/>
-          <a:p>
-            <a:endParaRPr/>
-          </a:p>
+          <a:p/>
         </p:txBody>
       </p:sp>
       <p:sp>
@@ -11755,7 +11805,7 @@
           <a:noFill/>
         </p:spPr>
         <p:txBody>
-          <a:bodyPr wrap="square" lIns="0" tIns="0" rIns="0" bIns="0" anchor="t">
+          <a:bodyPr wrap="square" lIns="0" rIns="0" tIns="0" bIns="0" anchor="t">
             <a:spAutoFit/>
           </a:bodyPr>
           <a:lstStyle/>
@@ -11823,9 +11873,7 @@
         <p:txBody>
           <a:bodyPr rtlCol="0" anchor="ctr"/>
           <a:lstStyle/>
-          <a:p>
-            <a:endParaRPr/>
-          </a:p>
+          <a:p/>
         </p:txBody>
       </p:sp>
       <p:sp>
@@ -11845,7 +11893,7 @@
           <a:noFill/>
         </p:spPr>
         <p:txBody>
-          <a:bodyPr wrap="square" lIns="0" tIns="0" rIns="0" bIns="0" anchor="t">
+          <a:bodyPr wrap="square" lIns="0" rIns="0" tIns="0" bIns="0" anchor="t">
             <a:spAutoFit/>
           </a:bodyPr>
           <a:lstStyle/>
@@ -11913,9 +11961,7 @@
         <p:txBody>
           <a:bodyPr rtlCol="0" anchor="ctr"/>
           <a:lstStyle/>
-          <a:p>
-            <a:endParaRPr/>
-          </a:p>
+          <a:p/>
         </p:txBody>
       </p:sp>
       <p:sp>
@@ -11935,7 +11981,7 @@
           <a:noFill/>
         </p:spPr>
         <p:txBody>
-          <a:bodyPr wrap="square" lIns="0" tIns="0" rIns="0" bIns="0" anchor="t">
+          <a:bodyPr wrap="square" lIns="0" rIns="0" tIns="0" bIns="0" anchor="t">
             <a:spAutoFit/>
           </a:bodyPr>
           <a:lstStyle/>
@@ -12003,9 +12049,7 @@
         <p:txBody>
           <a:bodyPr rtlCol="0" anchor="ctr"/>
           <a:lstStyle/>
-          <a:p>
-            <a:endParaRPr/>
-          </a:p>
+          <a:p/>
         </p:txBody>
       </p:sp>
       <p:sp>
@@ -12025,7 +12069,7 @@
           <a:noFill/>
         </p:spPr>
         <p:txBody>
-          <a:bodyPr wrap="square" lIns="0" tIns="0" rIns="0" bIns="0" anchor="t">
+          <a:bodyPr wrap="square" lIns="0" rIns="0" tIns="0" bIns="0" anchor="t">
             <a:spAutoFit/>
           </a:bodyPr>
           <a:lstStyle/>
@@ -12093,9 +12137,7 @@
         <p:txBody>
           <a:bodyPr rtlCol="0" anchor="ctr"/>
           <a:lstStyle/>
-          <a:p>
-            <a:endParaRPr/>
-          </a:p>
+          <a:p/>
         </p:txBody>
       </p:sp>
       <p:sp>
@@ -12115,7 +12157,7 @@
           <a:noFill/>
         </p:spPr>
         <p:txBody>
-          <a:bodyPr wrap="square" lIns="0" tIns="0" rIns="0" bIns="0" anchor="t">
+          <a:bodyPr wrap="square" lIns="0" rIns="0" tIns="0" bIns="0" anchor="t">
             <a:spAutoFit/>
           </a:bodyPr>
           <a:lstStyle/>
@@ -12183,9 +12225,7 @@
         <p:txBody>
           <a:bodyPr rtlCol="0" anchor="ctr"/>
           <a:lstStyle/>
-          <a:p>
-            <a:endParaRPr/>
-          </a:p>
+          <a:p/>
         </p:txBody>
       </p:sp>
       <p:sp>
@@ -12205,7 +12245,7 @@
           <a:noFill/>
         </p:spPr>
         <p:txBody>
-          <a:bodyPr wrap="square" lIns="0" tIns="0" rIns="0" bIns="0" anchor="t">
+          <a:bodyPr wrap="square" lIns="0" rIns="0" tIns="0" bIns="0" anchor="t">
             <a:spAutoFit/>
           </a:bodyPr>
           <a:lstStyle/>
@@ -12273,9 +12313,7 @@
         <p:txBody>
           <a:bodyPr rtlCol="0" anchor="ctr"/>
           <a:lstStyle/>
-          <a:p>
-            <a:endParaRPr/>
-          </a:p>
+          <a:p/>
         </p:txBody>
       </p:sp>
       <p:sp>
@@ -12295,7 +12333,7 @@
           <a:noFill/>
         </p:spPr>
         <p:txBody>
-          <a:bodyPr wrap="square" lIns="0" tIns="0" rIns="0" bIns="0" anchor="t">
+          <a:bodyPr wrap="square" lIns="0" rIns="0" tIns="0" bIns="0" anchor="t">
             <a:spAutoFit/>
           </a:bodyPr>
           <a:lstStyle/>
@@ -12363,9 +12401,7 @@
         <p:txBody>
           <a:bodyPr rtlCol="0" anchor="ctr"/>
           <a:lstStyle/>
-          <a:p>
-            <a:endParaRPr/>
-          </a:p>
+          <a:p/>
         </p:txBody>
       </p:sp>
       <p:sp>
@@ -12385,7 +12421,7 @@
           <a:noFill/>
         </p:spPr>
         <p:txBody>
-          <a:bodyPr wrap="square" lIns="0" tIns="0" rIns="0" bIns="0" anchor="t">
+          <a:bodyPr wrap="square" lIns="0" rIns="0" tIns="0" bIns="0" anchor="t">
             <a:spAutoFit/>
           </a:bodyPr>
           <a:lstStyle/>
@@ -12429,7 +12465,7 @@
           <a:noFill/>
         </p:spPr>
         <p:txBody>
-          <a:bodyPr wrap="square" lIns="0" tIns="0" rIns="0" bIns="0" anchor="t">
+          <a:bodyPr wrap="square" lIns="0" rIns="0" tIns="0" bIns="0" anchor="t">
             <a:spAutoFit/>
           </a:bodyPr>
           <a:lstStyle/>
@@ -12465,7 +12501,7 @@
 </file>
 
 <file path=ppt/slides/slide15.xml><?xml version="1.0" encoding="utf-8"?>
-<p:sld xmlns:a="http://schemas.openxmlformats.org/drawingml/2006/main" xmlns:r="http://schemas.openxmlformats.org/officeDocument/2006/relationships" xmlns:p="http://schemas.openxmlformats.org/presentationml/2006/main">
+<p:sld xmlns:a="http://schemas.openxmlformats.org/drawingml/2006/main" xmlns:p="http://schemas.openxmlformats.org/presentationml/2006/main" xmlns:r="http://schemas.openxmlformats.org/officeDocument/2006/relationships">
   <p:cSld>
     <p:bg>
       <p:bgPr>
@@ -12481,14 +12517,7 @@
         <p:cNvGrpSpPr/>
         <p:nvPr/>
       </p:nvGrpSpPr>
-      <p:grpSpPr>
-        <a:xfrm>
-          <a:off x="0" y="0"/>
-          <a:ext cx="0" cy="0"/>
-          <a:chOff x="0" y="0"/>
-          <a:chExt cx="0" cy="0"/>
-        </a:xfrm>
-      </p:grpSpPr>
+      <p:grpSpPr/>
       <p:sp>
         <p:nvSpPr>
           <p:cNvPr id="2" name="TextBox 1"/>
@@ -12506,7 +12535,7 @@
           <a:noFill/>
         </p:spPr>
         <p:txBody>
-          <a:bodyPr wrap="square" lIns="0" tIns="0" rIns="0" bIns="0" anchor="t">
+          <a:bodyPr wrap="square" lIns="0" rIns="0" tIns="0" bIns="0" anchor="t">
             <a:spAutoFit/>
           </a:bodyPr>
           <a:lstStyle/>
@@ -12570,7 +12599,7 @@
           </a:fontRef>
         </p:style>
         <p:txBody>
-          <a:bodyPr lIns="0" tIns="0" rIns="0" bIns="0" rtlCol="0" anchor="ctr"/>
+          <a:bodyPr rtlCol="0" anchor="ctr" lIns="0" rIns="0" tIns="0" bIns="0"/>
           <a:lstStyle/>
           <a:p>
             <a:pPr algn="ctr"/>
@@ -12605,7 +12634,7 @@
           <a:noFill/>
         </p:spPr>
         <p:txBody>
-          <a:bodyPr wrap="square" lIns="0" tIns="0" rIns="0" bIns="0" anchor="t">
+          <a:bodyPr wrap="square" lIns="0" rIns="0" tIns="0" bIns="0" anchor="t">
             <a:spAutoFit/>
           </a:bodyPr>
           <a:lstStyle/>
@@ -12649,7 +12678,7 @@
           <a:noFill/>
         </p:spPr>
         <p:txBody>
-          <a:bodyPr wrap="square" lIns="0" tIns="0" rIns="0" bIns="0" anchor="t">
+          <a:bodyPr wrap="square" lIns="0" rIns="0" tIns="0" bIns="0" anchor="t">
             <a:spAutoFit/>
           </a:bodyPr>
           <a:lstStyle/>
@@ -12713,7 +12742,7 @@
           </a:fontRef>
         </p:style>
         <p:txBody>
-          <a:bodyPr lIns="0" tIns="0" rIns="0" bIns="0" rtlCol="0" anchor="ctr"/>
+          <a:bodyPr rtlCol="0" anchor="ctr" lIns="0" rIns="0" tIns="0" bIns="0"/>
           <a:lstStyle/>
           <a:p>
             <a:pPr algn="ctr"/>
@@ -12748,7 +12777,7 @@
           <a:noFill/>
         </p:spPr>
         <p:txBody>
-          <a:bodyPr wrap="square" lIns="0" tIns="0" rIns="0" bIns="0" anchor="t">
+          <a:bodyPr wrap="square" lIns="0" rIns="0" tIns="0" bIns="0" anchor="t">
             <a:spAutoFit/>
           </a:bodyPr>
           <a:lstStyle/>
@@ -12792,7 +12821,7 @@
           <a:noFill/>
         </p:spPr>
         <p:txBody>
-          <a:bodyPr wrap="square" lIns="0" tIns="0" rIns="0" bIns="0" anchor="t">
+          <a:bodyPr wrap="square" lIns="0" rIns="0" tIns="0" bIns="0" anchor="t">
             <a:spAutoFit/>
           </a:bodyPr>
           <a:lstStyle/>
@@ -12856,7 +12885,7 @@
           </a:fontRef>
         </p:style>
         <p:txBody>
-          <a:bodyPr lIns="0" tIns="0" rIns="0" bIns="0" rtlCol="0" anchor="ctr"/>
+          <a:bodyPr rtlCol="0" anchor="ctr" lIns="0" rIns="0" tIns="0" bIns="0"/>
           <a:lstStyle/>
           <a:p>
             <a:pPr algn="ctr"/>
@@ -12891,7 +12920,7 @@
           <a:noFill/>
         </p:spPr>
         <p:txBody>
-          <a:bodyPr wrap="square" lIns="0" tIns="0" rIns="0" bIns="0" anchor="t">
+          <a:bodyPr wrap="square" lIns="0" rIns="0" tIns="0" bIns="0" anchor="t">
             <a:spAutoFit/>
           </a:bodyPr>
           <a:lstStyle/>
@@ -12935,7 +12964,7 @@
           <a:noFill/>
         </p:spPr>
         <p:txBody>
-          <a:bodyPr wrap="square" lIns="0" tIns="0" rIns="0" bIns="0" anchor="t">
+          <a:bodyPr wrap="square" lIns="0" rIns="0" tIns="0" bIns="0" anchor="t">
             <a:spAutoFit/>
           </a:bodyPr>
           <a:lstStyle/>
@@ -12999,7 +13028,7 @@
           </a:fontRef>
         </p:style>
         <p:txBody>
-          <a:bodyPr lIns="0" tIns="0" rIns="0" bIns="0" rtlCol="0" anchor="ctr"/>
+          <a:bodyPr rtlCol="0" anchor="ctr" lIns="0" rIns="0" tIns="0" bIns="0"/>
           <a:lstStyle/>
           <a:p>
             <a:pPr algn="ctr"/>
@@ -13034,7 +13063,7 @@
           <a:noFill/>
         </p:spPr>
         <p:txBody>
-          <a:bodyPr wrap="square" lIns="0" tIns="0" rIns="0" bIns="0" anchor="t">
+          <a:bodyPr wrap="square" lIns="0" rIns="0" tIns="0" bIns="0" anchor="t">
             <a:spAutoFit/>
           </a:bodyPr>
           <a:lstStyle/>
@@ -13078,7 +13107,7 @@
           <a:noFill/>
         </p:spPr>
         <p:txBody>
-          <a:bodyPr wrap="square" lIns="0" tIns="0" rIns="0" bIns="0" anchor="t">
+          <a:bodyPr wrap="square" lIns="0" rIns="0" tIns="0" bIns="0" anchor="t">
             <a:spAutoFit/>
           </a:bodyPr>
           <a:lstStyle/>
@@ -13142,7 +13171,7 @@
           </a:fontRef>
         </p:style>
         <p:txBody>
-          <a:bodyPr lIns="0" tIns="0" rIns="0" bIns="0" rtlCol="0" anchor="ctr"/>
+          <a:bodyPr rtlCol="0" anchor="ctr" lIns="0" rIns="0" tIns="0" bIns="0"/>
           <a:lstStyle/>
           <a:p>
             <a:pPr algn="ctr"/>
@@ -13177,7 +13206,7 @@
           <a:noFill/>
         </p:spPr>
         <p:txBody>
-          <a:bodyPr wrap="square" lIns="0" tIns="0" rIns="0" bIns="0" anchor="t">
+          <a:bodyPr wrap="square" lIns="0" rIns="0" tIns="0" bIns="0" anchor="t">
             <a:spAutoFit/>
           </a:bodyPr>
           <a:lstStyle/>
@@ -13221,7 +13250,7 @@
           <a:noFill/>
         </p:spPr>
         <p:txBody>
-          <a:bodyPr wrap="square" lIns="0" tIns="0" rIns="0" bIns="0" anchor="t">
+          <a:bodyPr wrap="square" lIns="0" rIns="0" tIns="0" bIns="0" anchor="t">
             <a:spAutoFit/>
           </a:bodyPr>
           <a:lstStyle/>
@@ -13265,7 +13294,7 @@
           <a:noFill/>
         </p:spPr>
         <p:txBody>
-          <a:bodyPr wrap="square" lIns="0" tIns="0" rIns="0" bIns="0" anchor="t">
+          <a:bodyPr wrap="square" lIns="0" rIns="0" tIns="0" bIns="0" anchor="t">
             <a:spAutoFit/>
           </a:bodyPr>
           <a:lstStyle/>
@@ -13301,7 +13330,7 @@
 </file>
 
 <file path=ppt/slides/slide2.xml><?xml version="1.0" encoding="utf-8"?>
-<p:sld xmlns:a="http://schemas.openxmlformats.org/drawingml/2006/main" xmlns:r="http://schemas.openxmlformats.org/officeDocument/2006/relationships" xmlns:p="http://schemas.openxmlformats.org/presentationml/2006/main">
+<p:sld xmlns:a="http://schemas.openxmlformats.org/drawingml/2006/main" xmlns:p="http://schemas.openxmlformats.org/presentationml/2006/main" xmlns:r="http://schemas.openxmlformats.org/officeDocument/2006/relationships">
   <p:cSld>
     <p:bg>
       <p:bgPr>
@@ -13317,14 +13346,7 @@
         <p:cNvGrpSpPr/>
         <p:nvPr/>
       </p:nvGrpSpPr>
-      <p:grpSpPr>
-        <a:xfrm>
-          <a:off x="0" y="0"/>
-          <a:ext cx="0" cy="0"/>
-          <a:chOff x="0" y="0"/>
-          <a:chExt cx="0" cy="0"/>
-        </a:xfrm>
-      </p:grpSpPr>
+      <p:grpSpPr/>
       <p:sp>
         <p:nvSpPr>
           <p:cNvPr id="2" name="TextBox 1"/>
@@ -13342,7 +13364,7 @@
           <a:noFill/>
         </p:spPr>
         <p:txBody>
-          <a:bodyPr wrap="square" lIns="0" tIns="0" rIns="0" bIns="0" anchor="t">
+          <a:bodyPr wrap="square" lIns="0" rIns="0" tIns="0" bIns="0" anchor="t">
             <a:spAutoFit/>
           </a:bodyPr>
           <a:lstStyle/>
@@ -13386,7 +13408,7 @@
           <a:noFill/>
         </p:spPr>
         <p:txBody>
-          <a:bodyPr wrap="square" lIns="0" tIns="0" rIns="0" bIns="0" anchor="t">
+          <a:bodyPr wrap="square" lIns="0" rIns="0" tIns="0" bIns="0" anchor="t">
             <a:spAutoFit/>
           </a:bodyPr>
           <a:lstStyle/>
@@ -13454,9 +13476,7 @@
         <p:txBody>
           <a:bodyPr rtlCol="0" anchor="ctr"/>
           <a:lstStyle/>
-          <a:p>
-            <a:endParaRPr/>
-          </a:p>
+          <a:p/>
         </p:txBody>
       </p:sp>
       <p:sp>
@@ -13476,7 +13496,7 @@
           <a:noFill/>
         </p:spPr>
         <p:txBody>
-          <a:bodyPr wrap="square" lIns="0" tIns="0" rIns="0" bIns="0" anchor="t">
+          <a:bodyPr wrap="square" lIns="0" rIns="0" tIns="0" bIns="0" anchor="t">
             <a:spAutoFit/>
           </a:bodyPr>
           <a:lstStyle/>
@@ -13520,7 +13540,7 @@
           <a:noFill/>
         </p:spPr>
         <p:txBody>
-          <a:bodyPr wrap="square" lIns="0" tIns="0" rIns="0" bIns="0" anchor="t">
+          <a:bodyPr wrap="square" lIns="0" rIns="0" tIns="0" bIns="0" anchor="t">
             <a:spAutoFit/>
           </a:bodyPr>
           <a:lstStyle/>
@@ -13589,9 +13609,7 @@
         <p:txBody>
           <a:bodyPr rtlCol="0" anchor="ctr"/>
           <a:lstStyle/>
-          <a:p>
-            <a:endParaRPr/>
-          </a:p>
+          <a:p/>
         </p:txBody>
       </p:sp>
       <p:sp>
@@ -13611,7 +13629,7 @@
           <a:noFill/>
         </p:spPr>
         <p:txBody>
-          <a:bodyPr wrap="square" lIns="0" tIns="0" rIns="0" bIns="0" anchor="t">
+          <a:bodyPr wrap="square" lIns="0" rIns="0" tIns="0" bIns="0" anchor="t">
             <a:spAutoFit/>
           </a:bodyPr>
           <a:lstStyle/>
@@ -13655,7 +13673,7 @@
           <a:noFill/>
         </p:spPr>
         <p:txBody>
-          <a:bodyPr wrap="square" lIns="0" tIns="0" rIns="0" bIns="0" anchor="t">
+          <a:bodyPr wrap="square" lIns="0" rIns="0" tIns="0" bIns="0" anchor="t">
             <a:spAutoFit/>
           </a:bodyPr>
           <a:lstStyle/>
@@ -13724,9 +13742,7 @@
         <p:txBody>
           <a:bodyPr rtlCol="0" anchor="ctr"/>
           <a:lstStyle/>
-          <a:p>
-            <a:endParaRPr/>
-          </a:p>
+          <a:p/>
         </p:txBody>
       </p:sp>
       <p:sp>
@@ -13746,7 +13762,7 @@
           <a:noFill/>
         </p:spPr>
         <p:txBody>
-          <a:bodyPr wrap="square" lIns="0" tIns="0" rIns="0" bIns="0" anchor="t">
+          <a:bodyPr wrap="square" lIns="0" rIns="0" tIns="0" bIns="0" anchor="t">
             <a:spAutoFit/>
           </a:bodyPr>
           <a:lstStyle/>
@@ -13790,7 +13806,7 @@
           <a:noFill/>
         </p:spPr>
         <p:txBody>
-          <a:bodyPr wrap="square" lIns="0" tIns="0" rIns="0" bIns="0" anchor="t">
+          <a:bodyPr wrap="square" lIns="0" rIns="0" tIns="0" bIns="0" anchor="t">
             <a:spAutoFit/>
           </a:bodyPr>
           <a:lstStyle/>
@@ -13859,9 +13875,7 @@
         <p:txBody>
           <a:bodyPr rtlCol="0" anchor="ctr"/>
           <a:lstStyle/>
-          <a:p>
-            <a:endParaRPr/>
-          </a:p>
+          <a:p/>
         </p:txBody>
       </p:sp>
       <p:sp>
@@ -13881,7 +13895,7 @@
           <a:noFill/>
         </p:spPr>
         <p:txBody>
-          <a:bodyPr wrap="square" lIns="0" tIns="0" rIns="0" bIns="0" anchor="t">
+          <a:bodyPr wrap="square" lIns="0" rIns="0" tIns="0" bIns="0" anchor="t">
             <a:spAutoFit/>
           </a:bodyPr>
           <a:lstStyle/>
@@ -13925,7 +13939,7 @@
           <a:noFill/>
         </p:spPr>
         <p:txBody>
-          <a:bodyPr wrap="square" lIns="0" tIns="0" rIns="0" bIns="0" anchor="t">
+          <a:bodyPr wrap="square" lIns="0" rIns="0" tIns="0" bIns="0" anchor="t">
             <a:spAutoFit/>
           </a:bodyPr>
           <a:lstStyle/>
@@ -13970,7 +13984,7 @@
           <a:noFill/>
         </p:spPr>
         <p:txBody>
-          <a:bodyPr wrap="square" lIns="0" tIns="0" rIns="0" bIns="0" anchor="t">
+          <a:bodyPr wrap="square" lIns="0" rIns="0" tIns="0" bIns="0" anchor="t">
             <a:spAutoFit/>
           </a:bodyPr>
           <a:lstStyle/>
@@ -14057,7 +14071,7 @@
           <a:noFill/>
         </p:spPr>
         <p:txBody>
-          <a:bodyPr wrap="square" lIns="0" tIns="0" rIns="0" bIns="0" anchor="t">
+          <a:bodyPr wrap="square" lIns="0" rIns="0" tIns="0" bIns="0" anchor="t">
             <a:spAutoFit/>
           </a:bodyPr>
           <a:lstStyle/>
@@ -14093,7 +14107,7 @@
 </file>
 
 <file path=ppt/slides/slide3.xml><?xml version="1.0" encoding="utf-8"?>
-<p:sld xmlns:a="http://schemas.openxmlformats.org/drawingml/2006/main" xmlns:r="http://schemas.openxmlformats.org/officeDocument/2006/relationships" xmlns:p="http://schemas.openxmlformats.org/presentationml/2006/main">
+<p:sld xmlns:a="http://schemas.openxmlformats.org/drawingml/2006/main" xmlns:p="http://schemas.openxmlformats.org/presentationml/2006/main" xmlns:r="http://schemas.openxmlformats.org/officeDocument/2006/relationships">
   <p:cSld>
     <p:bg>
       <p:bgPr>
@@ -14109,14 +14123,7 @@
         <p:cNvGrpSpPr/>
         <p:nvPr/>
       </p:nvGrpSpPr>
-      <p:grpSpPr>
-        <a:xfrm>
-          <a:off x="0" y="0"/>
-          <a:ext cx="0" cy="0"/>
-          <a:chOff x="0" y="0"/>
-          <a:chExt cx="0" cy="0"/>
-        </a:xfrm>
-      </p:grpSpPr>
+      <p:grpSpPr/>
       <p:sp>
         <p:nvSpPr>
           <p:cNvPr id="2" name="TextBox 1"/>
@@ -14134,7 +14141,7 @@
           <a:noFill/>
         </p:spPr>
         <p:txBody>
-          <a:bodyPr wrap="square" lIns="0" tIns="0" rIns="0" bIns="0" anchor="t">
+          <a:bodyPr wrap="square" lIns="0" rIns="0" tIns="0" bIns="0" anchor="t">
             <a:spAutoFit/>
           </a:bodyPr>
           <a:lstStyle/>
@@ -14178,7 +14185,7 @@
           <a:noFill/>
         </p:spPr>
         <p:txBody>
-          <a:bodyPr wrap="square" lIns="0" tIns="0" rIns="0" bIns="0" anchor="t">
+          <a:bodyPr wrap="square" lIns="0" rIns="0" tIns="0" bIns="0" anchor="t">
             <a:spAutoFit/>
           </a:bodyPr>
           <a:lstStyle/>
@@ -14246,9 +14253,7 @@
         <p:txBody>
           <a:bodyPr rtlCol="0" anchor="ctr"/>
           <a:lstStyle/>
-          <a:p>
-            <a:endParaRPr/>
-          </a:p>
+          <a:p/>
         </p:txBody>
       </p:sp>
       <p:sp>
@@ -14288,7 +14293,7 @@
           </a:fontRef>
         </p:style>
         <p:txBody>
-          <a:bodyPr lIns="0" tIns="0" rIns="0" bIns="0" rtlCol="0" anchor="ctr"/>
+          <a:bodyPr rtlCol="0" anchor="ctr" lIns="0" rIns="0" tIns="0" bIns="0"/>
           <a:lstStyle/>
           <a:p>
             <a:pPr algn="ctr"/>
@@ -14323,7 +14328,7 @@
           <a:noFill/>
         </p:spPr>
         <p:txBody>
-          <a:bodyPr wrap="square" lIns="0" tIns="0" rIns="0" bIns="0" anchor="t">
+          <a:bodyPr wrap="square" lIns="0" rIns="0" tIns="0" bIns="0" anchor="t">
             <a:spAutoFit/>
           </a:bodyPr>
           <a:lstStyle/>
@@ -14367,7 +14372,7 @@
           <a:noFill/>
         </p:spPr>
         <p:txBody>
-          <a:bodyPr wrap="square" lIns="0" tIns="0" rIns="0" bIns="0" anchor="t">
+          <a:bodyPr wrap="square" lIns="0" rIns="0" tIns="0" bIns="0" anchor="t">
             <a:spAutoFit/>
           </a:bodyPr>
           <a:lstStyle/>
@@ -14436,7 +14441,6 @@
           <a:lstStyle/>
           <a:p>
             <a:pPr algn="ctr"/>
-            <a:endParaRPr/>
           </a:p>
         </p:txBody>
       </p:sp>
@@ -14481,9 +14485,7 @@
         <p:txBody>
           <a:bodyPr rtlCol="0" anchor="ctr"/>
           <a:lstStyle/>
-          <a:p>
-            <a:endParaRPr/>
-          </a:p>
+          <a:p/>
         </p:txBody>
       </p:sp>
       <p:sp>
@@ -14523,7 +14525,7 @@
           </a:fontRef>
         </p:style>
         <p:txBody>
-          <a:bodyPr lIns="0" tIns="0" rIns="0" bIns="0" rtlCol="0" anchor="ctr"/>
+          <a:bodyPr rtlCol="0" anchor="ctr" lIns="0" rIns="0" tIns="0" bIns="0"/>
           <a:lstStyle/>
           <a:p>
             <a:pPr algn="ctr"/>
@@ -14558,7 +14560,7 @@
           <a:noFill/>
         </p:spPr>
         <p:txBody>
-          <a:bodyPr wrap="square" lIns="0" tIns="0" rIns="0" bIns="0" anchor="t">
+          <a:bodyPr wrap="square" lIns="0" rIns="0" tIns="0" bIns="0" anchor="t">
             <a:spAutoFit/>
           </a:bodyPr>
           <a:lstStyle/>
@@ -14602,7 +14604,7 @@
           <a:noFill/>
         </p:spPr>
         <p:txBody>
-          <a:bodyPr wrap="square" lIns="0" tIns="0" rIns="0" bIns="0" anchor="t">
+          <a:bodyPr wrap="square" lIns="0" rIns="0" tIns="0" bIns="0" anchor="t">
             <a:spAutoFit/>
           </a:bodyPr>
           <a:lstStyle/>
@@ -14671,7 +14673,6 @@
           <a:lstStyle/>
           <a:p>
             <a:pPr algn="ctr"/>
-            <a:endParaRPr/>
           </a:p>
         </p:txBody>
       </p:sp>
@@ -14716,9 +14717,7 @@
         <p:txBody>
           <a:bodyPr rtlCol="0" anchor="ctr"/>
           <a:lstStyle/>
-          <a:p>
-            <a:endParaRPr/>
-          </a:p>
+          <a:p/>
         </p:txBody>
       </p:sp>
       <p:sp>
@@ -14758,7 +14757,7 @@
           </a:fontRef>
         </p:style>
         <p:txBody>
-          <a:bodyPr lIns="0" tIns="0" rIns="0" bIns="0" rtlCol="0" anchor="ctr"/>
+          <a:bodyPr rtlCol="0" anchor="ctr" lIns="0" rIns="0" tIns="0" bIns="0"/>
           <a:lstStyle/>
           <a:p>
             <a:pPr algn="ctr"/>
@@ -14793,7 +14792,7 @@
           <a:noFill/>
         </p:spPr>
         <p:txBody>
-          <a:bodyPr wrap="square" lIns="0" tIns="0" rIns="0" bIns="0" anchor="t">
+          <a:bodyPr wrap="square" lIns="0" rIns="0" tIns="0" bIns="0" anchor="t">
             <a:spAutoFit/>
           </a:bodyPr>
           <a:lstStyle/>
@@ -14837,7 +14836,7 @@
           <a:noFill/>
         </p:spPr>
         <p:txBody>
-          <a:bodyPr wrap="square" lIns="0" tIns="0" rIns="0" bIns="0" anchor="t">
+          <a:bodyPr wrap="square" lIns="0" rIns="0" tIns="0" bIns="0" anchor="t">
             <a:spAutoFit/>
           </a:bodyPr>
           <a:lstStyle/>
@@ -14906,7 +14905,6 @@
           <a:lstStyle/>
           <a:p>
             <a:pPr algn="ctr"/>
-            <a:endParaRPr/>
           </a:p>
         </p:txBody>
       </p:sp>
@@ -14951,9 +14949,7 @@
         <p:txBody>
           <a:bodyPr rtlCol="0" anchor="ctr"/>
           <a:lstStyle/>
-          <a:p>
-            <a:endParaRPr/>
-          </a:p>
+          <a:p/>
         </p:txBody>
       </p:sp>
       <p:sp>
@@ -14993,7 +14989,7 @@
           </a:fontRef>
         </p:style>
         <p:txBody>
-          <a:bodyPr lIns="0" tIns="0" rIns="0" bIns="0" rtlCol="0" anchor="ctr"/>
+          <a:bodyPr rtlCol="0" anchor="ctr" lIns="0" rIns="0" tIns="0" bIns="0"/>
           <a:lstStyle/>
           <a:p>
             <a:pPr algn="ctr"/>
@@ -15028,7 +15024,7 @@
           <a:noFill/>
         </p:spPr>
         <p:txBody>
-          <a:bodyPr wrap="square" lIns="0" tIns="0" rIns="0" bIns="0" anchor="t">
+          <a:bodyPr wrap="square" lIns="0" rIns="0" tIns="0" bIns="0" anchor="t">
             <a:spAutoFit/>
           </a:bodyPr>
           <a:lstStyle/>
@@ -15072,7 +15068,7 @@
           <a:noFill/>
         </p:spPr>
         <p:txBody>
-          <a:bodyPr wrap="square" lIns="0" tIns="0" rIns="0" bIns="0" anchor="t">
+          <a:bodyPr wrap="square" lIns="0" rIns="0" tIns="0" bIns="0" anchor="t">
             <a:spAutoFit/>
           </a:bodyPr>
           <a:lstStyle/>
@@ -15141,7 +15137,6 @@
           <a:lstStyle/>
           <a:p>
             <a:pPr algn="ctr"/>
-            <a:endParaRPr/>
           </a:p>
         </p:txBody>
       </p:sp>
@@ -15186,9 +15181,7 @@
         <p:txBody>
           <a:bodyPr rtlCol="0" anchor="ctr"/>
           <a:lstStyle/>
-          <a:p>
-            <a:endParaRPr/>
-          </a:p>
+          <a:p/>
         </p:txBody>
       </p:sp>
       <p:sp>
@@ -15228,7 +15221,7 @@
           </a:fontRef>
         </p:style>
         <p:txBody>
-          <a:bodyPr lIns="0" tIns="0" rIns="0" bIns="0" rtlCol="0" anchor="ctr"/>
+          <a:bodyPr rtlCol="0" anchor="ctr" lIns="0" rIns="0" tIns="0" bIns="0"/>
           <a:lstStyle/>
           <a:p>
             <a:pPr algn="ctr"/>
@@ -15263,7 +15256,7 @@
           <a:noFill/>
         </p:spPr>
         <p:txBody>
-          <a:bodyPr wrap="square" lIns="0" tIns="0" rIns="0" bIns="0" anchor="t">
+          <a:bodyPr wrap="square" lIns="0" rIns="0" tIns="0" bIns="0" anchor="t">
             <a:spAutoFit/>
           </a:bodyPr>
           <a:lstStyle/>
@@ -15307,7 +15300,7 @@
           <a:noFill/>
         </p:spPr>
         <p:txBody>
-          <a:bodyPr wrap="square" lIns="0" tIns="0" rIns="0" bIns="0" anchor="t">
+          <a:bodyPr wrap="square" lIns="0" rIns="0" tIns="0" bIns="0" anchor="t">
             <a:spAutoFit/>
           </a:bodyPr>
           <a:lstStyle/>
@@ -15377,9 +15370,7 @@
         <p:txBody>
           <a:bodyPr rtlCol="0" anchor="ctr"/>
           <a:lstStyle/>
-          <a:p>
-            <a:endParaRPr/>
-          </a:p>
+          <a:p/>
         </p:txBody>
       </p:sp>
       <p:sp>
@@ -15399,7 +15390,7 @@
           <a:noFill/>
         </p:spPr>
         <p:txBody>
-          <a:bodyPr wrap="square" lIns="0" tIns="0" rIns="0" bIns="0" anchor="t">
+          <a:bodyPr wrap="square" lIns="0" rIns="0" tIns="0" bIns="0" anchor="t">
             <a:spAutoFit/>
           </a:bodyPr>
           <a:lstStyle/>
@@ -15486,7 +15477,7 @@
           <a:noFill/>
         </p:spPr>
         <p:txBody>
-          <a:bodyPr wrap="square" lIns="0" tIns="0" rIns="0" bIns="0" anchor="t">
+          <a:bodyPr wrap="square" lIns="0" rIns="0" tIns="0" bIns="0" anchor="t">
             <a:spAutoFit/>
           </a:bodyPr>
           <a:lstStyle/>
@@ -15522,7 +15513,7 @@
 </file>
 
 <file path=ppt/slides/slide4.xml><?xml version="1.0" encoding="utf-8"?>
-<p:sld xmlns:a="http://schemas.openxmlformats.org/drawingml/2006/main" xmlns:r="http://schemas.openxmlformats.org/officeDocument/2006/relationships" xmlns:p="http://schemas.openxmlformats.org/presentationml/2006/main">
+<p:sld xmlns:a="http://schemas.openxmlformats.org/drawingml/2006/main" xmlns:p="http://schemas.openxmlformats.org/presentationml/2006/main" xmlns:r="http://schemas.openxmlformats.org/officeDocument/2006/relationships">
   <p:cSld>
     <p:bg>
       <p:bgPr>
@@ -15538,14 +15529,7 @@
         <p:cNvGrpSpPr/>
         <p:nvPr/>
       </p:nvGrpSpPr>
-      <p:grpSpPr>
-        <a:xfrm>
-          <a:off x="0" y="0"/>
-          <a:ext cx="0" cy="0"/>
-          <a:chOff x="0" y="0"/>
-          <a:chExt cx="0" cy="0"/>
-        </a:xfrm>
-      </p:grpSpPr>
+      <p:grpSpPr/>
       <p:sp>
         <p:nvSpPr>
           <p:cNvPr id="2" name="TextBox 1"/>
@@ -15563,7 +15547,7 @@
           <a:noFill/>
         </p:spPr>
         <p:txBody>
-          <a:bodyPr wrap="square" lIns="0" tIns="0" rIns="0" bIns="0" anchor="t">
+          <a:bodyPr wrap="square" lIns="0" rIns="0" tIns="0" bIns="0" anchor="t">
             <a:spAutoFit/>
           </a:bodyPr>
           <a:lstStyle/>
@@ -15607,7 +15591,7 @@
           <a:noFill/>
         </p:spPr>
         <p:txBody>
-          <a:bodyPr wrap="square" lIns="0" tIns="0" rIns="0" bIns="0" anchor="t">
+          <a:bodyPr wrap="square" lIns="0" rIns="0" tIns="0" bIns="0" anchor="t">
             <a:spAutoFit/>
           </a:bodyPr>
           <a:lstStyle/>
@@ -15675,9 +15659,7 @@
         <p:txBody>
           <a:bodyPr rtlCol="0" anchor="ctr"/>
           <a:lstStyle/>
-          <a:p>
-            <a:endParaRPr/>
-          </a:p>
+          <a:p/>
         </p:txBody>
       </p:sp>
       <p:sp>
@@ -15697,7 +15679,7 @@
           <a:noFill/>
         </p:spPr>
         <p:txBody>
-          <a:bodyPr wrap="square" lIns="0" tIns="0" rIns="0" bIns="0" anchor="t">
+          <a:bodyPr wrap="square" lIns="0" rIns="0" tIns="0" bIns="0" anchor="t">
             <a:spAutoFit/>
           </a:bodyPr>
           <a:lstStyle/>
@@ -15741,7 +15723,7 @@
           <a:noFill/>
         </p:spPr>
         <p:txBody>
-          <a:bodyPr wrap="square" lIns="0" tIns="0" rIns="0" bIns="0" anchor="t">
+          <a:bodyPr wrap="square" lIns="0" rIns="0" tIns="0" bIns="0" anchor="t">
             <a:spAutoFit/>
           </a:bodyPr>
           <a:lstStyle/>
@@ -15809,9 +15791,7 @@
         <p:txBody>
           <a:bodyPr rtlCol="0" anchor="ctr"/>
           <a:lstStyle/>
-          <a:p>
-            <a:endParaRPr/>
-          </a:p>
+          <a:p/>
         </p:txBody>
       </p:sp>
       <p:sp>
@@ -15831,7 +15811,7 @@
           <a:noFill/>
         </p:spPr>
         <p:txBody>
-          <a:bodyPr wrap="square" lIns="0" tIns="0" rIns="0" bIns="0" anchor="t">
+          <a:bodyPr wrap="square" lIns="0" rIns="0" tIns="0" bIns="0" anchor="t">
             <a:spAutoFit/>
           </a:bodyPr>
           <a:lstStyle/>
@@ -15875,7 +15855,7 @@
           <a:noFill/>
         </p:spPr>
         <p:txBody>
-          <a:bodyPr wrap="square" lIns="0" tIns="0" rIns="0" bIns="0" anchor="t">
+          <a:bodyPr wrap="square" lIns="0" rIns="0" tIns="0" bIns="0" anchor="t">
             <a:spAutoFit/>
           </a:bodyPr>
           <a:lstStyle/>
@@ -15943,9 +15923,7 @@
         <p:txBody>
           <a:bodyPr rtlCol="0" anchor="ctr"/>
           <a:lstStyle/>
-          <a:p>
-            <a:endParaRPr/>
-          </a:p>
+          <a:p/>
         </p:txBody>
       </p:sp>
       <p:sp>
@@ -15965,7 +15943,7 @@
           <a:noFill/>
         </p:spPr>
         <p:txBody>
-          <a:bodyPr wrap="square" lIns="0" tIns="0" rIns="0" bIns="0" anchor="t">
+          <a:bodyPr wrap="square" lIns="0" rIns="0" tIns="0" bIns="0" anchor="t">
             <a:spAutoFit/>
           </a:bodyPr>
           <a:lstStyle/>
@@ -16009,7 +15987,7 @@
           <a:noFill/>
         </p:spPr>
         <p:txBody>
-          <a:bodyPr wrap="square" lIns="0" tIns="0" rIns="0" bIns="0" anchor="t">
+          <a:bodyPr wrap="square" lIns="0" rIns="0" tIns="0" bIns="0" anchor="t">
             <a:spAutoFit/>
           </a:bodyPr>
           <a:lstStyle/>
@@ -16077,9 +16055,7 @@
         <p:txBody>
           <a:bodyPr rtlCol="0" anchor="ctr"/>
           <a:lstStyle/>
-          <a:p>
-            <a:endParaRPr/>
-          </a:p>
+          <a:p/>
         </p:txBody>
       </p:sp>
       <p:sp>
@@ -16099,7 +16075,7 @@
           <a:noFill/>
         </p:spPr>
         <p:txBody>
-          <a:bodyPr wrap="square" lIns="0" tIns="0" rIns="0" bIns="0" anchor="t">
+          <a:bodyPr wrap="square" lIns="0" rIns="0" tIns="0" bIns="0" anchor="t">
             <a:spAutoFit/>
           </a:bodyPr>
           <a:lstStyle/>
@@ -16143,7 +16119,7 @@
           <a:noFill/>
         </p:spPr>
         <p:txBody>
-          <a:bodyPr wrap="square" lIns="0" tIns="0" rIns="0" bIns="0" anchor="t">
+          <a:bodyPr wrap="square" lIns="0" rIns="0" tIns="0" bIns="0" anchor="t">
             <a:spAutoFit/>
           </a:bodyPr>
           <a:lstStyle/>
@@ -16211,9 +16187,7 @@
         <p:txBody>
           <a:bodyPr rtlCol="0" anchor="ctr"/>
           <a:lstStyle/>
-          <a:p>
-            <a:endParaRPr/>
-          </a:p>
+          <a:p/>
         </p:txBody>
       </p:sp>
       <p:sp>
@@ -16233,7 +16207,7 @@
           <a:noFill/>
         </p:spPr>
         <p:txBody>
-          <a:bodyPr wrap="square" lIns="0" tIns="0" rIns="0" bIns="0" anchor="t">
+          <a:bodyPr wrap="square" lIns="0" rIns="0" tIns="0" bIns="0" anchor="t">
             <a:spAutoFit/>
           </a:bodyPr>
           <a:lstStyle/>
@@ -16277,7 +16251,7 @@
           <a:noFill/>
         </p:spPr>
         <p:txBody>
-          <a:bodyPr wrap="square" lIns="0" tIns="0" rIns="0" bIns="0" anchor="t">
+          <a:bodyPr wrap="square" lIns="0" rIns="0" tIns="0" bIns="0" anchor="t">
             <a:spAutoFit/>
           </a:bodyPr>
           <a:lstStyle/>
@@ -16345,9 +16319,7 @@
         <p:txBody>
           <a:bodyPr rtlCol="0" anchor="ctr"/>
           <a:lstStyle/>
-          <a:p>
-            <a:endParaRPr/>
-          </a:p>
+          <a:p/>
         </p:txBody>
       </p:sp>
       <p:sp>
@@ -16367,7 +16339,7 @@
           <a:noFill/>
         </p:spPr>
         <p:txBody>
-          <a:bodyPr wrap="square" lIns="0" tIns="0" rIns="0" bIns="0" anchor="t">
+          <a:bodyPr wrap="square" lIns="0" rIns="0" tIns="0" bIns="0" anchor="t">
             <a:spAutoFit/>
           </a:bodyPr>
           <a:lstStyle/>
@@ -16411,7 +16383,7 @@
           <a:noFill/>
         </p:spPr>
         <p:txBody>
-          <a:bodyPr wrap="square" lIns="0" tIns="0" rIns="0" bIns="0" anchor="t">
+          <a:bodyPr wrap="square" lIns="0" rIns="0" tIns="0" bIns="0" anchor="t">
             <a:spAutoFit/>
           </a:bodyPr>
           <a:lstStyle/>
@@ -16479,9 +16451,7 @@
         <p:txBody>
           <a:bodyPr rtlCol="0" anchor="ctr"/>
           <a:lstStyle/>
-          <a:p>
-            <a:endParaRPr/>
-          </a:p>
+          <a:p/>
         </p:txBody>
       </p:sp>
       <p:sp>
@@ -16501,7 +16471,7 @@
           <a:noFill/>
         </p:spPr>
         <p:txBody>
-          <a:bodyPr wrap="square" lIns="0" tIns="0" rIns="0" bIns="0" anchor="t">
+          <a:bodyPr wrap="square" lIns="0" rIns="0" tIns="0" bIns="0" anchor="t">
             <a:spAutoFit/>
           </a:bodyPr>
           <a:lstStyle/>
@@ -16545,7 +16515,7 @@
           <a:noFill/>
         </p:spPr>
         <p:txBody>
-          <a:bodyPr wrap="square" lIns="0" tIns="0" rIns="0" bIns="0" anchor="t">
+          <a:bodyPr wrap="square" lIns="0" rIns="0" tIns="0" bIns="0" anchor="t">
             <a:spAutoFit/>
           </a:bodyPr>
           <a:lstStyle/>
@@ -16613,9 +16583,7 @@
         <p:txBody>
           <a:bodyPr rtlCol="0" anchor="ctr"/>
           <a:lstStyle/>
-          <a:p>
-            <a:endParaRPr/>
-          </a:p>
+          <a:p/>
         </p:txBody>
       </p:sp>
       <p:sp>
@@ -16635,7 +16603,7 @@
           <a:noFill/>
         </p:spPr>
         <p:txBody>
-          <a:bodyPr wrap="square" lIns="0" tIns="0" rIns="0" bIns="0" anchor="t">
+          <a:bodyPr wrap="square" lIns="0" rIns="0" tIns="0" bIns="0" anchor="t">
             <a:spAutoFit/>
           </a:bodyPr>
           <a:lstStyle/>
@@ -16679,7 +16647,7 @@
           <a:noFill/>
         </p:spPr>
         <p:txBody>
-          <a:bodyPr wrap="square" lIns="0" tIns="0" rIns="0" bIns="0" anchor="t">
+          <a:bodyPr wrap="square" lIns="0" rIns="0" tIns="0" bIns="0" anchor="t">
             <a:spAutoFit/>
           </a:bodyPr>
           <a:lstStyle/>
@@ -16723,7 +16691,7 @@
           <a:noFill/>
         </p:spPr>
         <p:txBody>
-          <a:bodyPr wrap="square" lIns="0" tIns="0" rIns="0" bIns="0" anchor="t">
+          <a:bodyPr wrap="square" lIns="0" rIns="0" tIns="0" bIns="0" anchor="t">
             <a:spAutoFit/>
           </a:bodyPr>
           <a:lstStyle/>
@@ -16759,7 +16727,7 @@
 </file>
 
 <file path=ppt/slides/slide5.xml><?xml version="1.0" encoding="utf-8"?>
-<p:sld xmlns:a="http://schemas.openxmlformats.org/drawingml/2006/main" xmlns:r="http://schemas.openxmlformats.org/officeDocument/2006/relationships" xmlns:p="http://schemas.openxmlformats.org/presentationml/2006/main">
+<p:sld xmlns:a="http://schemas.openxmlformats.org/drawingml/2006/main" xmlns:p="http://schemas.openxmlformats.org/presentationml/2006/main" xmlns:r="http://schemas.openxmlformats.org/officeDocument/2006/relationships">
   <p:cSld>
     <p:bg>
       <p:bgPr>
@@ -16775,14 +16743,7 @@
         <p:cNvGrpSpPr/>
         <p:nvPr/>
       </p:nvGrpSpPr>
-      <p:grpSpPr>
-        <a:xfrm>
-          <a:off x="0" y="0"/>
-          <a:ext cx="0" cy="0"/>
-          <a:chOff x="0" y="0"/>
-          <a:chExt cx="0" cy="0"/>
-        </a:xfrm>
-      </p:grpSpPr>
+      <p:grpSpPr/>
       <p:sp>
         <p:nvSpPr>
           <p:cNvPr id="2" name="TextBox 1"/>
@@ -16800,7 +16761,7 @@
           <a:noFill/>
         </p:spPr>
         <p:txBody>
-          <a:bodyPr wrap="square" lIns="0" tIns="0" rIns="0" bIns="0" anchor="t">
+          <a:bodyPr wrap="square" lIns="0" rIns="0" tIns="0" bIns="0" anchor="t">
             <a:spAutoFit/>
           </a:bodyPr>
           <a:lstStyle/>
@@ -16844,7 +16805,7 @@
           <a:noFill/>
         </p:spPr>
         <p:txBody>
-          <a:bodyPr wrap="square" lIns="0" tIns="0" rIns="0" bIns="0" anchor="t">
+          <a:bodyPr wrap="square" lIns="0" rIns="0" tIns="0" bIns="0" anchor="t">
             <a:spAutoFit/>
           </a:bodyPr>
           <a:lstStyle/>
@@ -16908,7 +16869,7 @@
           </a:fontRef>
         </p:style>
         <p:txBody>
-          <a:bodyPr lIns="0" tIns="0" rIns="0" bIns="0" rtlCol="0" anchor="ctr"/>
+          <a:bodyPr rtlCol="0" anchor="ctr" lIns="0" rIns="0" tIns="0" bIns="0"/>
           <a:lstStyle/>
           <a:p>
             <a:pPr algn="ctr"/>
@@ -16943,7 +16904,7 @@
           <a:noFill/>
         </p:spPr>
         <p:txBody>
-          <a:bodyPr wrap="square" lIns="0" tIns="0" rIns="0" bIns="0" anchor="t">
+          <a:bodyPr wrap="square" lIns="0" rIns="0" tIns="0" bIns="0" anchor="t">
             <a:spAutoFit/>
           </a:bodyPr>
           <a:lstStyle/>
@@ -16987,7 +16948,7 @@
           <a:noFill/>
         </p:spPr>
         <p:txBody>
-          <a:bodyPr wrap="square" lIns="0" tIns="0" rIns="0" bIns="0" anchor="t">
+          <a:bodyPr wrap="square" lIns="0" rIns="0" tIns="0" bIns="0" anchor="t">
             <a:spAutoFit/>
           </a:bodyPr>
           <a:lstStyle/>
@@ -17051,7 +17012,7 @@
           </a:fontRef>
         </p:style>
         <p:txBody>
-          <a:bodyPr lIns="0" tIns="0" rIns="0" bIns="0" rtlCol="0" anchor="ctr"/>
+          <a:bodyPr rtlCol="0" anchor="ctr" lIns="0" rIns="0" tIns="0" bIns="0"/>
           <a:lstStyle/>
           <a:p>
             <a:pPr algn="ctr"/>
@@ -17086,7 +17047,7 @@
           <a:noFill/>
         </p:spPr>
         <p:txBody>
-          <a:bodyPr wrap="square" lIns="0" tIns="0" rIns="0" bIns="0" anchor="t">
+          <a:bodyPr wrap="square" lIns="0" rIns="0" tIns="0" bIns="0" anchor="t">
             <a:spAutoFit/>
           </a:bodyPr>
           <a:lstStyle/>
@@ -17130,7 +17091,7 @@
           <a:noFill/>
         </p:spPr>
         <p:txBody>
-          <a:bodyPr wrap="square" lIns="0" tIns="0" rIns="0" bIns="0" anchor="t">
+          <a:bodyPr wrap="square" lIns="0" rIns="0" tIns="0" bIns="0" anchor="t">
             <a:spAutoFit/>
           </a:bodyPr>
           <a:lstStyle/>
@@ -17194,7 +17155,7 @@
           </a:fontRef>
         </p:style>
         <p:txBody>
-          <a:bodyPr lIns="0" tIns="0" rIns="0" bIns="0" rtlCol="0" anchor="ctr"/>
+          <a:bodyPr rtlCol="0" anchor="ctr" lIns="0" rIns="0" tIns="0" bIns="0"/>
           <a:lstStyle/>
           <a:p>
             <a:pPr algn="ctr"/>
@@ -17229,7 +17190,7 @@
           <a:noFill/>
         </p:spPr>
         <p:txBody>
-          <a:bodyPr wrap="square" lIns="0" tIns="0" rIns="0" bIns="0" anchor="t">
+          <a:bodyPr wrap="square" lIns="0" rIns="0" tIns="0" bIns="0" anchor="t">
             <a:spAutoFit/>
           </a:bodyPr>
           <a:lstStyle/>
@@ -17273,7 +17234,7 @@
           <a:noFill/>
         </p:spPr>
         <p:txBody>
-          <a:bodyPr wrap="square" lIns="0" tIns="0" rIns="0" bIns="0" anchor="t">
+          <a:bodyPr wrap="square" lIns="0" rIns="0" tIns="0" bIns="0" anchor="t">
             <a:spAutoFit/>
           </a:bodyPr>
           <a:lstStyle/>
@@ -17337,7 +17298,7 @@
           </a:fontRef>
         </p:style>
         <p:txBody>
-          <a:bodyPr lIns="0" tIns="0" rIns="0" bIns="0" rtlCol="0" anchor="ctr"/>
+          <a:bodyPr rtlCol="0" anchor="ctr" lIns="0" rIns="0" tIns="0" bIns="0"/>
           <a:lstStyle/>
           <a:p>
             <a:pPr algn="ctr"/>
@@ -17372,7 +17333,7 @@
           <a:noFill/>
         </p:spPr>
         <p:txBody>
-          <a:bodyPr wrap="square" lIns="0" tIns="0" rIns="0" bIns="0" anchor="t">
+          <a:bodyPr wrap="square" lIns="0" rIns="0" tIns="0" bIns="0" anchor="t">
             <a:spAutoFit/>
           </a:bodyPr>
           <a:lstStyle/>
@@ -17416,7 +17377,7 @@
           <a:noFill/>
         </p:spPr>
         <p:txBody>
-          <a:bodyPr wrap="square" lIns="0" tIns="0" rIns="0" bIns="0" anchor="t">
+          <a:bodyPr wrap="square" lIns="0" rIns="0" tIns="0" bIns="0" anchor="t">
             <a:spAutoFit/>
           </a:bodyPr>
           <a:lstStyle/>
@@ -17480,7 +17441,7 @@
           </a:fontRef>
         </p:style>
         <p:txBody>
-          <a:bodyPr lIns="0" tIns="0" rIns="0" bIns="0" rtlCol="0" anchor="ctr"/>
+          <a:bodyPr rtlCol="0" anchor="ctr" lIns="0" rIns="0" tIns="0" bIns="0"/>
           <a:lstStyle/>
           <a:p>
             <a:pPr algn="ctr"/>
@@ -17515,7 +17476,7 @@
           <a:noFill/>
         </p:spPr>
         <p:txBody>
-          <a:bodyPr wrap="square" lIns="0" tIns="0" rIns="0" bIns="0" anchor="t">
+          <a:bodyPr wrap="square" lIns="0" rIns="0" tIns="0" bIns="0" anchor="t">
             <a:spAutoFit/>
           </a:bodyPr>
           <a:lstStyle/>
@@ -17559,7 +17520,7 @@
           <a:noFill/>
         </p:spPr>
         <p:txBody>
-          <a:bodyPr wrap="square" lIns="0" tIns="0" rIns="0" bIns="0" anchor="t">
+          <a:bodyPr wrap="square" lIns="0" rIns="0" tIns="0" bIns="0" anchor="t">
             <a:spAutoFit/>
           </a:bodyPr>
           <a:lstStyle/>
@@ -17603,7 +17564,7 @@
           <a:noFill/>
         </p:spPr>
         <p:txBody>
-          <a:bodyPr wrap="square" lIns="0" tIns="0" rIns="0" bIns="0" anchor="t">
+          <a:bodyPr wrap="square" lIns="0" rIns="0" tIns="0" bIns="0" anchor="t">
             <a:spAutoFit/>
           </a:bodyPr>
           <a:lstStyle/>
@@ -17639,7 +17600,7 @@
 </file>
 
 <file path=ppt/slides/slide6.xml><?xml version="1.0" encoding="utf-8"?>
-<p:sld xmlns:a="http://schemas.openxmlformats.org/drawingml/2006/main" xmlns:r="http://schemas.openxmlformats.org/officeDocument/2006/relationships" xmlns:p="http://schemas.openxmlformats.org/presentationml/2006/main">
+<p:sld xmlns:a="http://schemas.openxmlformats.org/drawingml/2006/main" xmlns:p="http://schemas.openxmlformats.org/presentationml/2006/main" xmlns:r="http://schemas.openxmlformats.org/officeDocument/2006/relationships">
   <p:cSld>
     <p:bg>
       <p:bgPr>
@@ -17655,14 +17616,7 @@
         <p:cNvGrpSpPr/>
         <p:nvPr/>
       </p:nvGrpSpPr>
-      <p:grpSpPr>
-        <a:xfrm>
-          <a:off x="0" y="0"/>
-          <a:ext cx="0" cy="0"/>
-          <a:chOff x="0" y="0"/>
-          <a:chExt cx="0" cy="0"/>
-        </a:xfrm>
-      </p:grpSpPr>
+      <p:grpSpPr/>
       <p:sp>
         <p:nvSpPr>
           <p:cNvPr id="2" name="TextBox 1"/>
@@ -17680,7 +17634,7 @@
           <a:noFill/>
         </p:spPr>
         <p:txBody>
-          <a:bodyPr wrap="square" lIns="0" tIns="0" rIns="0" bIns="0" anchor="t">
+          <a:bodyPr wrap="square" lIns="0" rIns="0" tIns="0" bIns="0" anchor="t">
             <a:spAutoFit/>
           </a:bodyPr>
           <a:lstStyle/>
@@ -17724,7 +17678,7 @@
           <a:noFill/>
         </p:spPr>
         <p:txBody>
-          <a:bodyPr wrap="square" lIns="0" tIns="0" rIns="0" bIns="0" anchor="t">
+          <a:bodyPr wrap="square" lIns="0" rIns="0" tIns="0" bIns="0" anchor="t">
             <a:spAutoFit/>
           </a:bodyPr>
           <a:lstStyle/>
@@ -17792,9 +17746,7 @@
         <p:txBody>
           <a:bodyPr rtlCol="0" anchor="ctr"/>
           <a:lstStyle/>
-          <a:p>
-            <a:endParaRPr/>
-          </a:p>
+          <a:p/>
         </p:txBody>
       </p:sp>
       <p:cxnSp>
@@ -17954,7 +17906,7 @@
           <a:noFill/>
         </p:spPr>
         <p:txBody>
-          <a:bodyPr wrap="square" lIns="0" tIns="0" rIns="0" bIns="0" anchor="t">
+          <a:bodyPr wrap="square" lIns="0" rIns="0" tIns="0" bIns="0" anchor="t">
             <a:spAutoFit/>
           </a:bodyPr>
           <a:lstStyle/>
@@ -17998,7 +17950,7 @@
           <a:noFill/>
         </p:spPr>
         <p:txBody>
-          <a:bodyPr wrap="square" lIns="0" tIns="0" rIns="0" bIns="0" anchor="t">
+          <a:bodyPr wrap="square" lIns="0" rIns="0" tIns="0" bIns="0" anchor="t">
             <a:spAutoFit/>
           </a:bodyPr>
           <a:lstStyle/>
@@ -18042,7 +17994,7 @@
           <a:noFill/>
         </p:spPr>
         <p:txBody>
-          <a:bodyPr wrap="square" lIns="0" tIns="0" rIns="0" bIns="0" anchor="t">
+          <a:bodyPr wrap="square" lIns="0" rIns="0" tIns="0" bIns="0" anchor="t">
             <a:spAutoFit/>
           </a:bodyPr>
           <a:lstStyle/>
@@ -18087,7 +18039,7 @@
           <a:noFill/>
         </p:spPr>
         <p:txBody>
-          <a:bodyPr wrap="square" lIns="0" tIns="0" rIns="0" bIns="0" anchor="t">
+          <a:bodyPr wrap="square" lIns="0" rIns="0" tIns="0" bIns="0" anchor="t">
             <a:spAutoFit/>
           </a:bodyPr>
           <a:lstStyle/>
@@ -18155,9 +18107,7 @@
         <p:txBody>
           <a:bodyPr rtlCol="0" anchor="ctr"/>
           <a:lstStyle/>
-          <a:p>
-            <a:endParaRPr/>
-          </a:p>
+          <a:p/>
         </p:txBody>
       </p:sp>
       <p:cxnSp>
@@ -18352,7 +18302,7 @@
           <a:noFill/>
         </p:spPr>
         <p:txBody>
-          <a:bodyPr wrap="square" lIns="0" tIns="0" rIns="0" bIns="0" anchor="t">
+          <a:bodyPr wrap="square" lIns="0" rIns="0" tIns="0" bIns="0" anchor="t">
             <a:spAutoFit/>
           </a:bodyPr>
           <a:lstStyle/>
@@ -18396,7 +18346,7 @@
           <a:noFill/>
         </p:spPr>
         <p:txBody>
-          <a:bodyPr wrap="square" lIns="0" tIns="0" rIns="0" bIns="0" anchor="t">
+          <a:bodyPr wrap="square" lIns="0" rIns="0" tIns="0" bIns="0" anchor="t">
             <a:spAutoFit/>
           </a:bodyPr>
           <a:lstStyle/>
@@ -18440,7 +18390,7 @@
           <a:noFill/>
         </p:spPr>
         <p:txBody>
-          <a:bodyPr wrap="square" lIns="0" tIns="0" rIns="0" bIns="0" anchor="t">
+          <a:bodyPr wrap="square" lIns="0" rIns="0" tIns="0" bIns="0" anchor="t">
             <a:spAutoFit/>
           </a:bodyPr>
           <a:lstStyle/>
@@ -18485,7 +18435,7 @@
           <a:noFill/>
         </p:spPr>
         <p:txBody>
-          <a:bodyPr wrap="square" lIns="0" tIns="0" rIns="0" bIns="0" anchor="t">
+          <a:bodyPr wrap="square" lIns="0" rIns="0" tIns="0" bIns="0" anchor="t">
             <a:spAutoFit/>
           </a:bodyPr>
           <a:lstStyle/>
@@ -18553,9 +18503,7 @@
         <p:txBody>
           <a:bodyPr rtlCol="0" anchor="ctr"/>
           <a:lstStyle/>
-          <a:p>
-            <a:endParaRPr/>
-          </a:p>
+          <a:p/>
         </p:txBody>
       </p:sp>
       <p:sp>
@@ -18599,7 +18547,6 @@
           <a:lstStyle/>
           <a:p>
             <a:pPr algn="ctr"/>
-            <a:endParaRPr/>
           </a:p>
         </p:txBody>
       </p:sp>
@@ -18644,7 +18591,6 @@
           <a:lstStyle/>
           <a:p>
             <a:pPr algn="ctr"/>
-            <a:endParaRPr/>
           </a:p>
         </p:txBody>
       </p:sp>
@@ -18689,7 +18635,6 @@
           <a:lstStyle/>
           <a:p>
             <a:pPr algn="ctr"/>
-            <a:endParaRPr/>
           </a:p>
         </p:txBody>
       </p:sp>
@@ -18734,7 +18679,6 @@
           <a:lstStyle/>
           <a:p>
             <a:pPr algn="ctr"/>
-            <a:endParaRPr/>
           </a:p>
         </p:txBody>
       </p:sp>
@@ -18755,7 +18699,7 @@
           <a:noFill/>
         </p:spPr>
         <p:txBody>
-          <a:bodyPr wrap="square" lIns="0" tIns="0" rIns="0" bIns="0" anchor="t">
+          <a:bodyPr wrap="square" lIns="0" rIns="0" tIns="0" bIns="0" anchor="t">
             <a:spAutoFit/>
           </a:bodyPr>
           <a:lstStyle/>
@@ -18799,7 +18743,7 @@
           <a:noFill/>
         </p:spPr>
         <p:txBody>
-          <a:bodyPr wrap="square" lIns="0" tIns="0" rIns="0" bIns="0" anchor="t">
+          <a:bodyPr wrap="square" lIns="0" rIns="0" tIns="0" bIns="0" anchor="t">
             <a:spAutoFit/>
           </a:bodyPr>
           <a:lstStyle/>
@@ -18843,7 +18787,7 @@
           <a:noFill/>
         </p:spPr>
         <p:txBody>
-          <a:bodyPr wrap="square" lIns="0" tIns="0" rIns="0" bIns="0" anchor="t">
+          <a:bodyPr wrap="square" lIns="0" rIns="0" tIns="0" bIns="0" anchor="t">
             <a:spAutoFit/>
           </a:bodyPr>
           <a:lstStyle/>
@@ -18888,7 +18832,7 @@
           <a:noFill/>
         </p:spPr>
         <p:txBody>
-          <a:bodyPr wrap="square" lIns="0" tIns="0" rIns="0" bIns="0" anchor="t">
+          <a:bodyPr wrap="square" lIns="0" rIns="0" tIns="0" bIns="0" anchor="t">
             <a:spAutoFit/>
           </a:bodyPr>
           <a:lstStyle/>
@@ -18956,9 +18900,7 @@
         <p:txBody>
           <a:bodyPr rtlCol="0" anchor="ctr"/>
           <a:lstStyle/>
-          <a:p>
-            <a:endParaRPr/>
-          </a:p>
+          <a:p/>
         </p:txBody>
       </p:sp>
       <p:sp>
@@ -18978,7 +18920,7 @@
           <a:noFill/>
         </p:spPr>
         <p:txBody>
-          <a:bodyPr wrap="square" lIns="0" tIns="0" rIns="0" bIns="0" anchor="t">
+          <a:bodyPr wrap="square" lIns="0" rIns="0" tIns="0" bIns="0" anchor="t">
             <a:spAutoFit/>
           </a:bodyPr>
           <a:lstStyle/>
@@ -19022,7 +18964,7 @@
           <a:noFill/>
         </p:spPr>
         <p:txBody>
-          <a:bodyPr wrap="square" lIns="0" tIns="0" rIns="0" bIns="0" anchor="t">
+          <a:bodyPr wrap="square" lIns="0" rIns="0" tIns="0" bIns="0" anchor="t">
             <a:spAutoFit/>
           </a:bodyPr>
           <a:lstStyle/>
@@ -19066,7 +19008,7 @@
           <a:noFill/>
         </p:spPr>
         <p:txBody>
-          <a:bodyPr wrap="square" lIns="0" tIns="0" rIns="0" bIns="0" anchor="t">
+          <a:bodyPr wrap="square" lIns="0" rIns="0" tIns="0" bIns="0" anchor="t">
             <a:spAutoFit/>
           </a:bodyPr>
           <a:lstStyle/>
@@ -19111,7 +19053,7 @@
           <a:noFill/>
         </p:spPr>
         <p:txBody>
-          <a:bodyPr wrap="square" lIns="0" tIns="0" rIns="0" bIns="0" anchor="t">
+          <a:bodyPr wrap="square" lIns="0" rIns="0" tIns="0" bIns="0" anchor="t">
             <a:spAutoFit/>
           </a:bodyPr>
           <a:lstStyle/>
@@ -19156,7 +19098,7 @@
           <a:noFill/>
         </p:spPr>
         <p:txBody>
-          <a:bodyPr wrap="square" lIns="0" tIns="0" rIns="0" bIns="0" anchor="t">
+          <a:bodyPr wrap="square" lIns="0" rIns="0" tIns="0" bIns="0" anchor="t">
             <a:spAutoFit/>
           </a:bodyPr>
           <a:lstStyle/>
@@ -19200,7 +19142,7 @@
           <a:noFill/>
         </p:spPr>
         <p:txBody>
-          <a:bodyPr wrap="square" lIns="0" tIns="0" rIns="0" bIns="0" anchor="t">
+          <a:bodyPr wrap="square" lIns="0" rIns="0" tIns="0" bIns="0" anchor="t">
             <a:spAutoFit/>
           </a:bodyPr>
           <a:lstStyle/>
@@ -19236,7 +19178,7 @@
 </file>
 
 <file path=ppt/slides/slide7.xml><?xml version="1.0" encoding="utf-8"?>
-<p:sld xmlns:a="http://schemas.openxmlformats.org/drawingml/2006/main" xmlns:r="http://schemas.openxmlformats.org/officeDocument/2006/relationships" xmlns:p="http://schemas.openxmlformats.org/presentationml/2006/main">
+<p:sld xmlns:a="http://schemas.openxmlformats.org/drawingml/2006/main" xmlns:p="http://schemas.openxmlformats.org/presentationml/2006/main" xmlns:r="http://schemas.openxmlformats.org/officeDocument/2006/relationships">
   <p:cSld>
     <p:bg>
       <p:bgPr>
@@ -19252,14 +19194,7 @@
         <p:cNvGrpSpPr/>
         <p:nvPr/>
       </p:nvGrpSpPr>
-      <p:grpSpPr>
-        <a:xfrm>
-          <a:off x="0" y="0"/>
-          <a:ext cx="0" cy="0"/>
-          <a:chOff x="0" y="0"/>
-          <a:chExt cx="0" cy="0"/>
-        </a:xfrm>
-      </p:grpSpPr>
+      <p:grpSpPr/>
       <p:sp>
         <p:nvSpPr>
           <p:cNvPr id="2" name="Oval 1"/>
@@ -19297,7 +19232,7 @@
           </a:fontRef>
         </p:style>
         <p:txBody>
-          <a:bodyPr lIns="0" tIns="0" rIns="0" bIns="0" rtlCol="0" anchor="ctr"/>
+          <a:bodyPr rtlCol="0" anchor="ctr" lIns="0" rIns="0" tIns="0" bIns="0"/>
           <a:lstStyle/>
           <a:p>
             <a:pPr algn="ctr"/>
@@ -19332,7 +19267,7 @@
           <a:noFill/>
         </p:spPr>
         <p:txBody>
-          <a:bodyPr wrap="square" lIns="0" tIns="0" rIns="0" bIns="0" anchor="t">
+          <a:bodyPr wrap="square" lIns="0" rIns="0" tIns="0" bIns="0" anchor="t">
             <a:spAutoFit/>
           </a:bodyPr>
           <a:lstStyle/>
@@ -19376,7 +19311,7 @@
           <a:noFill/>
         </p:spPr>
         <p:txBody>
-          <a:bodyPr wrap="square" lIns="0" tIns="0" rIns="0" bIns="0" anchor="t">
+          <a:bodyPr wrap="square" lIns="0" rIns="0" tIns="0" bIns="0" anchor="t">
             <a:spAutoFit/>
           </a:bodyPr>
           <a:lstStyle/>
@@ -19412,7 +19347,7 @@
 </file>
 
 <file path=ppt/slides/slide8.xml><?xml version="1.0" encoding="utf-8"?>
-<p:sld xmlns:a="http://schemas.openxmlformats.org/drawingml/2006/main" xmlns:r="http://schemas.openxmlformats.org/officeDocument/2006/relationships" xmlns:p="http://schemas.openxmlformats.org/presentationml/2006/main">
+<p:sld xmlns:a="http://schemas.openxmlformats.org/drawingml/2006/main" xmlns:p="http://schemas.openxmlformats.org/presentationml/2006/main" xmlns:r="http://schemas.openxmlformats.org/officeDocument/2006/relationships">
   <p:cSld>
     <p:bg>
       <p:bgPr>
@@ -19428,14 +19363,7 @@
         <p:cNvGrpSpPr/>
         <p:nvPr/>
       </p:nvGrpSpPr>
-      <p:grpSpPr>
-        <a:xfrm>
-          <a:off x="0" y="0"/>
-          <a:ext cx="0" cy="0"/>
-          <a:chOff x="0" y="0"/>
-          <a:chExt cx="0" cy="0"/>
-        </a:xfrm>
-      </p:grpSpPr>
+      <p:grpSpPr/>
       <p:sp>
         <p:nvSpPr>
           <p:cNvPr id="2" name="TextBox 1"/>
@@ -19453,7 +19381,7 @@
           <a:noFill/>
         </p:spPr>
         <p:txBody>
-          <a:bodyPr wrap="square" lIns="0" tIns="0" rIns="0" bIns="0" anchor="t">
+          <a:bodyPr wrap="square" lIns="0" rIns="0" tIns="0" bIns="0" anchor="t">
             <a:spAutoFit/>
           </a:bodyPr>
           <a:lstStyle/>
@@ -19497,7 +19425,7 @@
           <a:noFill/>
         </p:spPr>
         <p:txBody>
-          <a:bodyPr wrap="square" lIns="0" tIns="0" rIns="0" bIns="0" anchor="t">
+          <a:bodyPr wrap="square" lIns="0" rIns="0" tIns="0" bIns="0" anchor="t">
             <a:spAutoFit/>
           </a:bodyPr>
           <a:lstStyle/>
@@ -19565,9 +19493,7 @@
         <p:txBody>
           <a:bodyPr rtlCol="0" anchor="ctr"/>
           <a:lstStyle/>
-          <a:p>
-            <a:endParaRPr/>
-          </a:p>
+          <a:p/>
         </p:txBody>
       </p:sp>
       <p:sp>
@@ -19587,7 +19513,7 @@
           <a:noFill/>
         </p:spPr>
         <p:txBody>
-          <a:bodyPr wrap="square" lIns="0" tIns="0" rIns="0" bIns="0" anchor="t">
+          <a:bodyPr wrap="square" lIns="0" rIns="0" tIns="0" bIns="0" anchor="t">
             <a:spAutoFit/>
           </a:bodyPr>
           <a:lstStyle/>
@@ -19631,7 +19557,7 @@
           <a:noFill/>
         </p:spPr>
         <p:txBody>
-          <a:bodyPr wrap="square" lIns="0" tIns="0" rIns="0" bIns="0" anchor="t">
+          <a:bodyPr wrap="square" lIns="0" rIns="0" tIns="0" bIns="0" anchor="t">
             <a:spAutoFit/>
           </a:bodyPr>
           <a:lstStyle/>
@@ -19699,9 +19625,7 @@
         <p:txBody>
           <a:bodyPr rtlCol="0" anchor="ctr"/>
           <a:lstStyle/>
-          <a:p>
-            <a:endParaRPr/>
-          </a:p>
+          <a:p/>
         </p:txBody>
       </p:sp>
       <p:sp>
@@ -19721,7 +19645,7 @@
           <a:noFill/>
         </p:spPr>
         <p:txBody>
-          <a:bodyPr wrap="square" lIns="0" tIns="0" rIns="0" bIns="0" anchor="t">
+          <a:bodyPr wrap="square" lIns="0" rIns="0" tIns="0" bIns="0" anchor="t">
             <a:spAutoFit/>
           </a:bodyPr>
           <a:lstStyle/>
@@ -19765,7 +19689,7 @@
           <a:noFill/>
         </p:spPr>
         <p:txBody>
-          <a:bodyPr wrap="square" lIns="0" tIns="0" rIns="0" bIns="0" anchor="t">
+          <a:bodyPr wrap="square" lIns="0" rIns="0" tIns="0" bIns="0" anchor="t">
             <a:spAutoFit/>
           </a:bodyPr>
           <a:lstStyle/>
@@ -19833,9 +19757,7 @@
         <p:txBody>
           <a:bodyPr rtlCol="0" anchor="ctr"/>
           <a:lstStyle/>
-          <a:p>
-            <a:endParaRPr/>
-          </a:p>
+          <a:p/>
         </p:txBody>
       </p:sp>
       <p:sp>
@@ -19855,7 +19777,7 @@
           <a:noFill/>
         </p:spPr>
         <p:txBody>
-          <a:bodyPr wrap="square" lIns="0" tIns="0" rIns="0" bIns="0" anchor="t">
+          <a:bodyPr wrap="square" lIns="0" rIns="0" tIns="0" bIns="0" anchor="t">
             <a:spAutoFit/>
           </a:bodyPr>
           <a:lstStyle/>
@@ -19899,7 +19821,7 @@
           <a:noFill/>
         </p:spPr>
         <p:txBody>
-          <a:bodyPr wrap="square" lIns="0" tIns="0" rIns="0" bIns="0" anchor="t">
+          <a:bodyPr wrap="square" lIns="0" rIns="0" tIns="0" bIns="0" anchor="t">
             <a:spAutoFit/>
           </a:bodyPr>
           <a:lstStyle/>
@@ -19967,9 +19889,7 @@
         <p:txBody>
           <a:bodyPr rtlCol="0" anchor="ctr"/>
           <a:lstStyle/>
-          <a:p>
-            <a:endParaRPr/>
-          </a:p>
+          <a:p/>
         </p:txBody>
       </p:sp>
       <p:sp>
@@ -19989,7 +19909,7 @@
           <a:noFill/>
         </p:spPr>
         <p:txBody>
-          <a:bodyPr wrap="square" lIns="0" tIns="0" rIns="0" bIns="0" anchor="t">
+          <a:bodyPr wrap="square" lIns="0" rIns="0" tIns="0" bIns="0" anchor="t">
             <a:spAutoFit/>
           </a:bodyPr>
           <a:lstStyle/>
@@ -20033,7 +19953,7 @@
           <a:noFill/>
         </p:spPr>
         <p:txBody>
-          <a:bodyPr wrap="square" lIns="0" tIns="0" rIns="0" bIns="0" anchor="t">
+          <a:bodyPr wrap="square" lIns="0" rIns="0" tIns="0" bIns="0" anchor="t">
             <a:spAutoFit/>
           </a:bodyPr>
           <a:lstStyle/>
@@ -20101,9 +20021,7 @@
         <p:txBody>
           <a:bodyPr rtlCol="0" anchor="ctr"/>
           <a:lstStyle/>
-          <a:p>
-            <a:endParaRPr/>
-          </a:p>
+          <a:p/>
         </p:txBody>
       </p:sp>
       <p:sp>
@@ -20123,7 +20041,7 @@
           <a:noFill/>
         </p:spPr>
         <p:txBody>
-          <a:bodyPr wrap="square" lIns="0" tIns="0" rIns="0" bIns="0" anchor="t">
+          <a:bodyPr wrap="square" lIns="0" rIns="0" tIns="0" bIns="0" anchor="t">
             <a:spAutoFit/>
           </a:bodyPr>
           <a:lstStyle/>
@@ -20198,7 +20116,7 @@
           </a:fontRef>
         </p:style>
         <p:txBody>
-          <a:bodyPr lIns="0" tIns="0" rIns="0" bIns="0" rtlCol="0" anchor="ctr"/>
+          <a:bodyPr rtlCol="0" anchor="ctr" lIns="0" rIns="0" tIns="0" bIns="0"/>
           <a:lstStyle/>
           <a:p>
             <a:pPr algn="ctr"/>
@@ -20233,7 +20151,7 @@
           <a:noFill/>
         </p:spPr>
         <p:txBody>
-          <a:bodyPr wrap="square" lIns="0" tIns="0" rIns="0" bIns="0" anchor="t">
+          <a:bodyPr wrap="square" lIns="0" rIns="0" tIns="0" bIns="0" anchor="t">
             <a:spAutoFit/>
           </a:bodyPr>
           <a:lstStyle/>
@@ -20297,7 +20215,7 @@
           </a:fontRef>
         </p:style>
         <p:txBody>
-          <a:bodyPr lIns="0" tIns="0" rIns="0" bIns="0" rtlCol="0" anchor="ctr"/>
+          <a:bodyPr rtlCol="0" anchor="ctr" lIns="0" rIns="0" tIns="0" bIns="0"/>
           <a:lstStyle/>
           <a:p>
             <a:pPr algn="ctr"/>
@@ -20332,7 +20250,7 @@
           <a:noFill/>
         </p:spPr>
         <p:txBody>
-          <a:bodyPr wrap="square" lIns="0" tIns="0" rIns="0" bIns="0" anchor="t">
+          <a:bodyPr wrap="square" lIns="0" rIns="0" tIns="0" bIns="0" anchor="t">
             <a:spAutoFit/>
           </a:bodyPr>
           <a:lstStyle/>
@@ -20396,7 +20314,7 @@
           </a:fontRef>
         </p:style>
         <p:txBody>
-          <a:bodyPr lIns="0" tIns="0" rIns="0" bIns="0" rtlCol="0" anchor="ctr"/>
+          <a:bodyPr rtlCol="0" anchor="ctr" lIns="0" rIns="0" tIns="0" bIns="0"/>
           <a:lstStyle/>
           <a:p>
             <a:pPr algn="ctr"/>
@@ -20431,7 +20349,7 @@
           <a:noFill/>
         </p:spPr>
         <p:txBody>
-          <a:bodyPr wrap="square" lIns="0" tIns="0" rIns="0" bIns="0" anchor="t">
+          <a:bodyPr wrap="square" lIns="0" rIns="0" tIns="0" bIns="0" anchor="t">
             <a:spAutoFit/>
           </a:bodyPr>
           <a:lstStyle/>
@@ -20499,9 +20417,7 @@
         <p:txBody>
           <a:bodyPr rtlCol="0" anchor="ctr"/>
           <a:lstStyle/>
-          <a:p>
-            <a:endParaRPr/>
-          </a:p>
+          <a:p/>
         </p:txBody>
       </p:sp>
       <p:sp>
@@ -20521,7 +20437,7 @@
           <a:noFill/>
         </p:spPr>
         <p:txBody>
-          <a:bodyPr wrap="square" lIns="0" tIns="0" rIns="0" bIns="0" anchor="t">
+          <a:bodyPr wrap="square" lIns="0" rIns="0" tIns="0" bIns="0" anchor="t">
             <a:spAutoFit/>
           </a:bodyPr>
           <a:lstStyle/>
@@ -20608,7 +20524,7 @@
           <a:noFill/>
         </p:spPr>
         <p:txBody>
-          <a:bodyPr wrap="square" lIns="0" tIns="0" rIns="0" bIns="0" anchor="t">
+          <a:bodyPr wrap="square" lIns="0" rIns="0" tIns="0" bIns="0" anchor="t">
             <a:spAutoFit/>
           </a:bodyPr>
           <a:lstStyle/>
@@ -20644,7 +20560,7 @@
 </file>
 
 <file path=ppt/slides/slide9.xml><?xml version="1.0" encoding="utf-8"?>
-<p:sld xmlns:a="http://schemas.openxmlformats.org/drawingml/2006/main" xmlns:r="http://schemas.openxmlformats.org/officeDocument/2006/relationships" xmlns:p="http://schemas.openxmlformats.org/presentationml/2006/main">
+<p:sld xmlns:a="http://schemas.openxmlformats.org/drawingml/2006/main" xmlns:p="http://schemas.openxmlformats.org/presentationml/2006/main" xmlns:r="http://schemas.openxmlformats.org/officeDocument/2006/relationships">
   <p:cSld>
     <p:bg>
       <p:bgPr>
@@ -20660,14 +20576,7 @@
         <p:cNvGrpSpPr/>
         <p:nvPr/>
       </p:nvGrpSpPr>
-      <p:grpSpPr>
-        <a:xfrm>
-          <a:off x="0" y="0"/>
-          <a:ext cx="0" cy="0"/>
-          <a:chOff x="0" y="0"/>
-          <a:chExt cx="0" cy="0"/>
-        </a:xfrm>
-      </p:grpSpPr>
+      <p:grpSpPr/>
       <p:sp>
         <p:nvSpPr>
           <p:cNvPr id="2" name="TextBox 1"/>
@@ -20685,7 +20594,7 @@
           <a:noFill/>
         </p:spPr>
         <p:txBody>
-          <a:bodyPr wrap="square" lIns="0" tIns="0" rIns="0" bIns="0" anchor="t">
+          <a:bodyPr wrap="square" lIns="0" rIns="0" tIns="0" bIns="0" anchor="t">
             <a:spAutoFit/>
           </a:bodyPr>
           <a:lstStyle/>
@@ -20729,7 +20638,7 @@
           <a:noFill/>
         </p:spPr>
         <p:txBody>
-          <a:bodyPr wrap="square" lIns="0" tIns="0" rIns="0" bIns="0" anchor="t">
+          <a:bodyPr wrap="square" lIns="0" rIns="0" tIns="0" bIns="0" anchor="t">
             <a:spAutoFit/>
           </a:bodyPr>
           <a:lstStyle/>
@@ -20797,9 +20706,7 @@
         <p:txBody>
           <a:bodyPr rtlCol="0" anchor="ctr"/>
           <a:lstStyle/>
-          <a:p>
-            <a:endParaRPr/>
-          </a:p>
+          <a:p/>
         </p:txBody>
       </p:sp>
       <p:sp>
@@ -20839,7 +20746,7 @@
           </a:fontRef>
         </p:style>
         <p:txBody>
-          <a:bodyPr lIns="0" tIns="0" rIns="0" bIns="0" rtlCol="0" anchor="ctr"/>
+          <a:bodyPr rtlCol="0" anchor="ctr" lIns="0" rIns="0" tIns="0" bIns="0"/>
           <a:lstStyle/>
           <a:p>
             <a:pPr algn="ctr"/>
@@ -20874,7 +20781,7 @@
           <a:noFill/>
         </p:spPr>
         <p:txBody>
-          <a:bodyPr wrap="square" lIns="0" tIns="0" rIns="0" bIns="0" anchor="t">
+          <a:bodyPr wrap="square" lIns="0" rIns="0" tIns="0" bIns="0" anchor="t">
             <a:spAutoFit/>
           </a:bodyPr>
           <a:lstStyle/>
@@ -20918,7 +20825,7 @@
           <a:noFill/>
         </p:spPr>
         <p:txBody>
-          <a:bodyPr wrap="square" lIns="0" tIns="0" rIns="0" bIns="0" anchor="t">
+          <a:bodyPr wrap="square" lIns="0" rIns="0" tIns="0" bIns="0" anchor="t">
             <a:spAutoFit/>
           </a:bodyPr>
           <a:lstStyle/>
@@ -20987,9 +20894,7 @@
         <p:txBody>
           <a:bodyPr rtlCol="0" anchor="ctr"/>
           <a:lstStyle/>
-          <a:p>
-            <a:endParaRPr/>
-          </a:p>
+          <a:p/>
         </p:txBody>
       </p:sp>
       <p:sp>
@@ -21029,7 +20934,7 @@
           </a:fontRef>
         </p:style>
         <p:txBody>
-          <a:bodyPr lIns="0" tIns="0" rIns="0" bIns="0" rtlCol="0" anchor="ctr"/>
+          <a:bodyPr rtlCol="0" anchor="ctr" lIns="0" rIns="0" tIns="0" bIns="0"/>
           <a:lstStyle/>
           <a:p>
             <a:pPr algn="ctr"/>
@@ -21064,7 +20969,7 @@
           <a:noFill/>
         </p:spPr>
         <p:txBody>
-          <a:bodyPr wrap="square" lIns="0" tIns="0" rIns="0" bIns="0" anchor="t">
+          <a:bodyPr wrap="square" lIns="0" rIns="0" tIns="0" bIns="0" anchor="t">
             <a:spAutoFit/>
           </a:bodyPr>
           <a:lstStyle/>
@@ -21108,7 +21013,7 @@
           <a:noFill/>
         </p:spPr>
         <p:txBody>
-          <a:bodyPr wrap="square" lIns="0" tIns="0" rIns="0" bIns="0" anchor="t">
+          <a:bodyPr wrap="square" lIns="0" rIns="0" tIns="0" bIns="0" anchor="t">
             <a:spAutoFit/>
           </a:bodyPr>
           <a:lstStyle/>
@@ -21177,9 +21082,7 @@
         <p:txBody>
           <a:bodyPr rtlCol="0" anchor="ctr"/>
           <a:lstStyle/>
-          <a:p>
-            <a:endParaRPr/>
-          </a:p>
+          <a:p/>
         </p:txBody>
       </p:sp>
       <p:sp>
@@ -21219,7 +21122,7 @@
           </a:fontRef>
         </p:style>
         <p:txBody>
-          <a:bodyPr lIns="0" tIns="0" rIns="0" bIns="0" rtlCol="0" anchor="ctr"/>
+          <a:bodyPr rtlCol="0" anchor="ctr" lIns="0" rIns="0" tIns="0" bIns="0"/>
           <a:lstStyle/>
           <a:p>
             <a:pPr algn="ctr"/>
@@ -21254,7 +21157,7 @@
           <a:noFill/>
         </p:spPr>
         <p:txBody>
-          <a:bodyPr wrap="square" lIns="0" tIns="0" rIns="0" bIns="0" anchor="t">
+          <a:bodyPr wrap="square" lIns="0" rIns="0" tIns="0" bIns="0" anchor="t">
             <a:spAutoFit/>
           </a:bodyPr>
           <a:lstStyle/>
@@ -21298,7 +21201,7 @@
           <a:noFill/>
         </p:spPr>
         <p:txBody>
-          <a:bodyPr wrap="square" lIns="0" tIns="0" rIns="0" bIns="0" anchor="t">
+          <a:bodyPr wrap="square" lIns="0" rIns="0" tIns="0" bIns="0" anchor="t">
             <a:spAutoFit/>
           </a:bodyPr>
           <a:lstStyle/>
@@ -21367,9 +21270,7 @@
         <p:txBody>
           <a:bodyPr rtlCol="0" anchor="ctr"/>
           <a:lstStyle/>
-          <a:p>
-            <a:endParaRPr/>
-          </a:p>
+          <a:p/>
         </p:txBody>
       </p:sp>
       <p:sp>
@@ -21409,7 +21310,7 @@
           </a:fontRef>
         </p:style>
         <p:txBody>
-          <a:bodyPr lIns="0" tIns="0" rIns="0" bIns="0" rtlCol="0" anchor="ctr"/>
+          <a:bodyPr rtlCol="0" anchor="ctr" lIns="0" rIns="0" tIns="0" bIns="0"/>
           <a:lstStyle/>
           <a:p>
             <a:pPr algn="ctr"/>
@@ -21444,7 +21345,7 @@
           <a:noFill/>
         </p:spPr>
         <p:txBody>
-          <a:bodyPr wrap="square" lIns="0" tIns="0" rIns="0" bIns="0" anchor="t">
+          <a:bodyPr wrap="square" lIns="0" rIns="0" tIns="0" bIns="0" anchor="t">
             <a:spAutoFit/>
           </a:bodyPr>
           <a:lstStyle/>
@@ -21488,7 +21389,7 @@
           <a:noFill/>
         </p:spPr>
         <p:txBody>
-          <a:bodyPr wrap="square" lIns="0" tIns="0" rIns="0" bIns="0" anchor="t">
+          <a:bodyPr wrap="square" lIns="0" rIns="0" tIns="0" bIns="0" anchor="t">
             <a:spAutoFit/>
           </a:bodyPr>
           <a:lstStyle/>
@@ -21557,9 +21458,7 @@
         <p:txBody>
           <a:bodyPr rtlCol="0" anchor="ctr"/>
           <a:lstStyle/>
-          <a:p>
-            <a:endParaRPr/>
-          </a:p>
+          <a:p/>
         </p:txBody>
       </p:sp>
       <p:sp>
@@ -21599,7 +21498,7 @@
           </a:fontRef>
         </p:style>
         <p:txBody>
-          <a:bodyPr lIns="0" tIns="0" rIns="0" bIns="0" rtlCol="0" anchor="ctr"/>
+          <a:bodyPr rtlCol="0" anchor="ctr" lIns="0" rIns="0" tIns="0" bIns="0"/>
           <a:lstStyle/>
           <a:p>
             <a:pPr algn="ctr"/>
@@ -21634,7 +21533,7 @@
           <a:noFill/>
         </p:spPr>
         <p:txBody>
-          <a:bodyPr wrap="square" lIns="0" tIns="0" rIns="0" bIns="0" anchor="t">
+          <a:bodyPr wrap="square" lIns="0" rIns="0" tIns="0" bIns="0" anchor="t">
             <a:spAutoFit/>
           </a:bodyPr>
           <a:lstStyle/>
@@ -21678,7 +21577,7 @@
           <a:noFill/>
         </p:spPr>
         <p:txBody>
-          <a:bodyPr wrap="square" lIns="0" tIns="0" rIns="0" bIns="0" anchor="t">
+          <a:bodyPr wrap="square" lIns="0" rIns="0" tIns="0" bIns="0" anchor="t">
             <a:spAutoFit/>
           </a:bodyPr>
           <a:lstStyle/>
@@ -21747,9 +21646,7 @@
         <p:txBody>
           <a:bodyPr rtlCol="0" anchor="ctr"/>
           <a:lstStyle/>
-          <a:p>
-            <a:endParaRPr/>
-          </a:p>
+          <a:p/>
         </p:txBody>
       </p:sp>
       <p:sp>
@@ -21789,7 +21686,7 @@
           </a:fontRef>
         </p:style>
         <p:txBody>
-          <a:bodyPr lIns="0" tIns="0" rIns="0" bIns="0" rtlCol="0" anchor="ctr"/>
+          <a:bodyPr rtlCol="0" anchor="ctr" lIns="0" rIns="0" tIns="0" bIns="0"/>
           <a:lstStyle/>
           <a:p>
             <a:pPr algn="ctr"/>
@@ -21824,7 +21721,7 @@
           <a:noFill/>
         </p:spPr>
         <p:txBody>
-          <a:bodyPr wrap="square" lIns="0" tIns="0" rIns="0" bIns="0" anchor="t">
+          <a:bodyPr wrap="square" lIns="0" rIns="0" tIns="0" bIns="0" anchor="t">
             <a:spAutoFit/>
           </a:bodyPr>
           <a:lstStyle/>
@@ -21868,7 +21765,7 @@
           <a:noFill/>
         </p:spPr>
         <p:txBody>
-          <a:bodyPr wrap="square" lIns="0" tIns="0" rIns="0" bIns="0" anchor="t">
+          <a:bodyPr wrap="square" lIns="0" rIns="0" tIns="0" bIns="0" anchor="t">
             <a:spAutoFit/>
           </a:bodyPr>
           <a:lstStyle/>
@@ -21937,9 +21834,7 @@
         <p:txBody>
           <a:bodyPr rtlCol="0" anchor="ctr"/>
           <a:lstStyle/>
-          <a:p>
-            <a:endParaRPr/>
-          </a:p>
+          <a:p/>
         </p:txBody>
       </p:sp>
       <p:sp>
@@ -21979,7 +21874,7 @@
           </a:fontRef>
         </p:style>
         <p:txBody>
-          <a:bodyPr lIns="0" tIns="0" rIns="0" bIns="0" rtlCol="0" anchor="ctr"/>
+          <a:bodyPr rtlCol="0" anchor="ctr" lIns="0" rIns="0" tIns="0" bIns="0"/>
           <a:lstStyle/>
           <a:p>
             <a:pPr algn="ctr"/>
@@ -22014,7 +21909,7 @@
           <a:noFill/>
         </p:spPr>
         <p:txBody>
-          <a:bodyPr wrap="square" lIns="0" tIns="0" rIns="0" bIns="0" anchor="t">
+          <a:bodyPr wrap="square" lIns="0" rIns="0" tIns="0" bIns="0" anchor="t">
             <a:spAutoFit/>
           </a:bodyPr>
           <a:lstStyle/>
@@ -22059,7 +21954,7 @@
           <a:noFill/>
         </p:spPr>
         <p:txBody>
-          <a:bodyPr wrap="square" lIns="0" tIns="0" rIns="0" bIns="0" anchor="t">
+          <a:bodyPr wrap="square" lIns="0" rIns="0" tIns="0" bIns="0" anchor="t">
             <a:spAutoFit/>
           </a:bodyPr>
           <a:lstStyle/>
@@ -22104,7 +21999,7 @@
           <a:noFill/>
         </p:spPr>
         <p:txBody>
-          <a:bodyPr wrap="square" lIns="0" tIns="0" rIns="0" bIns="0" anchor="t">
+          <a:bodyPr wrap="square" lIns="0" rIns="0" tIns="0" bIns="0" anchor="t">
             <a:spAutoFit/>
           </a:bodyPr>
           <a:lstStyle/>
@@ -22159,7 +22054,7 @@
           <a:noFill/>
         </p:spPr>
         <p:txBody>
-          <a:bodyPr wrap="square" lIns="0" tIns="0" rIns="0" bIns="0" anchor="t">
+          <a:bodyPr wrap="square" lIns="0" rIns="0" tIns="0" bIns="0" anchor="t">
             <a:spAutoFit/>
           </a:bodyPr>
           <a:lstStyle/>
@@ -22525,44 +22420,44 @@
         <a:sysClr val="window" lastClr="FFFFFF"/>
       </a:lt1>
       <a:dk2>
-        <a:srgbClr val="0E2841"/>
+        <a:srgbClr val="1F497D"/>
       </a:dk2>
       <a:lt2>
-        <a:srgbClr val="E8E8E8"/>
+        <a:srgbClr val="EEECE1"/>
       </a:lt2>
       <a:accent1>
-        <a:srgbClr val="156082"/>
+        <a:srgbClr val="4F81BD"/>
       </a:accent1>
       <a:accent2>
-        <a:srgbClr val="E97132"/>
+        <a:srgbClr val="C0504D"/>
       </a:accent2>
       <a:accent3>
-        <a:srgbClr val="196B24"/>
+        <a:srgbClr val="9BBB59"/>
       </a:accent3>
       <a:accent4>
-        <a:srgbClr val="0F9ED5"/>
+        <a:srgbClr val="8064A2"/>
       </a:accent4>
       <a:accent5>
-        <a:srgbClr val="A02B93"/>
+        <a:srgbClr val="4BACC6"/>
       </a:accent5>
       <a:accent6>
-        <a:srgbClr val="4EA72E"/>
+        <a:srgbClr val="F79646"/>
       </a:accent6>
       <a:hlink>
-        <a:srgbClr val="467886"/>
+        <a:srgbClr val="0000FF"/>
       </a:hlink>
       <a:folHlink>
-        <a:srgbClr val="96607D"/>
+        <a:srgbClr val="800080"/>
       </a:folHlink>
     </a:clrScheme>
     <a:fontScheme name="Office">
       <a:majorFont>
-        <a:latin typeface="Aptos Display" panose="02110004020202020204"/>
+        <a:latin typeface="Calibri"/>
         <a:ea typeface=""/>
         <a:cs typeface=""/>
-        <a:font script="Jpan" typeface="游ゴシック Light"/>
+        <a:font script="Jpan" typeface="ＭＳ Ｐゴシック"/>
         <a:font script="Hang" typeface="맑은 고딕"/>
-        <a:font script="Hans" typeface="等线 Light"/>
+        <a:font script="Hans" typeface="宋体"/>
         <a:font script="Hant" typeface="新細明體"/>
         <a:font script="Arab" typeface="Times New Roman"/>
         <a:font script="Hebr" typeface="Times New Roman"/>
@@ -22590,31 +22485,14 @@
         <a:font script="Viet" typeface="Times New Roman"/>
         <a:font script="Uigh" typeface="Microsoft Uighur"/>
         <a:font script="Geor" typeface="Sylfaen"/>
-        <a:font script="Armn" typeface="Arial"/>
-        <a:font script="Bugi" typeface="Leelawadee UI"/>
-        <a:font script="Bopo" typeface="Microsoft JhengHei"/>
-        <a:font script="Java" typeface="Javanese Text"/>
-        <a:font script="Lisu" typeface="Segoe UI"/>
-        <a:font script="Mymr" typeface="Myanmar Text"/>
-        <a:font script="Nkoo" typeface="Ebrima"/>
-        <a:font script="Olck" typeface="Nirmala UI"/>
-        <a:font script="Osma" typeface="Ebrima"/>
-        <a:font script="Phag" typeface="Phagspa"/>
-        <a:font script="Syrn" typeface="Estrangelo Edessa"/>
-        <a:font script="Syrj" typeface="Estrangelo Edessa"/>
-        <a:font script="Syre" typeface="Estrangelo Edessa"/>
-        <a:font script="Sora" typeface="Nirmala UI"/>
-        <a:font script="Tale" typeface="Microsoft Tai Le"/>
-        <a:font script="Talu" typeface="Microsoft New Tai Lue"/>
-        <a:font script="Tfng" typeface="Ebrima"/>
       </a:majorFont>
       <a:minorFont>
-        <a:latin typeface="Aptos" panose="02110004020202020204"/>
+        <a:latin typeface="Calibri"/>
         <a:ea typeface=""/>
         <a:cs typeface=""/>
-        <a:font script="Jpan" typeface="游ゴシック"/>
+        <a:font script="Jpan" typeface="ＭＳ Ｐゴシック"/>
         <a:font script="Hang" typeface="맑은 고딕"/>
-        <a:font script="Hans" typeface="等线"/>
+        <a:font script="Hans" typeface="宋体"/>
         <a:font script="Hant" typeface="新細明體"/>
         <a:font script="Arab" typeface="Arial"/>
         <a:font script="Hebr" typeface="Arial"/>
@@ -22642,23 +22520,6 @@
         <a:font script="Viet" typeface="Arial"/>
         <a:font script="Uigh" typeface="Microsoft Uighur"/>
         <a:font script="Geor" typeface="Sylfaen"/>
-        <a:font script="Armn" typeface="Arial"/>
-        <a:font script="Bugi" typeface="Leelawadee UI"/>
-        <a:font script="Bopo" typeface="Microsoft JhengHei"/>
-        <a:font script="Java" typeface="Javanese Text"/>
-        <a:font script="Lisu" typeface="Segoe UI"/>
-        <a:font script="Mymr" typeface="Myanmar Text"/>
-        <a:font script="Nkoo" typeface="Ebrima"/>
-        <a:font script="Olck" typeface="Nirmala UI"/>
-        <a:font script="Osma" typeface="Ebrima"/>
-        <a:font script="Phag" typeface="Phagspa"/>
-        <a:font script="Syrn" typeface="Estrangelo Edessa"/>
-        <a:font script="Syrj" typeface="Estrangelo Edessa"/>
-        <a:font script="Syre" typeface="Estrangelo Edessa"/>
-        <a:font script="Sora" typeface="Nirmala UI"/>
-        <a:font script="Tale" typeface="Microsoft Tai Le"/>
-        <a:font script="Talu" typeface="Microsoft New Tai Lue"/>
-        <a:font script="Tfng" typeface="Ebrima"/>
       </a:minorFont>
     </a:fontScheme>
     <a:fmtScheme name="Office">
@@ -22670,136 +22531,180 @@
           <a:gsLst>
             <a:gs pos="0">
               <a:schemeClr val="phClr">
-                <a:lumMod val="110000"/>
-                <a:satMod val="105000"/>
-                <a:tint val="67000"/>
+                <a:tint val="50000"/>
+                <a:satMod val="300000"/>
               </a:schemeClr>
             </a:gs>
-            <a:gs pos="50000">
+            <a:gs pos="35000">
               <a:schemeClr val="phClr">
-                <a:lumMod val="105000"/>
-                <a:satMod val="103000"/>
-                <a:tint val="73000"/>
+                <a:tint val="37000"/>
+                <a:satMod val="300000"/>
               </a:schemeClr>
             </a:gs>
             <a:gs pos="100000">
               <a:schemeClr val="phClr">
-                <a:lumMod val="105000"/>
-                <a:satMod val="109000"/>
-                <a:tint val="81000"/>
+                <a:tint val="15000"/>
+                <a:satMod val="350000"/>
               </a:schemeClr>
             </a:gs>
           </a:gsLst>
-          <a:lin ang="5400000" scaled="0"/>
+          <a:lin ang="16200000" scaled="1"/>
         </a:gradFill>
         <a:gradFill rotWithShape="1">
           <a:gsLst>
             <a:gs pos="0">
               <a:schemeClr val="phClr">
-                <a:satMod val="103000"/>
-                <a:lumMod val="102000"/>
-                <a:tint val="94000"/>
-              </a:schemeClr>
-            </a:gs>
-            <a:gs pos="50000">
-              <a:schemeClr val="phClr">
-                <a:satMod val="110000"/>
-                <a:lumMod val="100000"/>
+                <a:tint val="100000"/>
                 <a:shade val="100000"/>
+                <a:satMod val="130000"/>
               </a:schemeClr>
             </a:gs>
             <a:gs pos="100000">
               <a:schemeClr val="phClr">
-                <a:lumMod val="99000"/>
-                <a:satMod val="120000"/>
-                <a:shade val="78000"/>
+                <a:tint val="50000"/>
+                <a:shade val="100000"/>
+                <a:satMod val="350000"/>
               </a:schemeClr>
             </a:gs>
           </a:gsLst>
-          <a:lin ang="5400000" scaled="0"/>
+          <a:lin ang="16200000" scaled="0"/>
         </a:gradFill>
       </a:fillStyleLst>
       <a:lnStyleLst>
-        <a:ln w="12700" cap="flat" cmpd="sng" algn="ctr">
+        <a:ln w="9525" cap="flat" cmpd="sng" algn="ctr">
           <a:solidFill>
-            <a:schemeClr val="phClr"/>
+            <a:schemeClr val="phClr">
+              <a:shade val="95000"/>
+              <a:satMod val="105000"/>
+            </a:schemeClr>
           </a:solidFill>
           <a:prstDash val="solid"/>
-          <a:miter lim="800000"/>
-        </a:ln>
-        <a:ln w="19050" cap="flat" cmpd="sng" algn="ctr">
-          <a:solidFill>
-            <a:schemeClr val="phClr"/>
-          </a:solidFill>
-          <a:prstDash val="solid"/>
-          <a:miter lim="800000"/>
         </a:ln>
         <a:ln w="25400" cap="flat" cmpd="sng" algn="ctr">
           <a:solidFill>
             <a:schemeClr val="phClr"/>
           </a:solidFill>
           <a:prstDash val="solid"/>
-          <a:miter lim="800000"/>
+        </a:ln>
+        <a:ln w="38100" cap="flat" cmpd="sng" algn="ctr">
+          <a:solidFill>
+            <a:schemeClr val="phClr"/>
+          </a:solidFill>
+          <a:prstDash val="solid"/>
         </a:ln>
       </a:lnStyleLst>
       <a:effectStyleLst>
         <a:effectStyle>
-          <a:effectLst/>
-        </a:effectStyle>
-        <a:effectStyle>
-          <a:effectLst/>
+          <a:effectLst>
+            <a:outerShdw blurRad="40000" dist="20000" dir="5400000" rotWithShape="0">
+              <a:srgbClr val="000000">
+                <a:alpha val="38000"/>
+              </a:srgbClr>
+            </a:outerShdw>
+          </a:effectLst>
         </a:effectStyle>
         <a:effectStyle>
           <a:effectLst>
-            <a:outerShdw blurRad="57150" dist="19050" dir="5400000" algn="ctr" rotWithShape="0">
+            <a:outerShdw blurRad="40000" dist="23000" dir="5400000" rotWithShape="0">
               <a:srgbClr val="000000">
-                <a:alpha val="63000"/>
+                <a:alpha val="35000"/>
               </a:srgbClr>
             </a:outerShdw>
           </a:effectLst>
+        </a:effectStyle>
+        <a:effectStyle>
+          <a:effectLst>
+            <a:outerShdw blurRad="40000" dist="23000" dir="5400000" rotWithShape="0">
+              <a:srgbClr val="000000">
+                <a:alpha val="35000"/>
+              </a:srgbClr>
+            </a:outerShdw>
+          </a:effectLst>
+          <a:scene3d>
+            <a:camera prst="orthographicFront">
+              <a:rot lat="0" lon="0" rev="0"/>
+            </a:camera>
+            <a:lightRig rig="threePt" dir="t">
+              <a:rot lat="0" lon="0" rev="1200000"/>
+            </a:lightRig>
+          </a:scene3d>
+          <a:sp3d>
+            <a:bevelT w="63500" h="25400"/>
+          </a:sp3d>
         </a:effectStyle>
       </a:effectStyleLst>
       <a:bgFillStyleLst>
         <a:solidFill>
           <a:schemeClr val="phClr"/>
         </a:solidFill>
-        <a:solidFill>
-          <a:schemeClr val="phClr">
-            <a:tint val="95000"/>
-            <a:satMod val="170000"/>
-          </a:schemeClr>
-        </a:solidFill>
         <a:gradFill rotWithShape="1">
           <a:gsLst>
             <a:gs pos="0">
               <a:schemeClr val="phClr">
-                <a:tint val="93000"/>
-                <a:satMod val="150000"/>
-                <a:shade val="98000"/>
-                <a:lumMod val="102000"/>
+                <a:tint val="40000"/>
+                <a:satMod val="350000"/>
               </a:schemeClr>
             </a:gs>
-            <a:gs pos="50000">
+            <a:gs pos="40000">
               <a:schemeClr val="phClr">
-                <a:tint val="98000"/>
-                <a:satMod val="130000"/>
-                <a:shade val="90000"/>
-                <a:lumMod val="103000"/>
+                <a:tint val="45000"/>
+                <a:shade val="99000"/>
+                <a:satMod val="350000"/>
               </a:schemeClr>
             </a:gs>
             <a:gs pos="100000">
               <a:schemeClr val="phClr">
-                <a:shade val="63000"/>
-                <a:satMod val="120000"/>
+                <a:shade val="20000"/>
+                <a:satMod val="255000"/>
               </a:schemeClr>
             </a:gs>
           </a:gsLst>
-          <a:lin ang="5400000" scaled="0"/>
+          <a:path path="circle">
+            <a:fillToRect l="50000" t="-80000" r="50000" b="180000"/>
+          </a:path>
+        </a:gradFill>
+        <a:gradFill rotWithShape="1">
+          <a:gsLst>
+            <a:gs pos="0">
+              <a:schemeClr val="phClr">
+                <a:tint val="80000"/>
+                <a:satMod val="300000"/>
+              </a:schemeClr>
+            </a:gs>
+            <a:gs pos="100000">
+              <a:schemeClr val="phClr">
+                <a:shade val="30000"/>
+                <a:satMod val="200000"/>
+              </a:schemeClr>
+            </a:gs>
+          </a:gsLst>
+          <a:path path="circle">
+            <a:fillToRect l="50000" t="50000" r="50000" b="50000"/>
+          </a:path>
         </a:gradFill>
       </a:bgFillStyleLst>
     </a:fmtScheme>
   </a:themeElements>
   <a:objectDefaults>
+    <a:spDef>
+      <a:spPr/>
+      <a:bodyPr/>
+      <a:lstStyle/>
+      <a:style>
+        <a:lnRef idx="1">
+          <a:schemeClr val="accent1"/>
+        </a:lnRef>
+        <a:fillRef idx="3">
+          <a:schemeClr val="accent1"/>
+        </a:fillRef>
+        <a:effectRef idx="2">
+          <a:schemeClr val="accent1"/>
+        </a:effectRef>
+        <a:fontRef idx="minor">
+          <a:schemeClr val="lt1"/>
+        </a:fontRef>
+      </a:style>
+    </a:spDef>
     <a:lnDef>
       <a:spPr/>
       <a:bodyPr/>
@@ -22821,10 +22726,5 @@
     </a:lnDef>
   </a:objectDefaults>
   <a:extraClrSchemeLst/>
-  <a:extLst>
-    <a:ext uri="{05A4C25C-085E-4340-85A3-A5531E510DB2}">
-      <thm15:themeFamily xmlns:thm15="http://schemas.microsoft.com/office/thememl/2012/main" name="Office Theme" id="{2E142A2C-CD16-42D6-873A-C26D2A0506FA}" vid="{1BDDFF52-6CD6-40A5-AB3C-68EB2F1E4D0A}"/>
-    </a:ext>
-  </a:extLst>
 </a:theme>
 </file>
--- a/docs/AHTH-Graph-Generator-Training.pptx
+++ b/docs/AHTH-Graph-Generator-Training.pptx
@@ -4713,7 +4713,7 @@
                 <a:ea typeface="Leelawadee UI"/>
                 <a:cs typeface="Leelawadee UI"/>
               </a:rPr>
-              <a:t>Release 1.7 · https://ahth-graph-generator.github.io</a:t>
+              <a:t>Release 1.9 · https://ahth-graph-generator.github.io</a:t>
             </a:r>
           </a:p>
         </p:txBody>

--- a/docs/AHTH-Graph-Generator-Training.pptx
+++ b/docs/AHTH-Graph-Generator-Training.pptx
@@ -5281,7 +5281,7 @@
                 <a:ea typeface="Leelawadee UI"/>
                 <a:cs typeface="Leelawadee UI"/>
               </a:rPr>
-              <a:t>Release 2.0 · https://ahth-graph-generator.github.io</a:t>
+              <a:t>Release 2.1 · https://ahth-graph-generator.github.io</a:t>
             </a:r>
           </a:p>
         </p:txBody>
@@ -22151,7 +22151,7 @@
                 <a:ea typeface="Leelawadee UI"/>
                 <a:cs typeface="Leelawadee UI"/>
               </a:rPr>
-              <a:t>git commit -m "Release 2.0: …"</a:t>
+              <a:t>git commit -m "Release 2.1: …"</a:t>
             </a:r>
           </a:p>
         </p:txBody>

--- a/docs/AHTH-Graph-Generator-Training.pptx
+++ b/docs/AHTH-Graph-Generator-Training.pptx
@@ -5281,7 +5281,7 @@
                 <a:ea typeface="Leelawadee UI"/>
                 <a:cs typeface="Leelawadee UI"/>
               </a:rPr>
-              <a:t>Release 2.1 · https://ahth-graph-generator.github.io</a:t>
+              <a:t>Release 2.2 · https://ahth-graph-generator.github.io</a:t>
             </a:r>
           </a:p>
         </p:txBody>
@@ -22151,7 +22151,7 @@
                 <a:ea typeface="Leelawadee UI"/>
                 <a:cs typeface="Leelawadee UI"/>
               </a:rPr>
-              <a:t>git commit -m "Release 2.1: …"</a:t>
+              <a:t>git commit -m "Release 2.2: …"</a:t>
             </a:r>
           </a:p>
         </p:txBody>

--- a/docs/AHTH-Graph-Generator-Training.pptx
+++ b/docs/AHTH-Graph-Generator-Training.pptx
@@ -5281,7 +5281,7 @@
                 <a:ea typeface="Leelawadee UI"/>
                 <a:cs typeface="Leelawadee UI"/>
               </a:rPr>
-              <a:t>Release 2.2 · https://ahth-graph-generator.github.io</a:t>
+              <a:t>Release 2.3 · https://ahth-graph-generator.github.io</a:t>
             </a:r>
           </a:p>
         </p:txBody>
@@ -22151,7 +22151,7 @@
                 <a:ea typeface="Leelawadee UI"/>
                 <a:cs typeface="Leelawadee UI"/>
               </a:rPr>
-              <a:t>git commit -m "Release 2.2: …"</a:t>
+              <a:t>git commit -m "Release 2.3: …"</a:t>
             </a:r>
           </a:p>
         </p:txBody>

--- a/docs/AHTH-Graph-Generator-Training.pptx
+++ b/docs/AHTH-Graph-Generator-Training.pptx
@@ -5281,7 +5281,7 @@
                 <a:ea typeface="Leelawadee UI"/>
                 <a:cs typeface="Leelawadee UI"/>
               </a:rPr>
-              <a:t>Release 2.3 · https://ahth-graph-generator.github.io</a:t>
+              <a:t>Release 2.4 · https://ahth-graph-generator.github.io</a:t>
             </a:r>
           </a:p>
         </p:txBody>
@@ -22151,7 +22151,7 @@
                 <a:ea typeface="Leelawadee UI"/>
                 <a:cs typeface="Leelawadee UI"/>
               </a:rPr>
-              <a:t>git commit -m "Release 2.3: …"</a:t>
+              <a:t>git commit -m "Release 2.4: …"</a:t>
             </a:r>
           </a:p>
         </p:txBody>

--- a/docs/AHTH-Graph-Generator-Training.pptx
+++ b/docs/AHTH-Graph-Generator-Training.pptx
@@ -5281,7 +5281,7 @@
                 <a:ea typeface="Leelawadee UI"/>
                 <a:cs typeface="Leelawadee UI"/>
               </a:rPr>
-              <a:t>Release 2.4 · https://ahth-graph-generator.github.io</a:t>
+              <a:t>Release 2.5 · https://ahth-graph-generator.github.io</a:t>
             </a:r>
           </a:p>
         </p:txBody>
@@ -22151,7 +22151,7 @@
                 <a:ea typeface="Leelawadee UI"/>
                 <a:cs typeface="Leelawadee UI"/>
               </a:rPr>
-              <a:t>git commit -m "Release 2.4: …"</a:t>
+              <a:t>git commit -m "Release 2.5: …"</a:t>
             </a:r>
           </a:p>
         </p:txBody>

--- a/docs/AHTH-Graph-Generator-Training.pptx
+++ b/docs/AHTH-Graph-Generator-Training.pptx
@@ -5281,7 +5281,7 @@
                 <a:ea typeface="Leelawadee UI"/>
                 <a:cs typeface="Leelawadee UI"/>
               </a:rPr>
-              <a:t>Release 2.5 · https://ahth-graph-generator.github.io</a:t>
+              <a:t>Release 2.6 · https://ahth-graph-generator.github.io</a:t>
             </a:r>
           </a:p>
         </p:txBody>
@@ -22151,7 +22151,7 @@
                 <a:ea typeface="Leelawadee UI"/>
                 <a:cs typeface="Leelawadee UI"/>
               </a:rPr>
-              <a:t>git commit -m "Release 2.5: …"</a:t>
+              <a:t>git commit -m "Release 2.6: …"</a:t>
             </a:r>
           </a:p>
         </p:txBody>
